--- a/Presentasi_Sistem_Kredit_BPR_Wonosobo.pptx
+++ b/Presentasi_Sistem_Kredit_BPR_Wonosobo.pptx
@@ -153,7 +153,7 @@
       </p:grpSpPr>
       <p:sp>
         <p:nvSpPr>
-          <p:cNvPr id="1479789090" name="Header Placeholder 1"/>
+          <p:cNvPr id="148211197" name="Header Placeholder 1"/>
           <p:cNvSpPr>
             <a:spLocks noGrp="1"/>
           </p:cNvSpPr>
@@ -187,7 +187,7 @@
       </p:sp>
       <p:sp>
         <p:nvSpPr>
-          <p:cNvPr id="1305689773" name="Date Placeholder 2"/>
+          <p:cNvPr id="586743454" name="Date Placeholder 2"/>
           <p:cNvSpPr>
             <a:spLocks noGrp="1"/>
           </p:cNvSpPr>
@@ -221,7 +221,7 @@
       </p:sp>
       <p:sp>
         <p:nvSpPr>
-          <p:cNvPr id="1723694279" name="Date Placeholder 2"/>
+          <p:cNvPr id="597906125" name="Date Placeholder 2"/>
           <p:cNvSpPr>
             <a:spLocks noGrp="1"/>
           </p:cNvSpPr>
@@ -255,7 +255,7 @@
       </p:sp>
       <p:sp>
         <p:nvSpPr>
-          <p:cNvPr id="952675999" name="Notes Placeholder 4"/>
+          <p:cNvPr id="296783367" name="Notes Placeholder 4"/>
           <p:cNvSpPr>
             <a:spLocks noGrp="1"/>
           </p:cNvSpPr>
@@ -285,7 +285,7 @@
       </p:sp>
       <p:sp>
         <p:nvSpPr>
-          <p:cNvPr id="63241540" name="Footer Placeholder 5"/>
+          <p:cNvPr id="741195190" name="Footer Placeholder 5"/>
           <p:cNvSpPr>
             <a:spLocks noGrp="1"/>
           </p:cNvSpPr>
@@ -319,7 +319,7 @@
       </p:sp>
       <p:sp>
         <p:nvSpPr>
-          <p:cNvPr id="1599833001" name="Slide Number Placeholder 6"/>
+          <p:cNvPr id="1315415106" name="Slide Number Placeholder 6"/>
           <p:cNvSpPr>
             <a:spLocks noGrp="1"/>
           </p:cNvSpPr>
@@ -468,7 +468,7 @@
       </p:grpSpPr>
       <p:sp>
         <p:nvSpPr>
-          <p:cNvPr id="1477768772" name="Slide Image Placeholder 1"/>
+          <p:cNvPr id="507632136" name="Slide Image Placeholder 1"/>
           <p:cNvSpPr>
             <a:spLocks noChangeAspect="1" noGrp="1" noRot="1"/>
           </p:cNvSpPr>
@@ -480,7 +480,7 @@
       </p:sp>
       <p:sp>
         <p:nvSpPr>
-          <p:cNvPr id="1882291576" name="Notes Placeholder 2"/>
+          <p:cNvPr id="1051523439" name="Notes Placeholder 2"/>
           <p:cNvSpPr>
             <a:spLocks noGrp="1"/>
           </p:cNvSpPr>
@@ -502,7 +502,7 @@
       </p:sp>
       <p:sp>
         <p:nvSpPr>
-          <p:cNvPr id="556969658" name="Slide Number Placeholder 3"/>
+          <p:cNvPr id="1038464323" name="Slide Number Placeholder 3"/>
           <p:cNvSpPr>
             <a:spLocks noGrp="1"/>
           </p:cNvSpPr>
@@ -553,7 +553,7 @@
       </p:grpSpPr>
       <p:sp>
         <p:nvSpPr>
-          <p:cNvPr id="73648382" name="Slide Image Placeholder 1"/>
+          <p:cNvPr id="659614986" name="Slide Image Placeholder 1"/>
           <p:cNvSpPr>
             <a:spLocks noChangeAspect="1" noGrp="1" noRot="1"/>
           </p:cNvSpPr>
@@ -565,7 +565,7 @@
       </p:sp>
       <p:sp>
         <p:nvSpPr>
-          <p:cNvPr id="1485459848" name="Notes Placeholder 2"/>
+          <p:cNvPr id="553134273" name="Notes Placeholder 2"/>
           <p:cNvSpPr>
             <a:spLocks noGrp="1"/>
           </p:cNvSpPr>
@@ -587,7 +587,7 @@
       </p:sp>
       <p:sp>
         <p:nvSpPr>
-          <p:cNvPr id="2074881096" name="Slide Number Placeholder 3"/>
+          <p:cNvPr id="1084201187" name="Slide Number Placeholder 3"/>
           <p:cNvSpPr>
             <a:spLocks noGrp="1"/>
           </p:cNvSpPr>
@@ -638,7 +638,7 @@
       </p:grpSpPr>
       <p:sp>
         <p:nvSpPr>
-          <p:cNvPr id="478452003" name="Slide Image Placeholder 1"/>
+          <p:cNvPr id="1698004292" name="Slide Image Placeholder 1"/>
           <p:cNvSpPr>
             <a:spLocks noChangeAspect="1" noGrp="1" noRot="1"/>
           </p:cNvSpPr>
@@ -650,7 +650,7 @@
       </p:sp>
       <p:sp>
         <p:nvSpPr>
-          <p:cNvPr id="2073345107" name="Notes Placeholder 2"/>
+          <p:cNvPr id="372244852" name="Notes Placeholder 2"/>
           <p:cNvSpPr>
             <a:spLocks noGrp="1"/>
           </p:cNvSpPr>
@@ -672,7 +672,7 @@
       </p:sp>
       <p:sp>
         <p:nvSpPr>
-          <p:cNvPr id="1140236517" name="Slide Number Placeholder 3"/>
+          <p:cNvPr id="1323603253" name="Slide Number Placeholder 3"/>
           <p:cNvSpPr>
             <a:spLocks noGrp="1"/>
           </p:cNvSpPr>
@@ -723,7 +723,7 @@
       </p:grpSpPr>
       <p:sp>
         <p:nvSpPr>
-          <p:cNvPr id="1814541175" name="Slide Image Placeholder 1"/>
+          <p:cNvPr id="227419232" name="Slide Image Placeholder 1"/>
           <p:cNvSpPr>
             <a:spLocks noChangeAspect="1" noGrp="1" noRot="1"/>
           </p:cNvSpPr>
@@ -735,7 +735,7 @@
       </p:sp>
       <p:sp>
         <p:nvSpPr>
-          <p:cNvPr id="2061243388" name="Notes Placeholder 2"/>
+          <p:cNvPr id="2051566605" name="Notes Placeholder 2"/>
           <p:cNvSpPr>
             <a:spLocks noGrp="1"/>
           </p:cNvSpPr>
@@ -757,7 +757,7 @@
       </p:sp>
       <p:sp>
         <p:nvSpPr>
-          <p:cNvPr id="853254815" name="Slide Number Placeholder 3"/>
+          <p:cNvPr id="90025445" name="Slide Number Placeholder 3"/>
           <p:cNvSpPr>
             <a:spLocks noGrp="1"/>
           </p:cNvSpPr>
@@ -808,7 +808,7 @@
       </p:grpSpPr>
       <p:sp>
         <p:nvSpPr>
-          <p:cNvPr id="1028756292" name="Slide Image Placeholder 1"/>
+          <p:cNvPr id="358648851" name="Slide Image Placeholder 1"/>
           <p:cNvSpPr>
             <a:spLocks noChangeAspect="1" noGrp="1" noRot="1"/>
           </p:cNvSpPr>
@@ -820,7 +820,7 @@
       </p:sp>
       <p:sp>
         <p:nvSpPr>
-          <p:cNvPr id="206309746" name="Notes Placeholder 2"/>
+          <p:cNvPr id="1739274436" name="Notes Placeholder 2"/>
           <p:cNvSpPr>
             <a:spLocks noGrp="1"/>
           </p:cNvSpPr>
@@ -842,7 +842,7 @@
       </p:sp>
       <p:sp>
         <p:nvSpPr>
-          <p:cNvPr id="985281401" name="Slide Number Placeholder 3"/>
+          <p:cNvPr id="986465085" name="Slide Number Placeholder 3"/>
           <p:cNvSpPr>
             <a:spLocks noGrp="1"/>
           </p:cNvSpPr>
@@ -893,7 +893,7 @@
       </p:grpSpPr>
       <p:sp>
         <p:nvSpPr>
-          <p:cNvPr id="1726401334" name="Slide Image Placeholder 1"/>
+          <p:cNvPr id="1005085754" name="Slide Image Placeholder 1"/>
           <p:cNvSpPr>
             <a:spLocks noChangeAspect="1" noGrp="1" noRot="1"/>
           </p:cNvSpPr>
@@ -905,7 +905,7 @@
       </p:sp>
       <p:sp>
         <p:nvSpPr>
-          <p:cNvPr id="1165071748" name="Notes Placeholder 2"/>
+          <p:cNvPr id="1810345328" name="Notes Placeholder 2"/>
           <p:cNvSpPr>
             <a:spLocks noGrp="1"/>
           </p:cNvSpPr>
@@ -927,7 +927,7 @@
       </p:sp>
       <p:sp>
         <p:nvSpPr>
-          <p:cNvPr id="840110441" name="Slide Number Placeholder 3"/>
+          <p:cNvPr id="847145241" name="Slide Number Placeholder 3"/>
           <p:cNvSpPr>
             <a:spLocks noGrp="1"/>
           </p:cNvSpPr>
@@ -978,7 +978,7 @@
       </p:grpSpPr>
       <p:sp>
         <p:nvSpPr>
-          <p:cNvPr id="387423166" name="Slide Image Placeholder 1"/>
+          <p:cNvPr id="1391006703" name="Slide Image Placeholder 1"/>
           <p:cNvSpPr>
             <a:spLocks noChangeAspect="1" noGrp="1" noRot="1"/>
           </p:cNvSpPr>
@@ -990,7 +990,7 @@
       </p:sp>
       <p:sp>
         <p:nvSpPr>
-          <p:cNvPr id="1593345548" name="Notes Placeholder 2"/>
+          <p:cNvPr id="117187551" name="Notes Placeholder 2"/>
           <p:cNvSpPr>
             <a:spLocks noGrp="1"/>
           </p:cNvSpPr>
@@ -1012,7 +1012,7 @@
       </p:sp>
       <p:sp>
         <p:nvSpPr>
-          <p:cNvPr id="1606298587" name="Slide Number Placeholder 3"/>
+          <p:cNvPr id="1004856640" name="Slide Number Placeholder 3"/>
           <p:cNvSpPr>
             <a:spLocks noGrp="1"/>
           </p:cNvSpPr>
@@ -1063,7 +1063,7 @@
       </p:grpSpPr>
       <p:sp>
         <p:nvSpPr>
-          <p:cNvPr id="1897079817" name="Slide Image Placeholder 1"/>
+          <p:cNvPr id="1765867356" name="Slide Image Placeholder 1"/>
           <p:cNvSpPr>
             <a:spLocks noChangeAspect="1" noGrp="1" noRot="1"/>
           </p:cNvSpPr>
@@ -1075,7 +1075,7 @@
       </p:sp>
       <p:sp>
         <p:nvSpPr>
-          <p:cNvPr id="554592916" name="Notes Placeholder 2"/>
+          <p:cNvPr id="1719666255" name="Notes Placeholder 2"/>
           <p:cNvSpPr>
             <a:spLocks noGrp="1"/>
           </p:cNvSpPr>
@@ -1097,7 +1097,7 @@
       </p:sp>
       <p:sp>
         <p:nvSpPr>
-          <p:cNvPr id="681574721" name="Slide Number Placeholder 3"/>
+          <p:cNvPr id="1981871219" name="Slide Number Placeholder 3"/>
           <p:cNvSpPr>
             <a:spLocks noGrp="1"/>
           </p:cNvSpPr>
@@ -1148,7 +1148,7 @@
       </p:grpSpPr>
       <p:sp>
         <p:nvSpPr>
-          <p:cNvPr id="250984742" name="Slide Image Placeholder 1"/>
+          <p:cNvPr id="1901316466" name="Slide Image Placeholder 1"/>
           <p:cNvSpPr>
             <a:spLocks noChangeAspect="1" noGrp="1" noRot="1"/>
           </p:cNvSpPr>
@@ -1160,7 +1160,7 @@
       </p:sp>
       <p:sp>
         <p:nvSpPr>
-          <p:cNvPr id="286937718" name="Notes Placeholder 2"/>
+          <p:cNvPr id="222020804" name="Notes Placeholder 2"/>
           <p:cNvSpPr>
             <a:spLocks noGrp="1"/>
           </p:cNvSpPr>
@@ -1182,7 +1182,7 @@
       </p:sp>
       <p:sp>
         <p:nvSpPr>
-          <p:cNvPr id="142425147" name="Slide Number Placeholder 3"/>
+          <p:cNvPr id="1002087700" name="Slide Number Placeholder 3"/>
           <p:cNvSpPr>
             <a:spLocks noGrp="1"/>
           </p:cNvSpPr>
@@ -1233,7 +1233,7 @@
       </p:grpSpPr>
       <p:sp>
         <p:nvSpPr>
-          <p:cNvPr id="596493273" name="Slide Image Placeholder 1"/>
+          <p:cNvPr id="784361132" name="Slide Image Placeholder 1"/>
           <p:cNvSpPr>
             <a:spLocks noChangeAspect="1" noGrp="1" noRot="1"/>
           </p:cNvSpPr>
@@ -1245,7 +1245,7 @@
       </p:sp>
       <p:sp>
         <p:nvSpPr>
-          <p:cNvPr id="1937176083" name="Notes Placeholder 2"/>
+          <p:cNvPr id="189970160" name="Notes Placeholder 2"/>
           <p:cNvSpPr>
             <a:spLocks noGrp="1"/>
           </p:cNvSpPr>
@@ -1267,7 +1267,7 @@
       </p:sp>
       <p:sp>
         <p:nvSpPr>
-          <p:cNvPr id="382362639" name="Slide Number Placeholder 3"/>
+          <p:cNvPr id="1580972948" name="Slide Number Placeholder 3"/>
           <p:cNvSpPr>
             <a:spLocks noGrp="1"/>
           </p:cNvSpPr>
@@ -1318,7 +1318,7 @@
       </p:grpSpPr>
       <p:sp>
         <p:nvSpPr>
-          <p:cNvPr id="1870780613" name="Slide Image Placeholder 1"/>
+          <p:cNvPr id="1492956289" name="Slide Image Placeholder 1"/>
           <p:cNvSpPr>
             <a:spLocks noChangeAspect="1" noGrp="1" noRot="1"/>
           </p:cNvSpPr>
@@ -1330,7 +1330,7 @@
       </p:sp>
       <p:sp>
         <p:nvSpPr>
-          <p:cNvPr id="1362208723" name="Notes Placeholder 2"/>
+          <p:cNvPr id="1671873085" name="Notes Placeholder 2"/>
           <p:cNvSpPr>
             <a:spLocks noGrp="1"/>
           </p:cNvSpPr>
@@ -1352,7 +1352,7 @@
       </p:sp>
       <p:sp>
         <p:nvSpPr>
-          <p:cNvPr id="1684606238" name="Slide Number Placeholder 3"/>
+          <p:cNvPr id="1649456119" name="Slide Number Placeholder 3"/>
           <p:cNvSpPr>
             <a:spLocks noGrp="1"/>
           </p:cNvSpPr>
@@ -1403,7 +1403,7 @@
       </p:grpSpPr>
       <p:sp>
         <p:nvSpPr>
-          <p:cNvPr id="750933477" name="Slide Image Placeholder 1"/>
+          <p:cNvPr id="778051784" name="Slide Image Placeholder 1"/>
           <p:cNvSpPr>
             <a:spLocks noChangeAspect="1" noGrp="1" noRot="1"/>
           </p:cNvSpPr>
@@ -1415,7 +1415,7 @@
       </p:sp>
       <p:sp>
         <p:nvSpPr>
-          <p:cNvPr id="232418386" name="Notes Placeholder 2"/>
+          <p:cNvPr id="583863332" name="Notes Placeholder 2"/>
           <p:cNvSpPr>
             <a:spLocks noGrp="1"/>
           </p:cNvSpPr>
@@ -1437,7 +1437,7 @@
       </p:sp>
       <p:sp>
         <p:nvSpPr>
-          <p:cNvPr id="1652409811" name="Slide Number Placeholder 3"/>
+          <p:cNvPr id="1591778397" name="Slide Number Placeholder 3"/>
           <p:cNvSpPr>
             <a:spLocks noGrp="1"/>
           </p:cNvSpPr>
@@ -1488,7 +1488,7 @@
       </p:grpSpPr>
       <p:sp>
         <p:nvSpPr>
-          <p:cNvPr id="809022021" name="Slide Image Placeholder 1"/>
+          <p:cNvPr id="431905221" name="Slide Image Placeholder 1"/>
           <p:cNvSpPr>
             <a:spLocks noChangeAspect="1" noGrp="1" noRot="1"/>
           </p:cNvSpPr>
@@ -1500,7 +1500,7 @@
       </p:sp>
       <p:sp>
         <p:nvSpPr>
-          <p:cNvPr id="1968057022" name="Notes Placeholder 2"/>
+          <p:cNvPr id="306758142" name="Notes Placeholder 2"/>
           <p:cNvSpPr>
             <a:spLocks noGrp="1"/>
           </p:cNvSpPr>
@@ -1522,7 +1522,7 @@
       </p:sp>
       <p:sp>
         <p:nvSpPr>
-          <p:cNvPr id="2111896864" name="Slide Number Placeholder 3"/>
+          <p:cNvPr id="296784093" name="Slide Number Placeholder 3"/>
           <p:cNvSpPr>
             <a:spLocks noGrp="1"/>
           </p:cNvSpPr>
@@ -1573,7 +1573,7 @@
       </p:grpSpPr>
       <p:sp>
         <p:nvSpPr>
-          <p:cNvPr id="805400462" name="Slide Image Placeholder 1"/>
+          <p:cNvPr id="1585144065" name="Slide Image Placeholder 1"/>
           <p:cNvSpPr>
             <a:spLocks noChangeAspect="1" noGrp="1" noRot="1"/>
           </p:cNvSpPr>
@@ -1585,7 +1585,7 @@
       </p:sp>
       <p:sp>
         <p:nvSpPr>
-          <p:cNvPr id="1768131922" name="Notes Placeholder 2"/>
+          <p:cNvPr id="1436304192" name="Notes Placeholder 2"/>
           <p:cNvSpPr>
             <a:spLocks noGrp="1"/>
           </p:cNvSpPr>
@@ -1607,7 +1607,7 @@
       </p:sp>
       <p:sp>
         <p:nvSpPr>
-          <p:cNvPr id="115478368" name="Slide Number Placeholder 3"/>
+          <p:cNvPr id="2075028110" name="Slide Number Placeholder 3"/>
           <p:cNvSpPr>
             <a:spLocks noGrp="1"/>
           </p:cNvSpPr>
@@ -1658,7 +1658,7 @@
       </p:grpSpPr>
       <p:sp>
         <p:nvSpPr>
-          <p:cNvPr id="1195764740" name="Slide Image Placeholder 1"/>
+          <p:cNvPr id="702350625" name="Slide Image Placeholder 1"/>
           <p:cNvSpPr>
             <a:spLocks noChangeAspect="1" noGrp="1" noRot="1"/>
           </p:cNvSpPr>
@@ -1670,7 +1670,7 @@
       </p:sp>
       <p:sp>
         <p:nvSpPr>
-          <p:cNvPr id="1129736447" name="Notes Placeholder 2"/>
+          <p:cNvPr id="1715616374" name="Notes Placeholder 2"/>
           <p:cNvSpPr>
             <a:spLocks noGrp="1"/>
           </p:cNvSpPr>
@@ -1692,7 +1692,7 @@
       </p:sp>
       <p:sp>
         <p:nvSpPr>
-          <p:cNvPr id="1553520228" name="Slide Number Placeholder 3"/>
+          <p:cNvPr id="690887486" name="Slide Number Placeholder 3"/>
           <p:cNvSpPr>
             <a:spLocks noGrp="1"/>
           </p:cNvSpPr>
@@ -1743,7 +1743,7 @@
       </p:grpSpPr>
       <p:sp>
         <p:nvSpPr>
-          <p:cNvPr id="1083069148" name="Slide Image Placeholder 1"/>
+          <p:cNvPr id="632890926" name="Slide Image Placeholder 1"/>
           <p:cNvSpPr>
             <a:spLocks noChangeAspect="1" noGrp="1" noRot="1"/>
           </p:cNvSpPr>
@@ -1755,7 +1755,7 @@
       </p:sp>
       <p:sp>
         <p:nvSpPr>
-          <p:cNvPr id="1083403130" name="Notes Placeholder 2"/>
+          <p:cNvPr id="4430686" name="Notes Placeholder 2"/>
           <p:cNvSpPr>
             <a:spLocks noGrp="1"/>
           </p:cNvSpPr>
@@ -1777,7 +1777,7 @@
       </p:sp>
       <p:sp>
         <p:nvSpPr>
-          <p:cNvPr id="1891997815" name="Slide Number Placeholder 3"/>
+          <p:cNvPr id="2116037121" name="Slide Number Placeholder 3"/>
           <p:cNvSpPr>
             <a:spLocks noGrp="1"/>
           </p:cNvSpPr>
@@ -1828,7 +1828,7 @@
       </p:grpSpPr>
       <p:sp>
         <p:nvSpPr>
-          <p:cNvPr id="1160995608" name="Slide Image Placeholder 1"/>
+          <p:cNvPr id="561336968" name="Slide Image Placeholder 1"/>
           <p:cNvSpPr>
             <a:spLocks noChangeAspect="1" noGrp="1" noRot="1"/>
           </p:cNvSpPr>
@@ -1840,7 +1840,7 @@
       </p:sp>
       <p:sp>
         <p:nvSpPr>
-          <p:cNvPr id="1275192832" name="Notes Placeholder 2"/>
+          <p:cNvPr id="131261277" name="Notes Placeholder 2"/>
           <p:cNvSpPr>
             <a:spLocks noGrp="1"/>
           </p:cNvSpPr>
@@ -1862,7 +1862,7 @@
       </p:sp>
       <p:sp>
         <p:nvSpPr>
-          <p:cNvPr id="289677109" name="Slide Number Placeholder 3"/>
+          <p:cNvPr id="835644658" name="Slide Number Placeholder 3"/>
           <p:cNvSpPr>
             <a:spLocks noGrp="1"/>
           </p:cNvSpPr>
@@ -1913,7 +1913,7 @@
       </p:grpSpPr>
       <p:sp>
         <p:nvSpPr>
-          <p:cNvPr id="1870435206" name="Slide Image Placeholder 1"/>
+          <p:cNvPr id="1561409347" name="Slide Image Placeholder 1"/>
           <p:cNvSpPr>
             <a:spLocks noChangeAspect="1" noGrp="1" noRot="1"/>
           </p:cNvSpPr>
@@ -1925,7 +1925,7 @@
       </p:sp>
       <p:sp>
         <p:nvSpPr>
-          <p:cNvPr id="1547397851" name="Notes Placeholder 2"/>
+          <p:cNvPr id="1687322924" name="Notes Placeholder 2"/>
           <p:cNvSpPr>
             <a:spLocks noGrp="1"/>
           </p:cNvSpPr>
@@ -1947,7 +1947,7 @@
       </p:sp>
       <p:sp>
         <p:nvSpPr>
-          <p:cNvPr id="209129879" name="Slide Number Placeholder 3"/>
+          <p:cNvPr id="1938134715" name="Slide Number Placeholder 3"/>
           <p:cNvSpPr>
             <a:spLocks noGrp="1"/>
           </p:cNvSpPr>
@@ -1998,7 +1998,7 @@
       </p:grpSpPr>
       <p:sp>
         <p:nvSpPr>
-          <p:cNvPr id="2056900314" name="Slide Image Placeholder 1"/>
+          <p:cNvPr id="510961082" name="Slide Image Placeholder 1"/>
           <p:cNvSpPr>
             <a:spLocks noChangeAspect="1" noGrp="1" noRot="1"/>
           </p:cNvSpPr>
@@ -2010,7 +2010,7 @@
       </p:sp>
       <p:sp>
         <p:nvSpPr>
-          <p:cNvPr id="459963764" name="Notes Placeholder 2"/>
+          <p:cNvPr id="396804349" name="Notes Placeholder 2"/>
           <p:cNvSpPr>
             <a:spLocks noGrp="1"/>
           </p:cNvSpPr>
@@ -2032,7 +2032,7 @@
       </p:sp>
       <p:sp>
         <p:nvSpPr>
-          <p:cNvPr id="1280417341" name="Slide Number Placeholder 3"/>
+          <p:cNvPr id="1596195977" name="Slide Number Placeholder 3"/>
           <p:cNvSpPr>
             <a:spLocks noGrp="1"/>
           </p:cNvSpPr>
@@ -2083,7 +2083,7 @@
       </p:grpSpPr>
       <p:sp>
         <p:nvSpPr>
-          <p:cNvPr id="1147015267" name="Slide Image Placeholder 1"/>
+          <p:cNvPr id="367138352" name="Slide Image Placeholder 1"/>
           <p:cNvSpPr>
             <a:spLocks noChangeAspect="1" noGrp="1" noRot="1"/>
           </p:cNvSpPr>
@@ -2095,7 +2095,7 @@
       </p:sp>
       <p:sp>
         <p:nvSpPr>
-          <p:cNvPr id="2074272361" name="Notes Placeholder 2"/>
+          <p:cNvPr id="104538757" name="Notes Placeholder 2"/>
           <p:cNvSpPr>
             <a:spLocks noGrp="1"/>
           </p:cNvSpPr>
@@ -2117,7 +2117,7 @@
       </p:sp>
       <p:sp>
         <p:nvSpPr>
-          <p:cNvPr id="868272841" name="Slide Number Placeholder 3"/>
+          <p:cNvPr id="65899108" name="Slide Number Placeholder 3"/>
           <p:cNvSpPr>
             <a:spLocks noGrp="1"/>
           </p:cNvSpPr>
@@ -2168,7 +2168,7 @@
       </p:grpSpPr>
       <p:sp>
         <p:nvSpPr>
-          <p:cNvPr id="154461422" name="Title 1"/>
+          <p:cNvPr id="425221148" name="Title 1"/>
           <p:cNvSpPr>
             <a:spLocks noGrp="1"/>
           </p:cNvSpPr>
@@ -2199,7 +2199,7 @@
       </p:sp>
       <p:sp>
         <p:nvSpPr>
-          <p:cNvPr id="82060834" name="Subtitle 2"/>
+          <p:cNvPr id="1963188361" name="Subtitle 2"/>
           <p:cNvSpPr>
             <a:spLocks noGrp="1"/>
           </p:cNvSpPr>
@@ -2321,7 +2321,7 @@
       </p:sp>
       <p:sp>
         <p:nvSpPr>
-          <p:cNvPr id="327832024" name="Date Placeholder 3"/>
+          <p:cNvPr id="412106486" name="Date Placeholder 3"/>
           <p:cNvSpPr>
             <a:spLocks noGrp="1"/>
           </p:cNvSpPr>
@@ -2347,7 +2347,7 @@
       </p:sp>
       <p:sp>
         <p:nvSpPr>
-          <p:cNvPr id="1416004198" name="Footer Placeholder 4"/>
+          <p:cNvPr id="201121822" name="Footer Placeholder 4"/>
           <p:cNvSpPr>
             <a:spLocks noGrp="1"/>
           </p:cNvSpPr>
@@ -2369,7 +2369,7 @@
       </p:sp>
       <p:sp>
         <p:nvSpPr>
-          <p:cNvPr id="1845461070" name="Slide Number Placeholder 5"/>
+          <p:cNvPr id="2108630844" name="Slide Number Placeholder 5"/>
           <p:cNvSpPr>
             <a:spLocks noGrp="1"/>
           </p:cNvSpPr>
@@ -2420,7 +2420,7 @@
       </p:grpSpPr>
       <p:sp>
         <p:nvSpPr>
-          <p:cNvPr id="1131901479" name="Title 1"/>
+          <p:cNvPr id="399620769" name="Title 1"/>
           <p:cNvSpPr>
             <a:spLocks noGrp="1"/>
           </p:cNvSpPr>
@@ -2446,7 +2446,7 @@
       </p:sp>
       <p:sp>
         <p:nvSpPr>
-          <p:cNvPr id="1167690826" name="Vertical Text Placeholder 2"/>
+          <p:cNvPr id="757122143" name="Vertical Text Placeholder 2"/>
           <p:cNvSpPr>
             <a:spLocks noGrp="1"/>
           </p:cNvSpPr>
@@ -2512,7 +2512,7 @@
       </p:sp>
       <p:sp>
         <p:nvSpPr>
-          <p:cNvPr id="36174034" name="Date Placeholder 3"/>
+          <p:cNvPr id="595736376" name="Date Placeholder 3"/>
           <p:cNvSpPr>
             <a:spLocks noGrp="1"/>
           </p:cNvSpPr>
@@ -2538,7 +2538,7 @@
       </p:sp>
       <p:sp>
         <p:nvSpPr>
-          <p:cNvPr id="334942796" name="Footer Placeholder 4"/>
+          <p:cNvPr id="1101858275" name="Footer Placeholder 4"/>
           <p:cNvSpPr>
             <a:spLocks noGrp="1"/>
           </p:cNvSpPr>
@@ -2560,7 +2560,7 @@
       </p:sp>
       <p:sp>
         <p:nvSpPr>
-          <p:cNvPr id="30829107" name="Slide Number Placeholder 5"/>
+          <p:cNvPr id="640994295" name="Slide Number Placeholder 5"/>
           <p:cNvSpPr>
             <a:spLocks noGrp="1"/>
           </p:cNvSpPr>
@@ -2611,7 +2611,7 @@
       </p:grpSpPr>
       <p:sp>
         <p:nvSpPr>
-          <p:cNvPr id="1117323109" name="Vertical Title 1"/>
+          <p:cNvPr id="539363026" name="Vertical Title 1"/>
           <p:cNvSpPr>
             <a:spLocks noGrp="1"/>
           </p:cNvSpPr>
@@ -2642,7 +2642,7 @@
       </p:sp>
       <p:sp>
         <p:nvSpPr>
-          <p:cNvPr id="565150772" name="Vertical Text Placeholder 2"/>
+          <p:cNvPr id="381152489" name="Vertical Text Placeholder 2"/>
           <p:cNvSpPr>
             <a:spLocks noGrp="1"/>
           </p:cNvSpPr>
@@ -2713,7 +2713,7 @@
       </p:sp>
       <p:sp>
         <p:nvSpPr>
-          <p:cNvPr id="97125789" name="Date Placeholder 3"/>
+          <p:cNvPr id="771587024" name="Date Placeholder 3"/>
           <p:cNvSpPr>
             <a:spLocks noGrp="1"/>
           </p:cNvSpPr>
@@ -2739,7 +2739,7 @@
       </p:sp>
       <p:sp>
         <p:nvSpPr>
-          <p:cNvPr id="829576065" name="Footer Placeholder 4"/>
+          <p:cNvPr id="946525214" name="Footer Placeholder 4"/>
           <p:cNvSpPr>
             <a:spLocks noGrp="1"/>
           </p:cNvSpPr>
@@ -2761,7 +2761,7 @@
       </p:sp>
       <p:sp>
         <p:nvSpPr>
-          <p:cNvPr id="2000407852" name="Slide Number Placeholder 5"/>
+          <p:cNvPr id="2042754166" name="Slide Number Placeholder 5"/>
           <p:cNvSpPr>
             <a:spLocks noGrp="1"/>
           </p:cNvSpPr>
@@ -2812,7 +2812,7 @@
       </p:grpSpPr>
       <p:sp>
         <p:nvSpPr>
-          <p:cNvPr id="1715223767" name="Title 1"/>
+          <p:cNvPr id="814138454" name="Title 1"/>
           <p:cNvSpPr>
             <a:spLocks noGrp="1"/>
           </p:cNvSpPr>
@@ -2838,7 +2838,7 @@
       </p:sp>
       <p:sp>
         <p:nvSpPr>
-          <p:cNvPr id="484056320" name="Content Placeholder 2"/>
+          <p:cNvPr id="824215893" name="Content Placeholder 2"/>
           <p:cNvSpPr>
             <a:spLocks noGrp="1"/>
           </p:cNvSpPr>
@@ -2904,7 +2904,7 @@
       </p:sp>
       <p:sp>
         <p:nvSpPr>
-          <p:cNvPr id="619471710" name="Date Placeholder 3"/>
+          <p:cNvPr id="2070348066" name="Date Placeholder 3"/>
           <p:cNvSpPr>
             <a:spLocks noGrp="1"/>
           </p:cNvSpPr>
@@ -2930,7 +2930,7 @@
       </p:sp>
       <p:sp>
         <p:nvSpPr>
-          <p:cNvPr id="1751104279" name="Footer Placeholder 4"/>
+          <p:cNvPr id="1117018198" name="Footer Placeholder 4"/>
           <p:cNvSpPr>
             <a:spLocks noGrp="1"/>
           </p:cNvSpPr>
@@ -2952,7 +2952,7 @@
       </p:sp>
       <p:sp>
         <p:nvSpPr>
-          <p:cNvPr id="1924132521" name="Slide Number Placeholder 5"/>
+          <p:cNvPr id="960518718" name="Slide Number Placeholder 5"/>
           <p:cNvSpPr>
             <a:spLocks noGrp="1"/>
           </p:cNvSpPr>
@@ -3003,7 +3003,7 @@
       </p:grpSpPr>
       <p:sp>
         <p:nvSpPr>
-          <p:cNvPr id="1683741650" name="Title 1"/>
+          <p:cNvPr id="1805728584" name="Title 1"/>
           <p:cNvSpPr>
             <a:spLocks noGrp="1"/>
           </p:cNvSpPr>
@@ -3038,7 +3038,7 @@
       </p:sp>
       <p:sp>
         <p:nvSpPr>
-          <p:cNvPr id="690790203" name="Text Placeholder 2"/>
+          <p:cNvPr id="1073894601" name="Text Placeholder 2"/>
           <p:cNvSpPr>
             <a:spLocks noGrp="1"/>
           </p:cNvSpPr>
@@ -3160,7 +3160,7 @@
       </p:sp>
       <p:sp>
         <p:nvSpPr>
-          <p:cNvPr id="1706707144" name="Date Placeholder 3"/>
+          <p:cNvPr id="1935938215" name="Date Placeholder 3"/>
           <p:cNvSpPr>
             <a:spLocks noGrp="1"/>
           </p:cNvSpPr>
@@ -3186,7 +3186,7 @@
       </p:sp>
       <p:sp>
         <p:nvSpPr>
-          <p:cNvPr id="1612194958" name="Footer Placeholder 4"/>
+          <p:cNvPr id="663208037" name="Footer Placeholder 4"/>
           <p:cNvSpPr>
             <a:spLocks noGrp="1"/>
           </p:cNvSpPr>
@@ -3208,7 +3208,7 @@
       </p:sp>
       <p:sp>
         <p:nvSpPr>
-          <p:cNvPr id="1234925744" name="Slide Number Placeholder 5"/>
+          <p:cNvPr id="1128008278" name="Slide Number Placeholder 5"/>
           <p:cNvSpPr>
             <a:spLocks noGrp="1"/>
           </p:cNvSpPr>
@@ -3259,7 +3259,7 @@
       </p:grpSpPr>
       <p:sp>
         <p:nvSpPr>
-          <p:cNvPr id="1420772068" name="Title 1"/>
+          <p:cNvPr id="1241278361" name="Title 1"/>
           <p:cNvSpPr>
             <a:spLocks noGrp="1"/>
           </p:cNvSpPr>
@@ -3285,7 +3285,7 @@
       </p:sp>
       <p:sp>
         <p:nvSpPr>
-          <p:cNvPr id="1625133941" name="Content Placeholder 2"/>
+          <p:cNvPr id="1150794384" name="Content Placeholder 2"/>
           <p:cNvSpPr>
             <a:spLocks noGrp="1"/>
           </p:cNvSpPr>
@@ -3384,7 +3384,7 @@
       </p:sp>
       <p:sp>
         <p:nvSpPr>
-          <p:cNvPr id="297991136" name="Content Placeholder 3"/>
+          <p:cNvPr id="1986709585" name="Content Placeholder 3"/>
           <p:cNvSpPr>
             <a:spLocks noGrp="1"/>
           </p:cNvSpPr>
@@ -3483,7 +3483,7 @@
       </p:sp>
       <p:sp>
         <p:nvSpPr>
-          <p:cNvPr id="1833105336" name="Date Placeholder 4"/>
+          <p:cNvPr id="258108415" name="Date Placeholder 4"/>
           <p:cNvSpPr>
             <a:spLocks noGrp="1"/>
           </p:cNvSpPr>
@@ -3509,7 +3509,7 @@
       </p:sp>
       <p:sp>
         <p:nvSpPr>
-          <p:cNvPr id="1889753069" name="Footer Placeholder 5"/>
+          <p:cNvPr id="163807051" name="Footer Placeholder 5"/>
           <p:cNvSpPr>
             <a:spLocks noGrp="1"/>
           </p:cNvSpPr>
@@ -3531,7 +3531,7 @@
       </p:sp>
       <p:sp>
         <p:nvSpPr>
-          <p:cNvPr id="1289332317" name="Slide Number Placeholder 6"/>
+          <p:cNvPr id="724899380" name="Slide Number Placeholder 6"/>
           <p:cNvSpPr>
             <a:spLocks noGrp="1"/>
           </p:cNvSpPr>
@@ -3582,7 +3582,7 @@
       </p:grpSpPr>
       <p:sp>
         <p:nvSpPr>
-          <p:cNvPr id="344857966" name="Title 1"/>
+          <p:cNvPr id="121617649" name="Title 1"/>
           <p:cNvSpPr>
             <a:spLocks noGrp="1"/>
           </p:cNvSpPr>
@@ -3612,7 +3612,7 @@
       </p:sp>
       <p:sp>
         <p:nvSpPr>
-          <p:cNvPr id="2061399503" name="Text Placeholder 2"/>
+          <p:cNvPr id="1309451966" name="Text Placeholder 2"/>
           <p:cNvSpPr>
             <a:spLocks noGrp="1"/>
           </p:cNvSpPr>
@@ -3680,7 +3680,7 @@
       </p:sp>
       <p:sp>
         <p:nvSpPr>
-          <p:cNvPr id="1227678405" name="Content Placeholder 3"/>
+          <p:cNvPr id="987852746" name="Content Placeholder 3"/>
           <p:cNvSpPr>
             <a:spLocks noGrp="1"/>
           </p:cNvSpPr>
@@ -3779,7 +3779,7 @@
       </p:sp>
       <p:sp>
         <p:nvSpPr>
-          <p:cNvPr id="990316232" name="Text Placeholder 4"/>
+          <p:cNvPr id="1233159917" name="Text Placeholder 4"/>
           <p:cNvSpPr>
             <a:spLocks noGrp="1"/>
           </p:cNvSpPr>
@@ -3847,7 +3847,7 @@
       </p:sp>
       <p:sp>
         <p:nvSpPr>
-          <p:cNvPr id="1699031194" name="Content Placeholder 5"/>
+          <p:cNvPr id="858781316" name="Content Placeholder 5"/>
           <p:cNvSpPr>
             <a:spLocks noGrp="1"/>
           </p:cNvSpPr>
@@ -3946,7 +3946,7 @@
       </p:sp>
       <p:sp>
         <p:nvSpPr>
-          <p:cNvPr id="199938602" name="Date Placeholder 6"/>
+          <p:cNvPr id="96917502" name="Date Placeholder 6"/>
           <p:cNvSpPr>
             <a:spLocks noGrp="1"/>
           </p:cNvSpPr>
@@ -3972,7 +3972,7 @@
       </p:sp>
       <p:sp>
         <p:nvSpPr>
-          <p:cNvPr id="350371933" name="Footer Placeholder 7"/>
+          <p:cNvPr id="1963371839" name="Footer Placeholder 7"/>
           <p:cNvSpPr>
             <a:spLocks noGrp="1"/>
           </p:cNvSpPr>
@@ -3994,7 +3994,7 @@
       </p:sp>
       <p:sp>
         <p:nvSpPr>
-          <p:cNvPr id="824232667" name="Slide Number Placeholder 8"/>
+          <p:cNvPr id="940430288" name="Slide Number Placeholder 8"/>
           <p:cNvSpPr>
             <a:spLocks noGrp="1"/>
           </p:cNvSpPr>
@@ -4045,7 +4045,7 @@
       </p:grpSpPr>
       <p:sp>
         <p:nvSpPr>
-          <p:cNvPr id="2141954892" name="Title 1"/>
+          <p:cNvPr id="697790822" name="Title 1"/>
           <p:cNvSpPr>
             <a:spLocks noGrp="1"/>
           </p:cNvSpPr>
@@ -4071,7 +4071,7 @@
       </p:sp>
       <p:sp>
         <p:nvSpPr>
-          <p:cNvPr id="2093434297" name="Date Placeholder 2"/>
+          <p:cNvPr id="383738345" name="Date Placeholder 2"/>
           <p:cNvSpPr>
             <a:spLocks noGrp="1"/>
           </p:cNvSpPr>
@@ -4097,7 +4097,7 @@
       </p:sp>
       <p:sp>
         <p:nvSpPr>
-          <p:cNvPr id="1708670532" name="Footer Placeholder 3"/>
+          <p:cNvPr id="435430495" name="Footer Placeholder 3"/>
           <p:cNvSpPr>
             <a:spLocks noGrp="1"/>
           </p:cNvSpPr>
@@ -4119,7 +4119,7 @@
       </p:sp>
       <p:sp>
         <p:nvSpPr>
-          <p:cNvPr id="1787635381" name="Slide Number Placeholder 4"/>
+          <p:cNvPr id="1449631857" name="Slide Number Placeholder 4"/>
           <p:cNvSpPr>
             <a:spLocks noGrp="1"/>
           </p:cNvSpPr>
@@ -4170,7 +4170,7 @@
       </p:grpSpPr>
       <p:sp>
         <p:nvSpPr>
-          <p:cNvPr id="1943023859" name="Date Placeholder 1"/>
+          <p:cNvPr id="185986037" name="Date Placeholder 1"/>
           <p:cNvSpPr>
             <a:spLocks noGrp="1"/>
           </p:cNvSpPr>
@@ -4196,7 +4196,7 @@
       </p:sp>
       <p:sp>
         <p:nvSpPr>
-          <p:cNvPr id="830215382" name="Footer Placeholder 2"/>
+          <p:cNvPr id="62079488" name="Footer Placeholder 2"/>
           <p:cNvSpPr>
             <a:spLocks noGrp="1"/>
           </p:cNvSpPr>
@@ -4218,7 +4218,7 @@
       </p:sp>
       <p:sp>
         <p:nvSpPr>
-          <p:cNvPr id="1920886317" name="Slide Number Placeholder 3"/>
+          <p:cNvPr id="1996496665" name="Slide Number Placeholder 3"/>
           <p:cNvSpPr>
             <a:spLocks noGrp="1"/>
           </p:cNvSpPr>
@@ -4269,7 +4269,7 @@
       </p:grpSpPr>
       <p:sp>
         <p:nvSpPr>
-          <p:cNvPr id="489233039" name="Title 1"/>
+          <p:cNvPr id="2024807003" name="Title 1"/>
           <p:cNvSpPr>
             <a:spLocks noGrp="1"/>
           </p:cNvSpPr>
@@ -4304,7 +4304,7 @@
       </p:sp>
       <p:sp>
         <p:nvSpPr>
-          <p:cNvPr id="2065412971" name="Content Placeholder 2"/>
+          <p:cNvPr id="2053715042" name="Content Placeholder 2"/>
           <p:cNvSpPr>
             <a:spLocks noGrp="1"/>
           </p:cNvSpPr>
@@ -4403,7 +4403,7 @@
       </p:sp>
       <p:sp>
         <p:nvSpPr>
-          <p:cNvPr id="1200010342" name="Text Placeholder 3"/>
+          <p:cNvPr id="1006232714" name="Text Placeholder 3"/>
           <p:cNvSpPr>
             <a:spLocks noGrp="1"/>
           </p:cNvSpPr>
@@ -4471,7 +4471,7 @@
       </p:sp>
       <p:sp>
         <p:nvSpPr>
-          <p:cNvPr id="1720949757" name="Date Placeholder 4"/>
+          <p:cNvPr id="1408534064" name="Date Placeholder 4"/>
           <p:cNvSpPr>
             <a:spLocks noGrp="1"/>
           </p:cNvSpPr>
@@ -4497,7 +4497,7 @@
       </p:sp>
       <p:sp>
         <p:nvSpPr>
-          <p:cNvPr id="1817713026" name="Footer Placeholder 5"/>
+          <p:cNvPr id="1287598074" name="Footer Placeholder 5"/>
           <p:cNvSpPr>
             <a:spLocks noGrp="1"/>
           </p:cNvSpPr>
@@ -4519,7 +4519,7 @@
       </p:sp>
       <p:sp>
         <p:nvSpPr>
-          <p:cNvPr id="2101942651" name="Slide Number Placeholder 6"/>
+          <p:cNvPr id="11313413" name="Slide Number Placeholder 6"/>
           <p:cNvSpPr>
             <a:spLocks noGrp="1"/>
           </p:cNvSpPr>
@@ -4570,7 +4570,7 @@
       </p:grpSpPr>
       <p:sp>
         <p:nvSpPr>
-          <p:cNvPr id="2043891560" name="Title 1"/>
+          <p:cNvPr id="1381520813" name="Title 1"/>
           <p:cNvSpPr>
             <a:spLocks noGrp="1"/>
           </p:cNvSpPr>
@@ -4605,7 +4605,7 @@
       </p:sp>
       <p:sp>
         <p:nvSpPr>
-          <p:cNvPr id="761784623" name="Picture Placeholder 2"/>
+          <p:cNvPr id="1065746319" name="Picture Placeholder 2"/>
           <p:cNvSpPr>
             <a:spLocks noGrp="1"/>
           </p:cNvSpPr>
@@ -4669,7 +4669,7 @@
       </p:sp>
       <p:sp>
         <p:nvSpPr>
-          <p:cNvPr id="2106261413" name="Text Placeholder 3"/>
+          <p:cNvPr id="21583030" name="Text Placeholder 3"/>
           <p:cNvSpPr>
             <a:spLocks noGrp="1"/>
           </p:cNvSpPr>
@@ -4737,7 +4737,7 @@
       </p:sp>
       <p:sp>
         <p:nvSpPr>
-          <p:cNvPr id="922793435" name="Date Placeholder 4"/>
+          <p:cNvPr id="2145388648" name="Date Placeholder 4"/>
           <p:cNvSpPr>
             <a:spLocks noGrp="1"/>
           </p:cNvSpPr>
@@ -4763,7 +4763,7 @@
       </p:sp>
       <p:sp>
         <p:nvSpPr>
-          <p:cNvPr id="570907318" name="Footer Placeholder 5"/>
+          <p:cNvPr id="31164358" name="Footer Placeholder 5"/>
           <p:cNvSpPr>
             <a:spLocks noGrp="1"/>
           </p:cNvSpPr>
@@ -4785,7 +4785,7 @@
       </p:sp>
       <p:sp>
         <p:nvSpPr>
-          <p:cNvPr id="2036810835" name="Slide Number Placeholder 6"/>
+          <p:cNvPr id="1239365897" name="Slide Number Placeholder 6"/>
           <p:cNvSpPr>
             <a:spLocks noGrp="1"/>
           </p:cNvSpPr>
@@ -4841,7 +4841,7 @@
       </p:grpSpPr>
       <p:sp>
         <p:nvSpPr>
-          <p:cNvPr id="2130910465" name="Title Placeholder 1"/>
+          <p:cNvPr id="1605324605" name="Title Placeholder 1"/>
           <p:cNvSpPr>
             <a:spLocks noGrp="1"/>
           </p:cNvSpPr>
@@ -4877,7 +4877,7 @@
       </p:sp>
       <p:sp>
         <p:nvSpPr>
-          <p:cNvPr id="1524020240" name="Text Placeholder 2"/>
+          <p:cNvPr id="1335995381" name="Text Placeholder 2"/>
           <p:cNvSpPr>
             <a:spLocks noGrp="1"/>
           </p:cNvSpPr>
@@ -4953,7 +4953,7 @@
       </p:sp>
       <p:sp>
         <p:nvSpPr>
-          <p:cNvPr id="1454746338" name="Date Placeholder 3"/>
+          <p:cNvPr id="552369615" name="Date Placeholder 3"/>
           <p:cNvSpPr>
             <a:spLocks noGrp="1"/>
           </p:cNvSpPr>
@@ -4997,7 +4997,7 @@
       </p:sp>
       <p:sp>
         <p:nvSpPr>
-          <p:cNvPr id="1603877590" name="Footer Placeholder 4"/>
+          <p:cNvPr id="78424994" name="Footer Placeholder 4"/>
           <p:cNvSpPr>
             <a:spLocks noGrp="1"/>
           </p:cNvSpPr>
@@ -5037,7 +5037,7 @@
       </p:sp>
       <p:sp>
         <p:nvSpPr>
-          <p:cNvPr id="1482914905" name="Slide Number Placeholder 5"/>
+          <p:cNvPr id="77873875" name="Slide Number Placeholder 5"/>
           <p:cNvSpPr>
             <a:spLocks noGrp="1"/>
           </p:cNvSpPr>
@@ -5374,7 +5374,7 @@
       </p:grpSpPr>
       <p:sp>
         <p:nvSpPr>
-          <p:cNvPr id="2064294522" name="Rectangle 1"/>
+          <p:cNvPr id="445078297" name="Rectangle 1"/>
           <p:cNvSpPr/>
           <p:nvPr/>
         </p:nvSpPr>
@@ -5420,7 +5420,7 @@
       </p:sp>
       <p:sp>
         <p:nvSpPr>
-          <p:cNvPr id="208256050" name="Rectangle 2"/>
+          <p:cNvPr id="571597237" name="Rectangle 2"/>
           <p:cNvSpPr/>
           <p:nvPr/>
         </p:nvSpPr>
@@ -5466,7 +5466,7 @@
       </p:sp>
       <p:sp>
         <p:nvSpPr>
-          <p:cNvPr id="1746518314" name="Rectangle 3"/>
+          <p:cNvPr id="618446123" name="Rectangle 3"/>
           <p:cNvSpPr/>
           <p:nvPr/>
         </p:nvSpPr>
@@ -5512,7 +5512,7 @@
       </p:sp>
       <p:sp>
         <p:nvSpPr>
-          <p:cNvPr id="1868181695" name="TextBox 4"/>
+          <p:cNvPr id="1140803618" name="TextBox 4"/>
           <p:cNvSpPr txBox="1"/>
           <p:nvPr/>
         </p:nvSpPr>
@@ -5550,7 +5550,7 @@
       </p:sp>
       <p:sp>
         <p:nvSpPr>
-          <p:cNvPr id="1149104516" name="TextBox 5"/>
+          <p:cNvPr id="2105932229" name="TextBox 5"/>
           <p:cNvSpPr txBox="1"/>
           <p:nvPr/>
         </p:nvSpPr>
@@ -5588,7 +5588,7 @@
       </p:sp>
       <p:sp>
         <p:nvSpPr>
-          <p:cNvPr id="853405427" name="Rectangle 6"/>
+          <p:cNvPr id="32265004" name="Rectangle 6"/>
           <p:cNvSpPr/>
           <p:nvPr/>
         </p:nvSpPr>
@@ -5634,7 +5634,7 @@
       </p:sp>
       <p:sp>
         <p:nvSpPr>
-          <p:cNvPr id="1235967852" name="TextBox 7"/>
+          <p:cNvPr id="1388421557" name="TextBox 7"/>
           <p:cNvSpPr txBox="1"/>
           <p:nvPr/>
         </p:nvSpPr>
@@ -5672,7 +5672,7 @@
       </p:sp>
       <p:sp>
         <p:nvSpPr>
-          <p:cNvPr id="1441985686" name="TextBox 8"/>
+          <p:cNvPr id="276577018" name="TextBox 8"/>
           <p:cNvSpPr txBox="1"/>
           <p:nvPr/>
         </p:nvSpPr>
@@ -5750,7 +5750,7 @@
       </p:grpSpPr>
       <p:sp>
         <p:nvSpPr>
-          <p:cNvPr id="1331805102" name="Oval 1"/>
+          <p:cNvPr id="1675090832" name="Oval 1"/>
           <p:cNvSpPr/>
           <p:nvPr/>
         </p:nvSpPr>
@@ -5804,7 +5804,7 @@
       </p:sp>
       <p:sp>
         <p:nvSpPr>
-          <p:cNvPr id="1556984170" name="TextBox 2"/>
+          <p:cNvPr id="302418747" name="TextBox 2"/>
           <p:cNvSpPr txBox="1"/>
           <p:nvPr/>
         </p:nvSpPr>
@@ -5842,7 +5842,7 @@
       </p:sp>
       <p:sp>
         <p:nvSpPr>
-          <p:cNvPr id="1358547162" name="TextBox 3"/>
+          <p:cNvPr id="478655645" name="TextBox 3"/>
           <p:cNvSpPr txBox="1"/>
           <p:nvPr/>
         </p:nvSpPr>
@@ -5880,7 +5880,7 @@
       </p:sp>
       <p:sp>
         <p:nvSpPr>
-          <p:cNvPr id="999100037" name="Rectangle 4"/>
+          <p:cNvPr id="1155152081" name="Rectangle 4"/>
           <p:cNvSpPr/>
           <p:nvPr/>
         </p:nvSpPr>
@@ -5926,7 +5926,7 @@
       </p:sp>
       <p:sp>
         <p:nvSpPr>
-          <p:cNvPr id="25709402" name="TextBox 5"/>
+          <p:cNvPr id="1296466012" name="TextBox 5"/>
           <p:cNvSpPr txBox="1"/>
           <p:nvPr/>
         </p:nvSpPr>
@@ -5964,7 +5964,7 @@
       </p:sp>
       <p:sp>
         <p:nvSpPr>
-          <p:cNvPr id="1152759317" name="Rounded Rectangle 6"/>
+          <p:cNvPr id="1270233416" name="Rounded Rectangle 6"/>
           <p:cNvSpPr/>
           <p:nvPr/>
         </p:nvSpPr>
@@ -6014,7 +6014,7 @@
       </p:sp>
       <p:sp>
         <p:nvSpPr>
-          <p:cNvPr id="1046045593" name="Oval 7"/>
+          <p:cNvPr id="1968171793" name="Oval 7"/>
           <p:cNvSpPr/>
           <p:nvPr/>
         </p:nvSpPr>
@@ -6068,7 +6068,7 @@
       </p:sp>
       <p:sp>
         <p:nvSpPr>
-          <p:cNvPr id="716501820" name="TextBox 8"/>
+          <p:cNvPr id="944977140" name="TextBox 8"/>
           <p:cNvSpPr txBox="1"/>
           <p:nvPr/>
         </p:nvSpPr>
@@ -6106,7 +6106,7 @@
       </p:sp>
       <p:sp>
         <p:nvSpPr>
-          <p:cNvPr id="310079175" name="TextBox 9"/>
+          <p:cNvPr id="1277655136" name="TextBox 9"/>
           <p:cNvSpPr txBox="1"/>
           <p:nvPr/>
         </p:nvSpPr>
@@ -6151,7 +6151,7 @@
       </p:sp>
       <p:sp>
         <p:nvSpPr>
-          <p:cNvPr id="1632687560" name="Right Arrow 10"/>
+          <p:cNvPr id="2068371077" name="Right Arrow 10"/>
           <p:cNvSpPr/>
           <p:nvPr/>
         </p:nvSpPr>
@@ -6200,7 +6200,7 @@
       </p:sp>
       <p:sp>
         <p:nvSpPr>
-          <p:cNvPr id="558419208" name="Rounded Rectangle 11"/>
+          <p:cNvPr id="1313038490" name="Rounded Rectangle 11"/>
           <p:cNvSpPr/>
           <p:nvPr/>
         </p:nvSpPr>
@@ -6250,7 +6250,7 @@
       </p:sp>
       <p:sp>
         <p:nvSpPr>
-          <p:cNvPr id="818261543" name="Oval 12"/>
+          <p:cNvPr id="2127821174" name="Oval 12"/>
           <p:cNvSpPr/>
           <p:nvPr/>
         </p:nvSpPr>
@@ -6304,7 +6304,7 @@
       </p:sp>
       <p:sp>
         <p:nvSpPr>
-          <p:cNvPr id="2147178878" name="TextBox 13"/>
+          <p:cNvPr id="965129811" name="TextBox 13"/>
           <p:cNvSpPr txBox="1"/>
           <p:nvPr/>
         </p:nvSpPr>
@@ -6342,7 +6342,7 @@
       </p:sp>
       <p:sp>
         <p:nvSpPr>
-          <p:cNvPr id="98993680" name="TextBox 14"/>
+          <p:cNvPr id="1743053173" name="TextBox 14"/>
           <p:cNvSpPr txBox="1"/>
           <p:nvPr/>
         </p:nvSpPr>
@@ -6387,7 +6387,7 @@
       </p:sp>
       <p:sp>
         <p:nvSpPr>
-          <p:cNvPr id="1814688512" name="Right Arrow 15"/>
+          <p:cNvPr id="1072155662" name="Right Arrow 15"/>
           <p:cNvSpPr/>
           <p:nvPr/>
         </p:nvSpPr>
@@ -6436,7 +6436,7 @@
       </p:sp>
       <p:sp>
         <p:nvSpPr>
-          <p:cNvPr id="1569791281" name="Rounded Rectangle 16"/>
+          <p:cNvPr id="1734595234" name="Rounded Rectangle 16"/>
           <p:cNvSpPr/>
           <p:nvPr/>
         </p:nvSpPr>
@@ -6486,7 +6486,7 @@
       </p:sp>
       <p:sp>
         <p:nvSpPr>
-          <p:cNvPr id="6887106" name="Oval 17"/>
+          <p:cNvPr id="1428037154" name="Oval 17"/>
           <p:cNvSpPr/>
           <p:nvPr/>
         </p:nvSpPr>
@@ -6540,7 +6540,7 @@
       </p:sp>
       <p:sp>
         <p:nvSpPr>
-          <p:cNvPr id="210889746" name="TextBox 18"/>
+          <p:cNvPr id="934784575" name="TextBox 18"/>
           <p:cNvSpPr txBox="1"/>
           <p:nvPr/>
         </p:nvSpPr>
@@ -6578,7 +6578,7 @@
       </p:sp>
       <p:sp>
         <p:nvSpPr>
-          <p:cNvPr id="425866556" name="TextBox 19"/>
+          <p:cNvPr id="765758991" name="TextBox 19"/>
           <p:cNvSpPr txBox="1"/>
           <p:nvPr/>
         </p:nvSpPr>
@@ -6623,7 +6623,7 @@
       </p:sp>
       <p:sp>
         <p:nvSpPr>
-          <p:cNvPr id="1984950840" name="Right Arrow 20"/>
+          <p:cNvPr id="1128387699" name="Right Arrow 20"/>
           <p:cNvSpPr/>
           <p:nvPr/>
         </p:nvSpPr>
@@ -6672,7 +6672,7 @@
       </p:sp>
       <p:sp>
         <p:nvSpPr>
-          <p:cNvPr id="1404730873" name="Rounded Rectangle 21"/>
+          <p:cNvPr id="1642636785" name="Rounded Rectangle 21"/>
           <p:cNvSpPr/>
           <p:nvPr/>
         </p:nvSpPr>
@@ -6722,7 +6722,7 @@
       </p:sp>
       <p:sp>
         <p:nvSpPr>
-          <p:cNvPr id="1759255991" name="Oval 22"/>
+          <p:cNvPr id="1583611935" name="Oval 22"/>
           <p:cNvSpPr/>
           <p:nvPr/>
         </p:nvSpPr>
@@ -6776,7 +6776,7 @@
       </p:sp>
       <p:sp>
         <p:nvSpPr>
-          <p:cNvPr id="165510405" name="TextBox 23"/>
+          <p:cNvPr id="1618429984" name="TextBox 23"/>
           <p:cNvSpPr txBox="1"/>
           <p:nvPr/>
         </p:nvSpPr>
@@ -6814,7 +6814,7 @@
       </p:sp>
       <p:sp>
         <p:nvSpPr>
-          <p:cNvPr id="726809881" name="TextBox 24"/>
+          <p:cNvPr id="1663821187" name="TextBox 24"/>
           <p:cNvSpPr txBox="1"/>
           <p:nvPr/>
         </p:nvSpPr>
@@ -6859,7 +6859,7 @@
       </p:sp>
       <p:sp>
         <p:nvSpPr>
-          <p:cNvPr id="1145154974" name="TextBox 25"/>
+          <p:cNvPr id="1699487973" name="TextBox 25"/>
           <p:cNvSpPr txBox="1"/>
           <p:nvPr/>
         </p:nvSpPr>
@@ -6897,7 +6897,7 @@
       </p:sp>
       <p:sp>
         <p:nvSpPr>
-          <p:cNvPr id="732352047" name="Rounded Rectangle 26"/>
+          <p:cNvPr id="1878734820" name="Rounded Rectangle 26"/>
           <p:cNvSpPr/>
           <p:nvPr/>
         </p:nvSpPr>
@@ -6947,7 +6947,7 @@
       </p:sp>
       <p:sp>
         <p:nvSpPr>
-          <p:cNvPr id="154573418" name="TextBox 27"/>
+          <p:cNvPr id="1187484701" name="TextBox 27"/>
           <p:cNvSpPr txBox="1"/>
           <p:nvPr/>
         </p:nvSpPr>
@@ -6985,7 +6985,7 @@
       </p:sp>
       <p:sp>
         <p:nvSpPr>
-          <p:cNvPr id="1275593395" name="TextBox 28"/>
+          <p:cNvPr id="410608029" name="TextBox 28"/>
           <p:cNvSpPr txBox="1"/>
           <p:nvPr/>
         </p:nvSpPr>
@@ -7023,7 +7023,7 @@
       </p:sp>
       <p:sp>
         <p:nvSpPr>
-          <p:cNvPr id="1186442091" name="TextBox 29"/>
+          <p:cNvPr id="190377997" name="TextBox 29"/>
           <p:cNvSpPr txBox="1"/>
           <p:nvPr/>
         </p:nvSpPr>
@@ -7075,7 +7075,7 @@
       </p:sp>
       <p:sp>
         <p:nvSpPr>
-          <p:cNvPr id="505328844" name="Rounded Rectangle 30"/>
+          <p:cNvPr id="1570910364" name="Rounded Rectangle 30"/>
           <p:cNvSpPr/>
           <p:nvPr/>
         </p:nvSpPr>
@@ -7125,7 +7125,7 @@
       </p:sp>
       <p:sp>
         <p:nvSpPr>
-          <p:cNvPr id="559827686" name="TextBox 31"/>
+          <p:cNvPr id="1694169795" name="TextBox 31"/>
           <p:cNvSpPr txBox="1"/>
           <p:nvPr/>
         </p:nvSpPr>
@@ -7163,7 +7163,7 @@
       </p:sp>
       <p:sp>
         <p:nvSpPr>
-          <p:cNvPr id="797976313" name="TextBox 32"/>
+          <p:cNvPr id="2139149116" name="TextBox 32"/>
           <p:cNvSpPr txBox="1"/>
           <p:nvPr/>
         </p:nvSpPr>
@@ -7201,7 +7201,7 @@
       </p:sp>
       <p:sp>
         <p:nvSpPr>
-          <p:cNvPr id="459884475" name="TextBox 33"/>
+          <p:cNvPr id="1852318867" name="TextBox 33"/>
           <p:cNvSpPr txBox="1"/>
           <p:nvPr/>
         </p:nvSpPr>
@@ -7253,7 +7253,7 @@
       </p:sp>
       <p:sp>
         <p:nvSpPr>
-          <p:cNvPr id="233083901" name="Rounded Rectangle 34"/>
+          <p:cNvPr id="515246884" name="Rounded Rectangle 34"/>
           <p:cNvSpPr/>
           <p:nvPr/>
         </p:nvSpPr>
@@ -7303,7 +7303,7 @@
       </p:sp>
       <p:sp>
         <p:nvSpPr>
-          <p:cNvPr id="1835373509" name="TextBox 35"/>
+          <p:cNvPr id="96681768" name="TextBox 35"/>
           <p:cNvSpPr txBox="1"/>
           <p:nvPr/>
         </p:nvSpPr>
@@ -7341,7 +7341,7 @@
       </p:sp>
       <p:sp>
         <p:nvSpPr>
-          <p:cNvPr id="1847942006" name="TextBox 36"/>
+          <p:cNvPr id="1144829570" name="TextBox 36"/>
           <p:cNvSpPr txBox="1"/>
           <p:nvPr/>
         </p:nvSpPr>
@@ -7379,7 +7379,7 @@
       </p:sp>
       <p:sp>
         <p:nvSpPr>
-          <p:cNvPr id="308785924" name="TextBox 37"/>
+          <p:cNvPr id="1557084019" name="TextBox 37"/>
           <p:cNvSpPr txBox="1"/>
           <p:nvPr/>
         </p:nvSpPr>
@@ -7431,7 +7431,7 @@
       </p:sp>
       <p:sp>
         <p:nvSpPr>
-          <p:cNvPr id="493266776" name="Rounded Rectangle 38"/>
+          <p:cNvPr id="1197486502" name="Rounded Rectangle 38"/>
           <p:cNvSpPr/>
           <p:nvPr/>
         </p:nvSpPr>
@@ -7481,7 +7481,7 @@
       </p:sp>
       <p:sp>
         <p:nvSpPr>
-          <p:cNvPr id="449527121" name="TextBox 39"/>
+          <p:cNvPr id="472991371" name="TextBox 39"/>
           <p:cNvSpPr txBox="1"/>
           <p:nvPr/>
         </p:nvSpPr>
@@ -7519,7 +7519,7 @@
       </p:sp>
       <p:sp>
         <p:nvSpPr>
-          <p:cNvPr id="1239608408" name="TextBox 40"/>
+          <p:cNvPr id="122876709" name="TextBox 40"/>
           <p:cNvSpPr txBox="1"/>
           <p:nvPr/>
         </p:nvSpPr>
@@ -7557,7 +7557,7 @@
       </p:sp>
       <p:sp>
         <p:nvSpPr>
-          <p:cNvPr id="1440657389" name="TextBox 41"/>
+          <p:cNvPr id="1023351109" name="TextBox 41"/>
           <p:cNvSpPr txBox="1"/>
           <p:nvPr/>
         </p:nvSpPr>
@@ -7649,7 +7649,7 @@
       </p:grpSpPr>
       <p:sp>
         <p:nvSpPr>
-          <p:cNvPr id="306024193" name="Rectangle 1"/>
+          <p:cNvPr id="539683464" name="Rectangle 1"/>
           <p:cNvSpPr/>
           <p:nvPr/>
         </p:nvSpPr>
@@ -7695,7 +7695,7 @@
       </p:sp>
       <p:sp>
         <p:nvSpPr>
-          <p:cNvPr id="751176670" name="TextBox 2"/>
+          <p:cNvPr id="173351783" name="TextBox 2"/>
           <p:cNvSpPr txBox="1"/>
           <p:nvPr/>
         </p:nvSpPr>
@@ -7733,7 +7733,7 @@
       </p:sp>
       <p:sp>
         <p:nvSpPr>
-          <p:cNvPr id="277988195" name="Rectangle 3"/>
+          <p:cNvPr id="505952916" name="Rectangle 3"/>
           <p:cNvSpPr/>
           <p:nvPr/>
         </p:nvSpPr>
@@ -7779,7 +7779,7 @@
       </p:sp>
       <p:sp>
         <p:nvSpPr>
-          <p:cNvPr id="959134609" name="TextBox 4"/>
+          <p:cNvPr id="1755120546" name="TextBox 4"/>
           <p:cNvSpPr txBox="1"/>
           <p:nvPr/>
         </p:nvSpPr>
@@ -7817,7 +7817,7 @@
       </p:sp>
       <p:pic>
         <p:nvPicPr>
-          <p:cNvPr id="943408275" name="Picture 5" descr="approval_workflow_1784769114724.jpg"/>
+          <p:cNvPr id="529770476" name="Picture 5" descr="approval_workflow_1784769114724.jpg"/>
           <p:cNvPicPr>
             <a:picLocks noChangeAspect="1"/>
           </p:cNvPicPr>
@@ -7879,7 +7879,7 @@
       </p:grpSpPr>
       <p:sp>
         <p:nvSpPr>
-          <p:cNvPr id="157237043" name="Oval 1"/>
+          <p:cNvPr id="2044129925" name="Oval 1"/>
           <p:cNvSpPr/>
           <p:nvPr/>
         </p:nvSpPr>
@@ -7933,7 +7933,7 @@
       </p:sp>
       <p:sp>
         <p:nvSpPr>
-          <p:cNvPr id="1296462513" name="TextBox 2"/>
+          <p:cNvPr id="1241747265" name="TextBox 2"/>
           <p:cNvSpPr txBox="1"/>
           <p:nvPr/>
         </p:nvSpPr>
@@ -7971,7 +7971,7 @@
       </p:sp>
       <p:sp>
         <p:nvSpPr>
-          <p:cNvPr id="2147447855" name="TextBox 3"/>
+          <p:cNvPr id="1802277251" name="TextBox 3"/>
           <p:cNvSpPr txBox="1"/>
           <p:nvPr/>
         </p:nvSpPr>
@@ -8009,7 +8009,7 @@
       </p:sp>
       <p:sp>
         <p:nvSpPr>
-          <p:cNvPr id="61197882" name="Rectangle 4"/>
+          <p:cNvPr id="789035234" name="Rectangle 4"/>
           <p:cNvSpPr/>
           <p:nvPr/>
         </p:nvSpPr>
@@ -8055,7 +8055,7 @@
       </p:sp>
       <p:sp>
         <p:nvSpPr>
-          <p:cNvPr id="1180958799" name="Rounded Rectangle 5"/>
+          <p:cNvPr id="727175577" name="Rounded Rectangle 5"/>
           <p:cNvSpPr/>
           <p:nvPr/>
         </p:nvSpPr>
@@ -8105,7 +8105,7 @@
       </p:sp>
       <p:sp>
         <p:nvSpPr>
-          <p:cNvPr id="701370827" name="TextBox 6"/>
+          <p:cNvPr id="218855519" name="TextBox 6"/>
           <p:cNvSpPr txBox="1"/>
           <p:nvPr/>
         </p:nvSpPr>
@@ -8143,7 +8143,7 @@
       </p:sp>
       <p:sp>
         <p:nvSpPr>
-          <p:cNvPr id="1885823008" name="Rounded Rectangle 7"/>
+          <p:cNvPr id="1995514139" name="Rounded Rectangle 7"/>
           <p:cNvSpPr/>
           <p:nvPr/>
         </p:nvSpPr>
@@ -8191,15 +8191,15 @@
             </a:pPr>
             <a:r>
               <a:rPr/>
-              <a:t>Kredit &lt; Rp 500 Juta → KADIV = FINAL APPROVAL</a:t>
-            </a:r>
-            <a:endParaRPr/>
-          </a:p>
-        </p:txBody>
-      </p:sp>
-      <p:sp>
-        <p:nvSpPr>
-          <p:cNvPr id="354487980" name="Rounded Rectangle 8"/>
+              <a:t>Kredit &lt; Rp 50 Juta → KADIV = FINAL APPROVAL</a:t>
+            </a:r>
+            <a:endParaRPr/>
+          </a:p>
+        </p:txBody>
+      </p:sp>
+      <p:sp>
+        <p:nvSpPr>
+          <p:cNvPr id="404268223" name="Rounded Rectangle 8"/>
           <p:cNvSpPr/>
           <p:nvPr/>
         </p:nvSpPr>
@@ -8247,15 +8247,15 @@
             </a:pPr>
             <a:r>
               <a:rPr/>
-              <a:t>Kredit ≥ Rp 500 Juta → Eskalasi ke DIREKSI</a:t>
-            </a:r>
-            <a:endParaRPr/>
-          </a:p>
-        </p:txBody>
-      </p:sp>
-      <p:sp>
-        <p:nvSpPr>
-          <p:cNvPr id="251535513" name="TextBox 9"/>
+              <a:t>Kredit ≥ Rp 50Juta → Eskalasi ke DIREKSI</a:t>
+            </a:r>
+            <a:endParaRPr/>
+          </a:p>
+        </p:txBody>
+      </p:sp>
+      <p:sp>
+        <p:nvSpPr>
+          <p:cNvPr id="1061148042" name="TextBox 9"/>
           <p:cNvSpPr txBox="1"/>
           <p:nvPr/>
         </p:nvSpPr>
@@ -8293,7 +8293,7 @@
       </p:sp>
       <p:sp>
         <p:nvSpPr>
-          <p:cNvPr id="186721123" name="Rounded Rectangle 10"/>
+          <p:cNvPr id="127148342" name="Rounded Rectangle 10"/>
           <p:cNvSpPr/>
           <p:nvPr/>
         </p:nvSpPr>
@@ -8343,7 +8343,7 @@
       </p:sp>
       <p:sp>
         <p:nvSpPr>
-          <p:cNvPr id="1644478742" name="Oval 11"/>
+          <p:cNvPr id="1873853440" name="Oval 11"/>
           <p:cNvSpPr/>
           <p:nvPr/>
         </p:nvSpPr>
@@ -8397,7 +8397,7 @@
       </p:sp>
       <p:sp>
         <p:nvSpPr>
-          <p:cNvPr id="1664860215" name="TextBox 12"/>
+          <p:cNvPr id="1494434772" name="TextBox 12"/>
           <p:cNvSpPr txBox="1"/>
           <p:nvPr/>
         </p:nvSpPr>
@@ -8435,7 +8435,7 @@
       </p:sp>
       <p:sp>
         <p:nvSpPr>
-          <p:cNvPr id="1483851262" name="TextBox 13"/>
+          <p:cNvPr id="2092427944" name="TextBox 13"/>
           <p:cNvSpPr txBox="1"/>
           <p:nvPr/>
         </p:nvSpPr>
@@ -8480,7 +8480,7 @@
       </p:sp>
       <p:sp>
         <p:nvSpPr>
-          <p:cNvPr id="1101676831" name="Right Arrow 14"/>
+          <p:cNvPr id="462246975" name="Right Arrow 14"/>
           <p:cNvSpPr/>
           <p:nvPr/>
         </p:nvSpPr>
@@ -8529,7 +8529,7 @@
       </p:sp>
       <p:sp>
         <p:nvSpPr>
-          <p:cNvPr id="1136099572" name="Rounded Rectangle 15"/>
+          <p:cNvPr id="2046676450" name="Rounded Rectangle 15"/>
           <p:cNvSpPr/>
           <p:nvPr/>
         </p:nvSpPr>
@@ -8579,7 +8579,7 @@
       </p:sp>
       <p:sp>
         <p:nvSpPr>
-          <p:cNvPr id="797192228" name="Oval 16"/>
+          <p:cNvPr id="2007872518" name="Oval 16"/>
           <p:cNvSpPr/>
           <p:nvPr/>
         </p:nvSpPr>
@@ -8633,7 +8633,7 @@
       </p:sp>
       <p:sp>
         <p:nvSpPr>
-          <p:cNvPr id="2038761371" name="TextBox 17"/>
+          <p:cNvPr id="1088063040" name="TextBox 17"/>
           <p:cNvSpPr txBox="1"/>
           <p:nvPr/>
         </p:nvSpPr>
@@ -8671,7 +8671,7 @@
       </p:sp>
       <p:sp>
         <p:nvSpPr>
-          <p:cNvPr id="2073276708" name="TextBox 18"/>
+          <p:cNvPr id="2044736703" name="TextBox 18"/>
           <p:cNvSpPr txBox="1"/>
           <p:nvPr/>
         </p:nvSpPr>
@@ -8716,7 +8716,7 @@
       </p:sp>
       <p:sp>
         <p:nvSpPr>
-          <p:cNvPr id="284704196" name="Right Arrow 19"/>
+          <p:cNvPr id="1697982635" name="Right Arrow 19"/>
           <p:cNvSpPr/>
           <p:nvPr/>
         </p:nvSpPr>
@@ -8765,7 +8765,7 @@
       </p:sp>
       <p:sp>
         <p:nvSpPr>
-          <p:cNvPr id="762578036" name="Rounded Rectangle 20"/>
+          <p:cNvPr id="1253330162" name="Rounded Rectangle 20"/>
           <p:cNvSpPr/>
           <p:nvPr/>
         </p:nvSpPr>
@@ -8815,7 +8815,7 @@
       </p:sp>
       <p:sp>
         <p:nvSpPr>
-          <p:cNvPr id="1811969245" name="Oval 21"/>
+          <p:cNvPr id="905011154" name="Oval 21"/>
           <p:cNvSpPr/>
           <p:nvPr/>
         </p:nvSpPr>
@@ -8869,7 +8869,7 @@
       </p:sp>
       <p:sp>
         <p:nvSpPr>
-          <p:cNvPr id="1063592972" name="TextBox 22"/>
+          <p:cNvPr id="87123736" name="TextBox 22"/>
           <p:cNvSpPr txBox="1"/>
           <p:nvPr/>
         </p:nvSpPr>
@@ -8907,7 +8907,7 @@
       </p:sp>
       <p:sp>
         <p:nvSpPr>
-          <p:cNvPr id="1768128243" name="TextBox 23"/>
+          <p:cNvPr id="1947476314" name="TextBox 23"/>
           <p:cNvSpPr txBox="1"/>
           <p:nvPr/>
         </p:nvSpPr>
@@ -8959,7 +8959,7 @@
       </p:sp>
       <p:sp>
         <p:nvSpPr>
-          <p:cNvPr id="658717559" name="Right Arrow 24"/>
+          <p:cNvPr id="1305596198" name="Right Arrow 24"/>
           <p:cNvSpPr/>
           <p:nvPr/>
         </p:nvSpPr>
@@ -9008,7 +9008,7 @@
       </p:sp>
       <p:sp>
         <p:nvSpPr>
-          <p:cNvPr id="1017315219" name="Rounded Rectangle 25"/>
+          <p:cNvPr id="1495382731" name="Rounded Rectangle 25"/>
           <p:cNvSpPr/>
           <p:nvPr/>
         </p:nvSpPr>
@@ -9058,7 +9058,7 @@
       </p:sp>
       <p:sp>
         <p:nvSpPr>
-          <p:cNvPr id="504774900" name="Oval 26"/>
+          <p:cNvPr id="1690397555" name="Oval 26"/>
           <p:cNvSpPr/>
           <p:nvPr/>
         </p:nvSpPr>
@@ -9112,7 +9112,7 @@
       </p:sp>
       <p:sp>
         <p:nvSpPr>
-          <p:cNvPr id="2007943956" name="TextBox 27"/>
+          <p:cNvPr id="1053100357" name="TextBox 27"/>
           <p:cNvSpPr txBox="1"/>
           <p:nvPr/>
         </p:nvSpPr>
@@ -9150,7 +9150,7 @@
       </p:sp>
       <p:sp>
         <p:nvSpPr>
-          <p:cNvPr id="1059459261" name="TextBox 28"/>
+          <p:cNvPr id="51986309" name="TextBox 28"/>
           <p:cNvSpPr txBox="1"/>
           <p:nvPr/>
         </p:nvSpPr>
@@ -9202,7 +9202,7 @@
       </p:sp>
       <p:sp>
         <p:nvSpPr>
-          <p:cNvPr id="2076923022" name="TextBox 29"/>
+          <p:cNvPr id="1229388114" name="TextBox 29"/>
           <p:cNvSpPr txBox="1"/>
           <p:nvPr/>
         </p:nvSpPr>
@@ -9280,7 +9280,7 @@
       </p:grpSpPr>
       <p:sp>
         <p:nvSpPr>
-          <p:cNvPr id="1224513419" name="Rectangle 1"/>
+          <p:cNvPr id="970499123" name="Rectangle 1"/>
           <p:cNvSpPr/>
           <p:nvPr/>
         </p:nvSpPr>
@@ -9326,7 +9326,7 @@
       </p:sp>
       <p:sp>
         <p:nvSpPr>
-          <p:cNvPr id="1413717027" name="TextBox 2"/>
+          <p:cNvPr id="2123589942" name="TextBox 2"/>
           <p:cNvSpPr txBox="1"/>
           <p:nvPr/>
         </p:nvSpPr>
@@ -9364,7 +9364,7 @@
       </p:sp>
       <p:sp>
         <p:nvSpPr>
-          <p:cNvPr id="1033794767" name="Rectangle 3"/>
+          <p:cNvPr id="621605348" name="Rectangle 3"/>
           <p:cNvSpPr/>
           <p:nvPr/>
         </p:nvSpPr>
@@ -9410,7 +9410,7 @@
       </p:sp>
       <p:pic>
         <p:nvPicPr>
-          <p:cNvPr id="714643625" name="Picture 4" descr="kadiv_workflow_1784769151038.jpg"/>
+          <p:cNvPr id="170237083" name="Picture 4" descr="kadiv_workflow_1784769151038.jpg"/>
           <p:cNvPicPr>
             <a:picLocks noChangeAspect="1"/>
           </p:cNvPicPr>
@@ -9472,7 +9472,7 @@
       </p:grpSpPr>
       <p:sp>
         <p:nvSpPr>
-          <p:cNvPr id="392794150" name="Oval 1"/>
+          <p:cNvPr id="1715572655" name="Oval 1"/>
           <p:cNvSpPr/>
           <p:nvPr/>
         </p:nvSpPr>
@@ -9526,7 +9526,7 @@
       </p:sp>
       <p:sp>
         <p:nvSpPr>
-          <p:cNvPr id="1209252315" name="TextBox 2"/>
+          <p:cNvPr id="1026380540" name="TextBox 2"/>
           <p:cNvSpPr txBox="1"/>
           <p:nvPr/>
         </p:nvSpPr>
@@ -9564,7 +9564,7 @@
       </p:sp>
       <p:sp>
         <p:nvSpPr>
-          <p:cNvPr id="50276746" name="TextBox 3"/>
+          <p:cNvPr id="154452318" name="TextBox 3"/>
           <p:cNvSpPr txBox="1"/>
           <p:nvPr/>
         </p:nvSpPr>
@@ -9602,7 +9602,7 @@
       </p:sp>
       <p:sp>
         <p:nvSpPr>
-          <p:cNvPr id="846656372" name="Rectangle 4"/>
+          <p:cNvPr id="413067044" name="Rectangle 4"/>
           <p:cNvSpPr/>
           <p:nvPr/>
         </p:nvSpPr>
@@ -9648,7 +9648,7 @@
       </p:sp>
       <p:sp>
         <p:nvSpPr>
-          <p:cNvPr id="1280881585" name="Rounded Rectangle 5"/>
+          <p:cNvPr id="1659204694" name="Rounded Rectangle 5"/>
           <p:cNvSpPr/>
           <p:nvPr/>
         </p:nvSpPr>
@@ -9698,7 +9698,7 @@
       </p:sp>
       <p:sp>
         <p:nvSpPr>
-          <p:cNvPr id="1823841417" name="TextBox 6"/>
+          <p:cNvPr id="237678294" name="TextBox 6"/>
           <p:cNvSpPr txBox="1"/>
           <p:nvPr/>
         </p:nvSpPr>
@@ -9736,7 +9736,7 @@
       </p:sp>
       <p:sp>
         <p:nvSpPr>
-          <p:cNvPr id="649050052" name="TextBox 7"/>
+          <p:cNvPr id="98661256" name="TextBox 7"/>
           <p:cNvSpPr txBox="1"/>
           <p:nvPr/>
         </p:nvSpPr>
@@ -9774,7 +9774,7 @@
       </p:sp>
       <p:sp>
         <p:nvSpPr>
-          <p:cNvPr id="1505904301" name="TextBox 8"/>
+          <p:cNvPr id="1952668957" name="TextBox 8"/>
           <p:cNvSpPr txBox="1"/>
           <p:nvPr/>
         </p:nvSpPr>
@@ -9812,7 +9812,7 @@
       </p:sp>
       <p:sp>
         <p:nvSpPr>
-          <p:cNvPr id="1928369512" name="Rounded Rectangle 9"/>
+          <p:cNvPr id="1739653825" name="Rounded Rectangle 9"/>
           <p:cNvSpPr/>
           <p:nvPr/>
         </p:nvSpPr>
@@ -9862,7 +9862,7 @@
       </p:sp>
       <p:sp>
         <p:nvSpPr>
-          <p:cNvPr id="1064517526" name="Oval 10"/>
+          <p:cNvPr id="2082512854" name="Oval 10"/>
           <p:cNvSpPr/>
           <p:nvPr/>
         </p:nvSpPr>
@@ -9916,7 +9916,7 @@
       </p:sp>
       <p:sp>
         <p:nvSpPr>
-          <p:cNvPr id="2016256460" name="TextBox 11"/>
+          <p:cNvPr id="290365896" name="TextBox 11"/>
           <p:cNvSpPr txBox="1"/>
           <p:nvPr/>
         </p:nvSpPr>
@@ -9954,7 +9954,7 @@
       </p:sp>
       <p:sp>
         <p:nvSpPr>
-          <p:cNvPr id="2001526909" name="TextBox 12"/>
+          <p:cNvPr id="1544432882" name="TextBox 12"/>
           <p:cNvSpPr txBox="1"/>
           <p:nvPr/>
         </p:nvSpPr>
@@ -10006,7 +10006,7 @@
       </p:sp>
       <p:sp>
         <p:nvSpPr>
-          <p:cNvPr id="951401755" name="Right Arrow 13"/>
+          <p:cNvPr id="824620897" name="Right Arrow 13"/>
           <p:cNvSpPr/>
           <p:nvPr/>
         </p:nvSpPr>
@@ -10055,7 +10055,7 @@
       </p:sp>
       <p:sp>
         <p:nvSpPr>
-          <p:cNvPr id="1700062760" name="Rounded Rectangle 14"/>
+          <p:cNvPr id="1197860549" name="Rounded Rectangle 14"/>
           <p:cNvSpPr/>
           <p:nvPr/>
         </p:nvSpPr>
@@ -10105,7 +10105,7 @@
       </p:sp>
       <p:sp>
         <p:nvSpPr>
-          <p:cNvPr id="1591315515" name="Oval 15"/>
+          <p:cNvPr id="1998042128" name="Oval 15"/>
           <p:cNvSpPr/>
           <p:nvPr/>
         </p:nvSpPr>
@@ -10159,7 +10159,7 @@
       </p:sp>
       <p:sp>
         <p:nvSpPr>
-          <p:cNvPr id="1880540876" name="TextBox 16"/>
+          <p:cNvPr id="1640634076" name="TextBox 16"/>
           <p:cNvSpPr txBox="1"/>
           <p:nvPr/>
         </p:nvSpPr>
@@ -10197,7 +10197,7 @@
       </p:sp>
       <p:sp>
         <p:nvSpPr>
-          <p:cNvPr id="1069032135" name="TextBox 17"/>
+          <p:cNvPr id="392729986" name="TextBox 17"/>
           <p:cNvSpPr txBox="1"/>
           <p:nvPr/>
         </p:nvSpPr>
@@ -10249,7 +10249,7 @@
       </p:sp>
       <p:sp>
         <p:nvSpPr>
-          <p:cNvPr id="675913433" name="Right Arrow 18"/>
+          <p:cNvPr id="1448396898" name="Right Arrow 18"/>
           <p:cNvSpPr/>
           <p:nvPr/>
         </p:nvSpPr>
@@ -10298,7 +10298,7 @@
       </p:sp>
       <p:sp>
         <p:nvSpPr>
-          <p:cNvPr id="784601035" name="Rounded Rectangle 19"/>
+          <p:cNvPr id="1825237212" name="Rounded Rectangle 19"/>
           <p:cNvSpPr/>
           <p:nvPr/>
         </p:nvSpPr>
@@ -10348,7 +10348,7 @@
       </p:sp>
       <p:sp>
         <p:nvSpPr>
-          <p:cNvPr id="1638283842" name="Oval 20"/>
+          <p:cNvPr id="1064084009" name="Oval 20"/>
           <p:cNvSpPr/>
           <p:nvPr/>
         </p:nvSpPr>
@@ -10402,7 +10402,7 @@
       </p:sp>
       <p:sp>
         <p:nvSpPr>
-          <p:cNvPr id="730629387" name="TextBox 21"/>
+          <p:cNvPr id="85156111" name="TextBox 21"/>
           <p:cNvSpPr txBox="1"/>
           <p:nvPr/>
         </p:nvSpPr>
@@ -10440,7 +10440,7 @@
       </p:sp>
       <p:sp>
         <p:nvSpPr>
-          <p:cNvPr id="1134721539" name="TextBox 22"/>
+          <p:cNvPr id="1472361704" name="TextBox 22"/>
           <p:cNvSpPr txBox="1"/>
           <p:nvPr/>
         </p:nvSpPr>
@@ -10492,7 +10492,7 @@
       </p:sp>
       <p:sp>
         <p:nvSpPr>
-          <p:cNvPr id="905735326" name="TextBox 23"/>
+          <p:cNvPr id="1360108136" name="TextBox 23"/>
           <p:cNvSpPr txBox="1"/>
           <p:nvPr/>
         </p:nvSpPr>
@@ -10530,7 +10530,7 @@
       </p:sp>
       <p:sp>
         <p:nvSpPr>
-          <p:cNvPr id="1033454566" name="Rounded Rectangle 24"/>
+          <p:cNvPr id="1211588684" name="Rounded Rectangle 24"/>
           <p:cNvSpPr/>
           <p:nvPr/>
         </p:nvSpPr>
@@ -10600,7 +10600,7 @@
       </p:sp>
       <p:sp>
         <p:nvSpPr>
-          <p:cNvPr id="1336330709" name="Rounded Rectangle 25"/>
+          <p:cNvPr id="1713598959" name="Rounded Rectangle 25"/>
           <p:cNvSpPr/>
           <p:nvPr/>
         </p:nvSpPr>
@@ -10710,7 +10710,7 @@
       </p:grpSpPr>
       <p:sp>
         <p:nvSpPr>
-          <p:cNvPr id="338611626" name="Rectangle 1"/>
+          <p:cNvPr id="1983435968" name="Rectangle 1"/>
           <p:cNvSpPr/>
           <p:nvPr/>
         </p:nvSpPr>
@@ -10756,7 +10756,7 @@
       </p:sp>
       <p:sp>
         <p:nvSpPr>
-          <p:cNvPr id="1686657120" name="TextBox 2"/>
+          <p:cNvPr id="648232283" name="TextBox 2"/>
           <p:cNvSpPr txBox="1"/>
           <p:nvPr/>
         </p:nvSpPr>
@@ -10794,7 +10794,7 @@
       </p:sp>
       <p:sp>
         <p:nvSpPr>
-          <p:cNvPr id="1089997704" name="Rectangle 3"/>
+          <p:cNvPr id="1049964509" name="Rectangle 3"/>
           <p:cNvSpPr/>
           <p:nvPr/>
         </p:nvSpPr>
@@ -10840,7 +10840,7 @@
       </p:sp>
       <p:pic>
         <p:nvPicPr>
-          <p:cNvPr id="976103754" name="Picture 4" descr="direksi_workflow_1784769143726.jpg"/>
+          <p:cNvPr id="1552980668" name="Picture 4" descr="direksi_workflow_1784769143726.jpg"/>
           <p:cNvPicPr>
             <a:picLocks noChangeAspect="1"/>
           </p:cNvPicPr>
@@ -10902,7 +10902,7 @@
       </p:grpSpPr>
       <p:sp>
         <p:nvSpPr>
-          <p:cNvPr id="510207879" name="Oval 1"/>
+          <p:cNvPr id="1913914600" name="Oval 1"/>
           <p:cNvSpPr/>
           <p:nvPr/>
         </p:nvSpPr>
@@ -10956,7 +10956,7 @@
       </p:sp>
       <p:sp>
         <p:nvSpPr>
-          <p:cNvPr id="984274742" name="TextBox 2"/>
+          <p:cNvPr id="911185688" name="TextBox 2"/>
           <p:cNvSpPr txBox="1"/>
           <p:nvPr/>
         </p:nvSpPr>
@@ -10994,7 +10994,7 @@
       </p:sp>
       <p:sp>
         <p:nvSpPr>
-          <p:cNvPr id="5338540" name="TextBox 3"/>
+          <p:cNvPr id="953342082" name="TextBox 3"/>
           <p:cNvSpPr txBox="1"/>
           <p:nvPr/>
         </p:nvSpPr>
@@ -11032,7 +11032,7 @@
       </p:sp>
       <p:sp>
         <p:nvSpPr>
-          <p:cNvPr id="961999895" name="Rectangle 4"/>
+          <p:cNvPr id="802170188" name="Rectangle 4"/>
           <p:cNvSpPr/>
           <p:nvPr/>
         </p:nvSpPr>
@@ -11078,7 +11078,7 @@
       </p:sp>
       <p:sp>
         <p:nvSpPr>
-          <p:cNvPr id="1707810440" name="Rounded Rectangle 5"/>
+          <p:cNvPr id="1871250365" name="Rounded Rectangle 5"/>
           <p:cNvSpPr/>
           <p:nvPr/>
         </p:nvSpPr>
@@ -11128,7 +11128,7 @@
       </p:sp>
       <p:sp>
         <p:nvSpPr>
-          <p:cNvPr id="411498635" name="TextBox 6"/>
+          <p:cNvPr id="564559998" name="TextBox 6"/>
           <p:cNvSpPr txBox="1"/>
           <p:nvPr/>
         </p:nvSpPr>
@@ -11166,7 +11166,7 @@
       </p:sp>
       <p:sp>
         <p:nvSpPr>
-          <p:cNvPr id="450906319" name="TextBox 7"/>
+          <p:cNvPr id="794498119" name="TextBox 7"/>
           <p:cNvSpPr txBox="1"/>
           <p:nvPr/>
         </p:nvSpPr>
@@ -11204,7 +11204,7 @@
       </p:sp>
       <p:sp>
         <p:nvSpPr>
-          <p:cNvPr id="1832389497" name="Rectangle 8"/>
+          <p:cNvPr id="1176098293" name="Rectangle 8"/>
           <p:cNvSpPr/>
           <p:nvPr/>
         </p:nvSpPr>
@@ -11250,7 +11250,7 @@
       </p:sp>
       <p:sp>
         <p:nvSpPr>
-          <p:cNvPr id="344578763" name="TextBox 9"/>
+          <p:cNvPr id="2101347562" name="TextBox 9"/>
           <p:cNvSpPr txBox="1"/>
           <p:nvPr/>
         </p:nvSpPr>
@@ -11302,7 +11302,7 @@
       </p:sp>
       <p:sp>
         <p:nvSpPr>
-          <p:cNvPr id="163014971" name="Rounded Rectangle 10"/>
+          <p:cNvPr id="777640608" name="Rounded Rectangle 10"/>
           <p:cNvSpPr/>
           <p:nvPr/>
         </p:nvSpPr>
@@ -11352,7 +11352,7 @@
       </p:sp>
       <p:sp>
         <p:nvSpPr>
-          <p:cNvPr id="1652835875" name="TextBox 11"/>
+          <p:cNvPr id="477228030" name="TextBox 11"/>
           <p:cNvSpPr txBox="1"/>
           <p:nvPr/>
         </p:nvSpPr>
@@ -11390,7 +11390,7 @@
       </p:sp>
       <p:sp>
         <p:nvSpPr>
-          <p:cNvPr id="597145270" name="TextBox 12"/>
+          <p:cNvPr id="1557224782" name="TextBox 12"/>
           <p:cNvSpPr txBox="1"/>
           <p:nvPr/>
         </p:nvSpPr>
@@ -11428,7 +11428,7 @@
       </p:sp>
       <p:sp>
         <p:nvSpPr>
-          <p:cNvPr id="577667409" name="Rectangle 13"/>
+          <p:cNvPr id="2079297504" name="Rectangle 13"/>
           <p:cNvSpPr/>
           <p:nvPr/>
         </p:nvSpPr>
@@ -11474,7 +11474,7 @@
       </p:sp>
       <p:sp>
         <p:nvSpPr>
-          <p:cNvPr id="408962645" name="TextBox 14"/>
+          <p:cNvPr id="236626701" name="TextBox 14"/>
           <p:cNvSpPr txBox="1"/>
           <p:nvPr/>
         </p:nvSpPr>
@@ -11526,7 +11526,7 @@
       </p:sp>
       <p:sp>
         <p:nvSpPr>
-          <p:cNvPr id="794389514" name="Rounded Rectangle 15"/>
+          <p:cNvPr id="959056099" name="Rounded Rectangle 15"/>
           <p:cNvSpPr/>
           <p:nvPr/>
         </p:nvSpPr>
@@ -11576,7 +11576,7 @@
       </p:sp>
       <p:sp>
         <p:nvSpPr>
-          <p:cNvPr id="1541956451" name="TextBox 16"/>
+          <p:cNvPr id="1658837678" name="TextBox 16"/>
           <p:cNvSpPr txBox="1"/>
           <p:nvPr/>
         </p:nvSpPr>
@@ -11614,7 +11614,7 @@
       </p:sp>
       <p:sp>
         <p:nvSpPr>
-          <p:cNvPr id="1518561984" name="TextBox 17"/>
+          <p:cNvPr id="1010804015" name="TextBox 17"/>
           <p:cNvSpPr txBox="1"/>
           <p:nvPr/>
         </p:nvSpPr>
@@ -11652,7 +11652,7 @@
       </p:sp>
       <p:sp>
         <p:nvSpPr>
-          <p:cNvPr id="259562604" name="Rectangle 18"/>
+          <p:cNvPr id="1661682566" name="Rectangle 18"/>
           <p:cNvSpPr/>
           <p:nvPr/>
         </p:nvSpPr>
@@ -11698,7 +11698,7 @@
       </p:sp>
       <p:sp>
         <p:nvSpPr>
-          <p:cNvPr id="2036649213" name="TextBox 19"/>
+          <p:cNvPr id="2073743227" name="TextBox 19"/>
           <p:cNvSpPr txBox="1"/>
           <p:nvPr/>
         </p:nvSpPr>
@@ -11750,7 +11750,7 @@
       </p:sp>
       <p:sp>
         <p:nvSpPr>
-          <p:cNvPr id="1487013072" name="Rounded Rectangle 20"/>
+          <p:cNvPr id="295695439" name="Rounded Rectangle 20"/>
           <p:cNvSpPr/>
           <p:nvPr/>
         </p:nvSpPr>
@@ -11800,7 +11800,7 @@
       </p:sp>
       <p:sp>
         <p:nvSpPr>
-          <p:cNvPr id="1500652827" name="TextBox 21"/>
+          <p:cNvPr id="234321538" name="TextBox 21"/>
           <p:cNvSpPr txBox="1"/>
           <p:nvPr/>
         </p:nvSpPr>
@@ -11838,7 +11838,7 @@
       </p:sp>
       <p:sp>
         <p:nvSpPr>
-          <p:cNvPr id="2129062924" name="TextBox 22"/>
+          <p:cNvPr id="1973799512" name="TextBox 22"/>
           <p:cNvSpPr txBox="1"/>
           <p:nvPr/>
         </p:nvSpPr>
@@ -11876,7 +11876,7 @@
       </p:sp>
       <p:sp>
         <p:nvSpPr>
-          <p:cNvPr id="1575434629" name="Rectangle 23"/>
+          <p:cNvPr id="931911576" name="Rectangle 23"/>
           <p:cNvSpPr/>
           <p:nvPr/>
         </p:nvSpPr>
@@ -11922,7 +11922,7 @@
       </p:sp>
       <p:sp>
         <p:nvSpPr>
-          <p:cNvPr id="1105859252" name="TextBox 24"/>
+          <p:cNvPr id="1465171760" name="TextBox 24"/>
           <p:cNvSpPr txBox="1"/>
           <p:nvPr/>
         </p:nvSpPr>
@@ -11974,7 +11974,7 @@
       </p:sp>
       <p:sp>
         <p:nvSpPr>
-          <p:cNvPr id="1314547322" name="Rounded Rectangle 25"/>
+          <p:cNvPr id="1590752569" name="Rounded Rectangle 25"/>
           <p:cNvSpPr/>
           <p:nvPr/>
         </p:nvSpPr>
@@ -12024,7 +12024,7 @@
       </p:sp>
       <p:sp>
         <p:nvSpPr>
-          <p:cNvPr id="1238659884" name="TextBox 26"/>
+          <p:cNvPr id="2074615556" name="TextBox 26"/>
           <p:cNvSpPr txBox="1"/>
           <p:nvPr/>
         </p:nvSpPr>
@@ -12062,7 +12062,7 @@
       </p:sp>
       <p:sp>
         <p:nvSpPr>
-          <p:cNvPr id="634176048" name="TextBox 27"/>
+          <p:cNvPr id="1443006238" name="TextBox 27"/>
           <p:cNvSpPr txBox="1"/>
           <p:nvPr/>
         </p:nvSpPr>
@@ -12100,7 +12100,7 @@
       </p:sp>
       <p:sp>
         <p:nvSpPr>
-          <p:cNvPr id="1972224740" name="Rectangle 28"/>
+          <p:cNvPr id="450305261" name="Rectangle 28"/>
           <p:cNvSpPr/>
           <p:nvPr/>
         </p:nvSpPr>
@@ -12146,7 +12146,7 @@
       </p:sp>
       <p:sp>
         <p:nvSpPr>
-          <p:cNvPr id="1915967541" name="TextBox 29"/>
+          <p:cNvPr id="923594172" name="TextBox 29"/>
           <p:cNvSpPr txBox="1"/>
           <p:nvPr/>
         </p:nvSpPr>
@@ -12198,7 +12198,7 @@
       </p:sp>
       <p:sp>
         <p:nvSpPr>
-          <p:cNvPr id="1358201509" name="Rounded Rectangle 30"/>
+          <p:cNvPr id="171310835" name="Rounded Rectangle 30"/>
           <p:cNvSpPr/>
           <p:nvPr/>
         </p:nvSpPr>
@@ -12248,7 +12248,7 @@
       </p:sp>
       <p:sp>
         <p:nvSpPr>
-          <p:cNvPr id="1304272976" name="TextBox 31"/>
+          <p:cNvPr id="900282853" name="TextBox 31"/>
           <p:cNvSpPr txBox="1"/>
           <p:nvPr/>
         </p:nvSpPr>
@@ -12286,7 +12286,7 @@
       </p:sp>
       <p:sp>
         <p:nvSpPr>
-          <p:cNvPr id="2013043958" name="TextBox 32"/>
+          <p:cNvPr id="3202721" name="TextBox 32"/>
           <p:cNvSpPr txBox="1"/>
           <p:nvPr/>
         </p:nvSpPr>
@@ -12324,7 +12324,7 @@
       </p:sp>
       <p:sp>
         <p:nvSpPr>
-          <p:cNvPr id="2142960492" name="Rectangle 33"/>
+          <p:cNvPr id="726814454" name="Rectangle 33"/>
           <p:cNvSpPr/>
           <p:nvPr/>
         </p:nvSpPr>
@@ -12370,7 +12370,7 @@
       </p:sp>
       <p:sp>
         <p:nvSpPr>
-          <p:cNvPr id="1440228197" name="TextBox 34"/>
+          <p:cNvPr id="297899336" name="TextBox 34"/>
           <p:cNvSpPr txBox="1"/>
           <p:nvPr/>
         </p:nvSpPr>
@@ -12462,7 +12462,7 @@
       </p:grpSpPr>
       <p:sp>
         <p:nvSpPr>
-          <p:cNvPr id="1030941279" name="Rectangle 1"/>
+          <p:cNvPr id="977003250" name="Rectangle 1"/>
           <p:cNvSpPr/>
           <p:nvPr/>
         </p:nvSpPr>
@@ -12508,7 +12508,7 @@
       </p:sp>
       <p:sp>
         <p:nvSpPr>
-          <p:cNvPr id="457633469" name="TextBox 2"/>
+          <p:cNvPr id="327337276" name="TextBox 2"/>
           <p:cNvSpPr txBox="1"/>
           <p:nvPr/>
         </p:nvSpPr>
@@ -12546,7 +12546,7 @@
       </p:sp>
       <p:sp>
         <p:nvSpPr>
-          <p:cNvPr id="306129597" name="Rectangle 3"/>
+          <p:cNvPr id="287996260" name="Rectangle 3"/>
           <p:cNvSpPr/>
           <p:nvPr/>
         </p:nvSpPr>
@@ -12592,7 +12592,7 @@
       </p:sp>
       <p:pic>
         <p:nvPicPr>
-          <p:cNvPr id="1670565426" name="Picture 4" descr="admin_workflow_1784769134628.jpg"/>
+          <p:cNvPr id="1658248919" name="Picture 4" descr="admin_workflow_1784769134628.jpg"/>
           <p:cNvPicPr>
             <a:picLocks noChangeAspect="1"/>
           </p:cNvPicPr>
@@ -12654,7 +12654,7 @@
       </p:grpSpPr>
       <p:sp>
         <p:nvSpPr>
-          <p:cNvPr id="224196416" name="Rectangle 1"/>
+          <p:cNvPr id="358190003" name="Rectangle 1"/>
           <p:cNvSpPr/>
           <p:nvPr/>
         </p:nvSpPr>
@@ -12700,7 +12700,7 @@
       </p:sp>
       <p:sp>
         <p:nvSpPr>
-          <p:cNvPr id="158949474" name="TextBox 2"/>
+          <p:cNvPr id="899784819" name="TextBox 2"/>
           <p:cNvSpPr txBox="1"/>
           <p:nvPr/>
         </p:nvSpPr>
@@ -12738,7 +12738,7 @@
       </p:sp>
       <p:sp>
         <p:nvSpPr>
-          <p:cNvPr id="1341882941" name="Rectangle 3"/>
+          <p:cNvPr id="2065784760" name="Rectangle 3"/>
           <p:cNvSpPr/>
           <p:nvPr/>
         </p:nvSpPr>
@@ -12784,7 +12784,7 @@
       </p:sp>
       <p:sp>
         <p:nvSpPr>
-          <p:cNvPr id="1632166048" name="TextBox 4"/>
+          <p:cNvPr id="1606022163" name="TextBox 4"/>
           <p:cNvSpPr txBox="1"/>
           <p:nvPr/>
         </p:nvSpPr>
@@ -12829,7 +12829,7 @@
       </p:sp>
       <p:sp>
         <p:nvSpPr>
-          <p:cNvPr id="1361664482" name="Rounded Rectangle 5"/>
+          <p:cNvPr id="1587508349" name="Rounded Rectangle 5"/>
           <p:cNvSpPr/>
           <p:nvPr/>
         </p:nvSpPr>
@@ -12879,7 +12879,7 @@
       </p:sp>
       <p:sp>
         <p:nvSpPr>
-          <p:cNvPr id="209183806" name="Rounded Rectangle 6"/>
+          <p:cNvPr id="2133021586" name="Rounded Rectangle 6"/>
           <p:cNvSpPr/>
           <p:nvPr/>
         </p:nvSpPr>
@@ -12935,7 +12935,7 @@
       </p:sp>
       <p:sp>
         <p:nvSpPr>
-          <p:cNvPr id="2137637932" name="TextBox 7"/>
+          <p:cNvPr id="1434292983" name="TextBox 7"/>
           <p:cNvSpPr txBox="1"/>
           <p:nvPr/>
         </p:nvSpPr>
@@ -12980,7 +12980,7 @@
       </p:sp>
       <p:sp>
         <p:nvSpPr>
-          <p:cNvPr id="1334831484" name="Rounded Rectangle 8"/>
+          <p:cNvPr id="1261212835" name="Rounded Rectangle 8"/>
           <p:cNvSpPr/>
           <p:nvPr/>
         </p:nvSpPr>
@@ -13030,7 +13030,7 @@
       </p:sp>
       <p:sp>
         <p:nvSpPr>
-          <p:cNvPr id="1328588743" name="Rounded Rectangle 9"/>
+          <p:cNvPr id="1483586201" name="Rounded Rectangle 9"/>
           <p:cNvSpPr/>
           <p:nvPr/>
         </p:nvSpPr>
@@ -13086,7 +13086,7 @@
       </p:sp>
       <p:sp>
         <p:nvSpPr>
-          <p:cNvPr id="235859782" name="TextBox 10"/>
+          <p:cNvPr id="1319350163" name="TextBox 10"/>
           <p:cNvSpPr txBox="1"/>
           <p:nvPr/>
         </p:nvSpPr>
@@ -13131,7 +13131,7 @@
       </p:sp>
       <p:sp>
         <p:nvSpPr>
-          <p:cNvPr id="1173314214" name="Rounded Rectangle 11"/>
+          <p:cNvPr id="1753890650" name="Rounded Rectangle 11"/>
           <p:cNvSpPr/>
           <p:nvPr/>
         </p:nvSpPr>
@@ -13181,7 +13181,7 @@
       </p:sp>
       <p:sp>
         <p:nvSpPr>
-          <p:cNvPr id="1496233622" name="Rounded Rectangle 12"/>
+          <p:cNvPr id="790741401" name="Rounded Rectangle 12"/>
           <p:cNvSpPr/>
           <p:nvPr/>
         </p:nvSpPr>
@@ -13237,7 +13237,7 @@
       </p:sp>
       <p:sp>
         <p:nvSpPr>
-          <p:cNvPr id="720992472" name="TextBox 13"/>
+          <p:cNvPr id="266902147" name="TextBox 13"/>
           <p:cNvSpPr txBox="1"/>
           <p:nvPr/>
         </p:nvSpPr>
@@ -13282,7 +13282,7 @@
       </p:sp>
       <p:sp>
         <p:nvSpPr>
-          <p:cNvPr id="1781018137" name="Rounded Rectangle 14"/>
+          <p:cNvPr id="926440953" name="Rounded Rectangle 14"/>
           <p:cNvSpPr/>
           <p:nvPr/>
         </p:nvSpPr>
@@ -13332,7 +13332,7 @@
       </p:sp>
       <p:sp>
         <p:nvSpPr>
-          <p:cNvPr id="1783267084" name="Rounded Rectangle 15"/>
+          <p:cNvPr id="618964243" name="Rounded Rectangle 15"/>
           <p:cNvSpPr/>
           <p:nvPr/>
         </p:nvSpPr>
@@ -13388,7 +13388,7 @@
       </p:sp>
       <p:sp>
         <p:nvSpPr>
-          <p:cNvPr id="1540014340" name="TextBox 16"/>
+          <p:cNvPr id="1387698244" name="TextBox 16"/>
           <p:cNvSpPr txBox="1"/>
           <p:nvPr/>
         </p:nvSpPr>
@@ -13433,7 +13433,7 @@
       </p:sp>
       <p:sp>
         <p:nvSpPr>
-          <p:cNvPr id="275805046" name="Rounded Rectangle 17"/>
+          <p:cNvPr id="1556864927" name="Rounded Rectangle 17"/>
           <p:cNvSpPr/>
           <p:nvPr/>
         </p:nvSpPr>
@@ -13483,7 +13483,7 @@
       </p:sp>
       <p:sp>
         <p:nvSpPr>
-          <p:cNvPr id="146673055" name="Rounded Rectangle 18"/>
+          <p:cNvPr id="2010864010" name="Rounded Rectangle 18"/>
           <p:cNvSpPr/>
           <p:nvPr/>
         </p:nvSpPr>
@@ -13539,7 +13539,7 @@
       </p:sp>
       <p:sp>
         <p:nvSpPr>
-          <p:cNvPr id="15855591" name="TextBox 19"/>
+          <p:cNvPr id="1617547746" name="TextBox 19"/>
           <p:cNvSpPr txBox="1"/>
           <p:nvPr/>
         </p:nvSpPr>
@@ -13584,7 +13584,7 @@
       </p:sp>
       <p:sp>
         <p:nvSpPr>
-          <p:cNvPr id="1628079895" name="TextBox 20"/>
+          <p:cNvPr id="194396238" name="TextBox 20"/>
           <p:cNvSpPr txBox="1"/>
           <p:nvPr/>
         </p:nvSpPr>
@@ -13622,7 +13622,7 @@
       </p:sp>
       <p:sp>
         <p:nvSpPr>
-          <p:cNvPr id="898695726" name="TextBox 30"/>
+          <p:cNvPr id="728463684" name="TextBox 30"/>
           <p:cNvSpPr txBox="1"/>
           <p:nvPr/>
         </p:nvSpPr>
@@ -13688,7 +13688,7 @@
       </p:sp>
       <p:sp>
         <p:nvSpPr>
-          <p:cNvPr id="1200176432" name="Rounded Rectangle 2083350031"/>
+          <p:cNvPr id="1817212112" name="Rounded Rectangle 2083350031"/>
           <p:cNvSpPr/>
           <p:nvPr/>
         </p:nvSpPr>
@@ -13760,7 +13760,7 @@
       </p:sp>
       <p:sp>
         <p:nvSpPr>
-          <p:cNvPr id="1332667517" name="TextBox 2083350032"/>
+          <p:cNvPr id="1561310890" name="TextBox 2083350032"/>
           <p:cNvSpPr txBox="1"/>
           <p:nvPr/>
         </p:nvSpPr>
@@ -13797,7 +13797,7 @@
       </p:sp>
       <p:sp>
         <p:nvSpPr>
-          <p:cNvPr id="1721104750" name="Rounded Rectangle 2083350033"/>
+          <p:cNvPr id="805930676" name="Rounded Rectangle 2083350033"/>
           <p:cNvSpPr/>
           <p:nvPr/>
         </p:nvSpPr>
@@ -13869,7 +13869,7 @@
       </p:sp>
       <p:sp>
         <p:nvSpPr>
-          <p:cNvPr id="1056869113" name="TextBox 2083350034"/>
+          <p:cNvPr id="1881999018" name="TextBox 2083350034"/>
           <p:cNvSpPr txBox="1"/>
           <p:nvPr/>
         </p:nvSpPr>
@@ -13906,7 +13906,7 @@
       </p:sp>
       <p:sp>
         <p:nvSpPr>
-          <p:cNvPr id="143044930" name="Rounded Rectangle 2083350035"/>
+          <p:cNvPr id="1815479344" name="Rounded Rectangle 2083350035"/>
           <p:cNvSpPr/>
           <p:nvPr/>
         </p:nvSpPr>
@@ -13978,7 +13978,7 @@
       </p:sp>
       <p:sp>
         <p:nvSpPr>
-          <p:cNvPr id="1449586566" name="TextBox 2083350036"/>
+          <p:cNvPr id="1549219538" name="TextBox 2083350036"/>
           <p:cNvSpPr txBox="1"/>
           <p:nvPr/>
         </p:nvSpPr>
@@ -14015,7 +14015,7 @@
       </p:sp>
       <p:sp>
         <p:nvSpPr>
-          <p:cNvPr id="1931630923" name="Rounded Rectangle 2083350037"/>
+          <p:cNvPr id="2095920279" name="Rounded Rectangle 2083350037"/>
           <p:cNvSpPr/>
           <p:nvPr/>
         </p:nvSpPr>
@@ -14087,7 +14087,7 @@
       </p:sp>
       <p:sp>
         <p:nvSpPr>
-          <p:cNvPr id="1044388426" name="TextBox 2083350038"/>
+          <p:cNvPr id="2111139860" name="TextBox 2083350038"/>
           <p:cNvSpPr txBox="1"/>
           <p:nvPr/>
         </p:nvSpPr>
@@ -14124,7 +14124,7 @@
       </p:sp>
       <p:sp>
         <p:nvSpPr>
-          <p:cNvPr id="151446466" name="Rounded Rectangle 2083350039"/>
+          <p:cNvPr id="1336400794" name="Rounded Rectangle 2083350039"/>
           <p:cNvSpPr/>
           <p:nvPr/>
         </p:nvSpPr>
@@ -14196,7 +14196,7 @@
       </p:sp>
       <p:sp>
         <p:nvSpPr>
-          <p:cNvPr id="257714532" name="TextBox 2083350040"/>
+          <p:cNvPr id="850766840" name="TextBox 2083350040"/>
           <p:cNvSpPr txBox="1"/>
           <p:nvPr/>
         </p:nvSpPr>
@@ -14233,7 +14233,7 @@
       </p:sp>
       <p:sp>
         <p:nvSpPr>
-          <p:cNvPr id="1029770691" name="Rounded Rectangle 2083350041"/>
+          <p:cNvPr id="1656851767" name="Rounded Rectangle 2083350041"/>
           <p:cNvSpPr/>
           <p:nvPr/>
         </p:nvSpPr>
@@ -14345,7 +14345,7 @@
       </p:grpSpPr>
       <p:sp>
         <p:nvSpPr>
-          <p:cNvPr id="289869922" name="Rectangle 1"/>
+          <p:cNvPr id="1245676248" name="Rectangle 1"/>
           <p:cNvSpPr/>
           <p:nvPr/>
         </p:nvSpPr>
@@ -14391,7 +14391,7 @@
       </p:sp>
       <p:sp>
         <p:nvSpPr>
-          <p:cNvPr id="1329548255" name="TextBox 2"/>
+          <p:cNvPr id="884791344" name="TextBox 2"/>
           <p:cNvSpPr txBox="1"/>
           <p:nvPr/>
         </p:nvSpPr>
@@ -14429,7 +14429,7 @@
       </p:sp>
       <p:sp>
         <p:nvSpPr>
-          <p:cNvPr id="1455211584" name="Rectangle 3"/>
+          <p:cNvPr id="207403870" name="Rectangle 3"/>
           <p:cNvSpPr/>
           <p:nvPr/>
         </p:nvSpPr>
@@ -14475,7 +14475,7 @@
       </p:sp>
       <p:sp>
         <p:nvSpPr>
-          <p:cNvPr id="1166793395" name="Rounded Rectangle 1878494384"/>
+          <p:cNvPr id="597295234" name="Rounded Rectangle 1878494384"/>
           <p:cNvSpPr/>
           <p:nvPr/>
         </p:nvSpPr>
@@ -14525,7 +14525,7 @@
       </p:sp>
       <p:pic>
         <p:nvPicPr>
-          <p:cNvPr id="1363200074" name="Picture 1878494385" descr="icon_AN.png"/>
+          <p:cNvPr id="1341168337" name="Picture 1878494385" descr="icon_AN.png"/>
           <p:cNvPicPr>
             <a:picLocks noChangeAspect="1"/>
           </p:cNvPicPr>
@@ -14547,7 +14547,7 @@
       </p:pic>
       <p:sp>
         <p:nvSpPr>
-          <p:cNvPr id="735960347" name="TextBox 1878494386"/>
+          <p:cNvPr id="798097317" name="TextBox 1878494386"/>
           <p:cNvSpPr txBox="1"/>
           <p:nvPr/>
         </p:nvSpPr>
@@ -14584,7 +14584,7 @@
       </p:sp>
       <p:sp>
         <p:nvSpPr>
-          <p:cNvPr id="1246295650" name="TextBox 1878494387"/>
+          <p:cNvPr id="1255807196" name="TextBox 1878494387"/>
           <p:cNvSpPr txBox="1"/>
           <p:nvPr/>
         </p:nvSpPr>
@@ -14621,7 +14621,7 @@
       </p:sp>
       <p:sp>
         <p:nvSpPr>
-          <p:cNvPr id="1725653614" name="TextBox 1878494388"/>
+          <p:cNvPr id="798860311" name="TextBox 1878494388"/>
           <p:cNvSpPr txBox="1"/>
           <p:nvPr/>
         </p:nvSpPr>
@@ -14658,7 +14658,7 @@
       </p:sp>
       <p:sp>
         <p:nvSpPr>
-          <p:cNvPr id="396116091" name="Rounded Rectangle 1878494389"/>
+          <p:cNvPr id="160979826" name="Rounded Rectangle 1878494389"/>
           <p:cNvSpPr/>
           <p:nvPr/>
         </p:nvSpPr>
@@ -14708,7 +14708,7 @@
       </p:sp>
       <p:pic>
         <p:nvPicPr>
-          <p:cNvPr id="1607698403" name="Picture 1878494390" descr="icon_KA.png"/>
+          <p:cNvPr id="1646739252" name="Picture 1878494390" descr="icon_KA.png"/>
           <p:cNvPicPr>
             <a:picLocks noChangeAspect="1"/>
           </p:cNvPicPr>
@@ -14730,7 +14730,7 @@
       </p:pic>
       <p:sp>
         <p:nvSpPr>
-          <p:cNvPr id="231701271" name="TextBox 1878494391"/>
+          <p:cNvPr id="1755358350" name="TextBox 1878494391"/>
           <p:cNvSpPr txBox="1"/>
           <p:nvPr/>
         </p:nvSpPr>
@@ -14767,7 +14767,7 @@
       </p:sp>
       <p:sp>
         <p:nvSpPr>
-          <p:cNvPr id="12804493" name="TextBox 1878494392"/>
+          <p:cNvPr id="1620858378" name="TextBox 1878494392"/>
           <p:cNvSpPr txBox="1"/>
           <p:nvPr/>
         </p:nvSpPr>
@@ -14804,7 +14804,7 @@
       </p:sp>
       <p:sp>
         <p:nvSpPr>
-          <p:cNvPr id="2109634771" name="TextBox 1878494393"/>
+          <p:cNvPr id="1294541842" name="TextBox 1878494393"/>
           <p:cNvSpPr txBox="1"/>
           <p:nvPr/>
         </p:nvSpPr>
@@ -14841,7 +14841,7 @@
       </p:sp>
       <p:sp>
         <p:nvSpPr>
-          <p:cNvPr id="1375986491" name="Rounded Rectangle 1878494394"/>
+          <p:cNvPr id="1913062221" name="Rounded Rectangle 1878494394"/>
           <p:cNvSpPr/>
           <p:nvPr/>
         </p:nvSpPr>
@@ -14891,7 +14891,7 @@
       </p:sp>
       <p:pic>
         <p:nvPicPr>
-          <p:cNvPr id="1328388527" name="Picture 1878494395" descr="icon_KP.png"/>
+          <p:cNvPr id="1334157563" name="Picture 1878494395" descr="icon_KP.png"/>
           <p:cNvPicPr>
             <a:picLocks noChangeAspect="1"/>
           </p:cNvPicPr>
@@ -14913,7 +14913,7 @@
       </p:pic>
       <p:sp>
         <p:nvSpPr>
-          <p:cNvPr id="855209988" name="TextBox 1878494396"/>
+          <p:cNvPr id="56844406" name="TextBox 1878494396"/>
           <p:cNvSpPr txBox="1"/>
           <p:nvPr/>
         </p:nvSpPr>
@@ -14950,7 +14950,7 @@
       </p:sp>
       <p:sp>
         <p:nvSpPr>
-          <p:cNvPr id="1240081489" name="TextBox 1878494397"/>
+          <p:cNvPr id="567321943" name="TextBox 1878494397"/>
           <p:cNvSpPr txBox="1"/>
           <p:nvPr/>
         </p:nvSpPr>
@@ -14987,7 +14987,7 @@
       </p:sp>
       <p:sp>
         <p:nvSpPr>
-          <p:cNvPr id="138600458" name="TextBox 1878494398"/>
+          <p:cNvPr id="174594146" name="TextBox 1878494398"/>
           <p:cNvSpPr txBox="1"/>
           <p:nvPr/>
         </p:nvSpPr>
@@ -15024,7 +15024,7 @@
       </p:sp>
       <p:sp>
         <p:nvSpPr>
-          <p:cNvPr id="1774206552" name="Rounded Rectangle 1878494399"/>
+          <p:cNvPr id="402496028" name="Rounded Rectangle 1878494399"/>
           <p:cNvSpPr/>
           <p:nvPr/>
         </p:nvSpPr>
@@ -15074,7 +15074,7 @@
       </p:sp>
       <p:pic>
         <p:nvPicPr>
-          <p:cNvPr id="1005528194" name="Picture 1878494400" descr="icon_KB.png"/>
+          <p:cNvPr id="480374123" name="Picture 1878494400" descr="icon_KB.png"/>
           <p:cNvPicPr>
             <a:picLocks noChangeAspect="1"/>
           </p:cNvPicPr>
@@ -15096,7 +15096,7 @@
       </p:pic>
       <p:sp>
         <p:nvSpPr>
-          <p:cNvPr id="2124379457" name="TextBox 1878494401"/>
+          <p:cNvPr id="959611016" name="TextBox 1878494401"/>
           <p:cNvSpPr txBox="1"/>
           <p:nvPr/>
         </p:nvSpPr>
@@ -15133,7 +15133,7 @@
       </p:sp>
       <p:sp>
         <p:nvSpPr>
-          <p:cNvPr id="1552245536" name="TextBox 1878494402"/>
+          <p:cNvPr id="587504236" name="TextBox 1878494402"/>
           <p:cNvSpPr txBox="1"/>
           <p:nvPr/>
         </p:nvSpPr>
@@ -15170,7 +15170,7 @@
       </p:sp>
       <p:sp>
         <p:nvSpPr>
-          <p:cNvPr id="792803831" name="TextBox 1878494403"/>
+          <p:cNvPr id="1525655869" name="TextBox 1878494403"/>
           <p:cNvSpPr txBox="1"/>
           <p:nvPr/>
         </p:nvSpPr>
@@ -15207,7 +15207,7 @@
       </p:sp>
       <p:sp>
         <p:nvSpPr>
-          <p:cNvPr id="892060932" name="Rounded Rectangle 1878494404"/>
+          <p:cNvPr id="935559287" name="Rounded Rectangle 1878494404"/>
           <p:cNvSpPr/>
           <p:nvPr/>
         </p:nvSpPr>
@@ -15257,7 +15257,7 @@
       </p:sp>
       <p:pic>
         <p:nvPicPr>
-          <p:cNvPr id="665326043" name="Picture 1878494405" descr="icon_KD.png"/>
+          <p:cNvPr id="201072389" name="Picture 1878494405" descr="icon_KD.png"/>
           <p:cNvPicPr>
             <a:picLocks noChangeAspect="1"/>
           </p:cNvPicPr>
@@ -15279,7 +15279,7 @@
       </p:pic>
       <p:sp>
         <p:nvSpPr>
-          <p:cNvPr id="1586468289" name="TextBox 1878494406"/>
+          <p:cNvPr id="963274383" name="TextBox 1878494406"/>
           <p:cNvSpPr txBox="1"/>
           <p:nvPr/>
         </p:nvSpPr>
@@ -15316,7 +15316,7 @@
       </p:sp>
       <p:sp>
         <p:nvSpPr>
-          <p:cNvPr id="1377557294" name="TextBox 1878494407"/>
+          <p:cNvPr id="771909302" name="TextBox 1878494407"/>
           <p:cNvSpPr txBox="1"/>
           <p:nvPr/>
         </p:nvSpPr>
@@ -15353,7 +15353,7 @@
       </p:sp>
       <p:sp>
         <p:nvSpPr>
-          <p:cNvPr id="981436504" name="TextBox 1878494408"/>
+          <p:cNvPr id="1600689139" name="TextBox 1878494408"/>
           <p:cNvSpPr txBox="1"/>
           <p:nvPr/>
         </p:nvSpPr>
@@ -15390,7 +15390,7 @@
       </p:sp>
       <p:sp>
         <p:nvSpPr>
-          <p:cNvPr id="1968804703" name="Rounded Rectangle 1878494409"/>
+          <p:cNvPr id="1737315564" name="Rounded Rectangle 1878494409"/>
           <p:cNvSpPr/>
           <p:nvPr/>
         </p:nvSpPr>
@@ -15440,7 +15440,7 @@
       </p:sp>
       <p:pic>
         <p:nvPicPr>
-          <p:cNvPr id="1213806287" name="Picture 1878494410" descr="icon_DR.png"/>
+          <p:cNvPr id="1834384044" name="Picture 1878494410" descr="icon_DR.png"/>
           <p:cNvPicPr>
             <a:picLocks noChangeAspect="1"/>
           </p:cNvPicPr>
@@ -15462,7 +15462,7 @@
       </p:pic>
       <p:sp>
         <p:nvSpPr>
-          <p:cNvPr id="312257536" name="TextBox 1878494411"/>
+          <p:cNvPr id="766374385" name="TextBox 1878494411"/>
           <p:cNvSpPr txBox="1"/>
           <p:nvPr/>
         </p:nvSpPr>
@@ -15499,7 +15499,7 @@
       </p:sp>
       <p:sp>
         <p:nvSpPr>
-          <p:cNvPr id="1978105456" name="TextBox 1878494412"/>
+          <p:cNvPr id="280098932" name="TextBox 1878494412"/>
           <p:cNvSpPr txBox="1"/>
           <p:nvPr/>
         </p:nvSpPr>
@@ -15536,7 +15536,7 @@
       </p:sp>
       <p:sp>
         <p:nvSpPr>
-          <p:cNvPr id="783103732" name="TextBox 1878494413"/>
+          <p:cNvPr id="1464755592" name="TextBox 1878494413"/>
           <p:cNvSpPr txBox="1"/>
           <p:nvPr/>
         </p:nvSpPr>
@@ -15573,7 +15573,7 @@
       </p:sp>
       <p:sp>
         <p:nvSpPr>
-          <p:cNvPr id="774938710" name="Rounded Rectangle 1878494414"/>
+          <p:cNvPr id="478100484" name="Rounded Rectangle 1878494414"/>
           <p:cNvSpPr/>
           <p:nvPr/>
         </p:nvSpPr>
@@ -15623,7 +15623,7 @@
       </p:sp>
       <p:pic>
         <p:nvPicPr>
-          <p:cNvPr id="1147030522" name="Picture 1878494415" descr="icon_AD.png"/>
+          <p:cNvPr id="1877434820" name="Picture 1878494415" descr="icon_AD.png"/>
           <p:cNvPicPr>
             <a:picLocks noChangeAspect="1"/>
           </p:cNvPicPr>
@@ -15645,7 +15645,7 @@
       </p:pic>
       <p:sp>
         <p:nvSpPr>
-          <p:cNvPr id="148193071" name="TextBox 1878494416"/>
+          <p:cNvPr id="1832296798" name="TextBox 1878494416"/>
           <p:cNvSpPr txBox="1"/>
           <p:nvPr/>
         </p:nvSpPr>
@@ -15682,7 +15682,7 @@
       </p:sp>
       <p:sp>
         <p:nvSpPr>
-          <p:cNvPr id="500787051" name="TextBox 1878494417"/>
+          <p:cNvPr id="785131102" name="TextBox 1878494417"/>
           <p:cNvSpPr txBox="1"/>
           <p:nvPr/>
         </p:nvSpPr>
@@ -15719,7 +15719,7 @@
       </p:sp>
       <p:sp>
         <p:nvSpPr>
-          <p:cNvPr id="2137363816" name="TextBox 1878494418"/>
+          <p:cNvPr id="288178455" name="TextBox 1878494418"/>
           <p:cNvSpPr txBox="1"/>
           <p:nvPr/>
         </p:nvSpPr>
@@ -15796,7 +15796,7 @@
       </p:grpSpPr>
       <p:sp>
         <p:nvSpPr>
-          <p:cNvPr id="885113438" name="Rectangle 1"/>
+          <p:cNvPr id="949255206" name="Rectangle 1"/>
           <p:cNvSpPr/>
           <p:nvPr/>
         </p:nvSpPr>
@@ -15842,7 +15842,7 @@
       </p:sp>
       <p:sp>
         <p:nvSpPr>
-          <p:cNvPr id="1368937958" name="TextBox 2"/>
+          <p:cNvPr id="188422224" name="TextBox 2"/>
           <p:cNvSpPr txBox="1"/>
           <p:nvPr/>
         </p:nvSpPr>
@@ -15880,7 +15880,7 @@
       </p:sp>
       <p:sp>
         <p:nvSpPr>
-          <p:cNvPr id="767824342" name="Rectangle 3"/>
+          <p:cNvPr id="1869195924" name="Rectangle 3"/>
           <p:cNvSpPr/>
           <p:nvPr/>
         </p:nvSpPr>
@@ -15926,7 +15926,7 @@
       </p:sp>
       <p:sp>
         <p:nvSpPr>
-          <p:cNvPr id="317380602" name="Oval 4"/>
+          <p:cNvPr id="1603670468" name="Oval 4"/>
           <p:cNvSpPr/>
           <p:nvPr/>
         </p:nvSpPr>
@@ -15980,7 +15980,7 @@
       </p:sp>
       <p:sp>
         <p:nvSpPr>
-          <p:cNvPr id="50265025" name="TextBox 5"/>
+          <p:cNvPr id="1520314091" name="TextBox 5"/>
           <p:cNvSpPr txBox="1"/>
           <p:nvPr/>
         </p:nvSpPr>
@@ -16018,7 +16018,7 @@
       </p:sp>
       <p:sp>
         <p:nvSpPr>
-          <p:cNvPr id="127164244" name="TextBox 6"/>
+          <p:cNvPr id="481124689" name="TextBox 6"/>
           <p:cNvSpPr txBox="1"/>
           <p:nvPr/>
         </p:nvSpPr>
@@ -16056,7 +16056,7 @@
       </p:sp>
       <p:sp>
         <p:nvSpPr>
-          <p:cNvPr id="989254439" name="Oval 7"/>
+          <p:cNvPr id="891058932" name="Oval 7"/>
           <p:cNvSpPr/>
           <p:nvPr/>
         </p:nvSpPr>
@@ -16110,7 +16110,7 @@
       </p:sp>
       <p:sp>
         <p:nvSpPr>
-          <p:cNvPr id="645976002" name="TextBox 8"/>
+          <p:cNvPr id="1081277538" name="TextBox 8"/>
           <p:cNvSpPr txBox="1"/>
           <p:nvPr/>
         </p:nvSpPr>
@@ -16148,7 +16148,7 @@
       </p:sp>
       <p:sp>
         <p:nvSpPr>
-          <p:cNvPr id="955774045" name="TextBox 9"/>
+          <p:cNvPr id="490095913" name="TextBox 9"/>
           <p:cNvSpPr txBox="1"/>
           <p:nvPr/>
         </p:nvSpPr>
@@ -16186,7 +16186,7 @@
       </p:sp>
       <p:sp>
         <p:nvSpPr>
-          <p:cNvPr id="1938456538" name="Oval 10"/>
+          <p:cNvPr id="1900020161" name="Oval 10"/>
           <p:cNvSpPr/>
           <p:nvPr/>
         </p:nvSpPr>
@@ -16240,7 +16240,7 @@
       </p:sp>
       <p:sp>
         <p:nvSpPr>
-          <p:cNvPr id="2041554516" name="TextBox 11"/>
+          <p:cNvPr id="791762416" name="TextBox 11"/>
           <p:cNvSpPr txBox="1"/>
           <p:nvPr/>
         </p:nvSpPr>
@@ -16278,7 +16278,7 @@
       </p:sp>
       <p:sp>
         <p:nvSpPr>
-          <p:cNvPr id="1027444474" name="TextBox 12"/>
+          <p:cNvPr id="1144613538" name="TextBox 12"/>
           <p:cNvSpPr txBox="1"/>
           <p:nvPr/>
         </p:nvSpPr>
@@ -16316,7 +16316,7 @@
       </p:sp>
       <p:sp>
         <p:nvSpPr>
-          <p:cNvPr id="1958941388" name="Oval 13"/>
+          <p:cNvPr id="1232400576" name="Oval 13"/>
           <p:cNvSpPr/>
           <p:nvPr/>
         </p:nvSpPr>
@@ -16370,7 +16370,7 @@
       </p:sp>
       <p:sp>
         <p:nvSpPr>
-          <p:cNvPr id="959994174" name="TextBox 14"/>
+          <p:cNvPr id="2122271950" name="TextBox 14"/>
           <p:cNvSpPr txBox="1"/>
           <p:nvPr/>
         </p:nvSpPr>
@@ -16408,7 +16408,7 @@
       </p:sp>
       <p:sp>
         <p:nvSpPr>
-          <p:cNvPr id="1961290839" name="TextBox 15"/>
+          <p:cNvPr id="1792135681" name="TextBox 15"/>
           <p:cNvSpPr txBox="1"/>
           <p:nvPr/>
         </p:nvSpPr>
@@ -16446,7 +16446,7 @@
       </p:sp>
       <p:sp>
         <p:nvSpPr>
-          <p:cNvPr id="680681423" name="Oval 16"/>
+          <p:cNvPr id="1503272447" name="Oval 16"/>
           <p:cNvSpPr/>
           <p:nvPr/>
         </p:nvSpPr>
@@ -16500,7 +16500,7 @@
       </p:sp>
       <p:sp>
         <p:nvSpPr>
-          <p:cNvPr id="800614307" name="TextBox 17"/>
+          <p:cNvPr id="2007189942" name="TextBox 17"/>
           <p:cNvSpPr txBox="1"/>
           <p:nvPr/>
         </p:nvSpPr>
@@ -16538,7 +16538,7 @@
       </p:sp>
       <p:sp>
         <p:nvSpPr>
-          <p:cNvPr id="1226220426" name="TextBox 18"/>
+          <p:cNvPr id="1402854445" name="TextBox 18"/>
           <p:cNvSpPr txBox="1"/>
           <p:nvPr/>
         </p:nvSpPr>
@@ -16576,7 +16576,7 @@
       </p:sp>
       <p:sp>
         <p:nvSpPr>
-          <p:cNvPr id="1533009309" name="Oval 19"/>
+          <p:cNvPr id="1879389442" name="Oval 19"/>
           <p:cNvSpPr/>
           <p:nvPr/>
         </p:nvSpPr>
@@ -16630,7 +16630,7 @@
       </p:sp>
       <p:sp>
         <p:nvSpPr>
-          <p:cNvPr id="1540844533" name="TextBox 20"/>
+          <p:cNvPr id="1373111212" name="TextBox 20"/>
           <p:cNvSpPr txBox="1"/>
           <p:nvPr/>
         </p:nvSpPr>
@@ -16668,7 +16668,7 @@
       </p:sp>
       <p:sp>
         <p:nvSpPr>
-          <p:cNvPr id="1408008811" name="TextBox 21"/>
+          <p:cNvPr id="55766369" name="TextBox 21"/>
           <p:cNvSpPr txBox="1"/>
           <p:nvPr/>
         </p:nvSpPr>
@@ -16706,7 +16706,7 @@
       </p:sp>
       <p:sp>
         <p:nvSpPr>
-          <p:cNvPr id="632197544" name="Oval 22"/>
+          <p:cNvPr id="1173829702" name="Oval 22"/>
           <p:cNvSpPr/>
           <p:nvPr/>
         </p:nvSpPr>
@@ -16760,7 +16760,7 @@
       </p:sp>
       <p:sp>
         <p:nvSpPr>
-          <p:cNvPr id="2080114775" name="TextBox 23"/>
+          <p:cNvPr id="1951304089" name="TextBox 23"/>
           <p:cNvSpPr txBox="1"/>
           <p:nvPr/>
         </p:nvSpPr>
@@ -16798,7 +16798,7 @@
       </p:sp>
       <p:sp>
         <p:nvSpPr>
-          <p:cNvPr id="1263589933" name="TextBox 24"/>
+          <p:cNvPr id="632802079" name="TextBox 24"/>
           <p:cNvSpPr txBox="1"/>
           <p:nvPr/>
         </p:nvSpPr>
@@ -16836,7 +16836,7 @@
       </p:sp>
       <p:sp>
         <p:nvSpPr>
-          <p:cNvPr id="915136331" name="Oval 25"/>
+          <p:cNvPr id="903578265" name="Oval 25"/>
           <p:cNvSpPr/>
           <p:nvPr/>
         </p:nvSpPr>
@@ -16890,7 +16890,7 @@
       </p:sp>
       <p:sp>
         <p:nvSpPr>
-          <p:cNvPr id="1576422216" name="TextBox 26"/>
+          <p:cNvPr id="764959505" name="TextBox 26"/>
           <p:cNvSpPr txBox="1"/>
           <p:nvPr/>
         </p:nvSpPr>
@@ -16928,7 +16928,7 @@
       </p:sp>
       <p:sp>
         <p:nvSpPr>
-          <p:cNvPr id="1702916902" name="TextBox 27"/>
+          <p:cNvPr id="1775396441" name="TextBox 27"/>
           <p:cNvSpPr txBox="1"/>
           <p:nvPr/>
         </p:nvSpPr>
@@ -17006,7 +17006,7 @@
       </p:grpSpPr>
       <p:sp>
         <p:nvSpPr>
-          <p:cNvPr id="1361658774" name="Rectangle 1"/>
+          <p:cNvPr id="54922938" name="Rectangle 1"/>
           <p:cNvSpPr/>
           <p:nvPr/>
         </p:nvSpPr>
@@ -17052,7 +17052,7 @@
       </p:sp>
       <p:sp>
         <p:nvSpPr>
-          <p:cNvPr id="1209860496" name="Rectangle 2"/>
+          <p:cNvPr id="130680756" name="Rectangle 2"/>
           <p:cNvSpPr/>
           <p:nvPr/>
         </p:nvSpPr>
@@ -17098,7 +17098,7 @@
       </p:sp>
       <p:sp>
         <p:nvSpPr>
-          <p:cNvPr id="826639781" name="Rectangle 3"/>
+          <p:cNvPr id="1681782088" name="Rectangle 3"/>
           <p:cNvSpPr/>
           <p:nvPr/>
         </p:nvSpPr>
@@ -17144,7 +17144,7 @@
       </p:sp>
       <p:sp>
         <p:nvSpPr>
-          <p:cNvPr id="723316792" name="TextBox 4"/>
+          <p:cNvPr id="145497605" name="TextBox 4"/>
           <p:cNvSpPr txBox="1"/>
           <p:nvPr/>
         </p:nvSpPr>
@@ -17182,7 +17182,7 @@
       </p:sp>
       <p:sp>
         <p:nvSpPr>
-          <p:cNvPr id="1467668754" name="Rectangle 5"/>
+          <p:cNvPr id="95229407" name="Rectangle 5"/>
           <p:cNvSpPr/>
           <p:nvPr/>
         </p:nvSpPr>
@@ -17228,7 +17228,7 @@
       </p:sp>
       <p:sp>
         <p:nvSpPr>
-          <p:cNvPr id="1617738452" name="TextBox 6"/>
+          <p:cNvPr id="1513296802" name="TextBox 6"/>
           <p:cNvSpPr txBox="1"/>
           <p:nvPr/>
         </p:nvSpPr>
@@ -17266,7 +17266,7 @@
       </p:sp>
       <p:sp>
         <p:nvSpPr>
-          <p:cNvPr id="1725977944" name="TextBox 7"/>
+          <p:cNvPr id="837394006" name="TextBox 7"/>
           <p:cNvSpPr txBox="1"/>
           <p:nvPr/>
         </p:nvSpPr>
@@ -17304,7 +17304,7 @@
       </p:sp>
       <p:sp>
         <p:nvSpPr>
-          <p:cNvPr id="458201415" name="TextBox 8"/>
+          <p:cNvPr id="1089918815" name="TextBox 8"/>
           <p:cNvSpPr txBox="1"/>
           <p:nvPr/>
         </p:nvSpPr>
@@ -17382,7 +17382,7 @@
       </p:grpSpPr>
       <p:sp>
         <p:nvSpPr>
-          <p:cNvPr id="1671624353" name="Oval 1"/>
+          <p:cNvPr id="810328328" name="Oval 1"/>
           <p:cNvSpPr/>
           <p:nvPr/>
         </p:nvSpPr>
@@ -17436,7 +17436,7 @@
       </p:sp>
       <p:sp>
         <p:nvSpPr>
-          <p:cNvPr id="1011187925" name="TextBox 2"/>
+          <p:cNvPr id="1181796125" name="TextBox 2"/>
           <p:cNvSpPr txBox="1"/>
           <p:nvPr/>
         </p:nvSpPr>
@@ -17474,7 +17474,7 @@
       </p:sp>
       <p:sp>
         <p:nvSpPr>
-          <p:cNvPr id="706234917" name="TextBox 3"/>
+          <p:cNvPr id="674479827" name="TextBox 3"/>
           <p:cNvSpPr txBox="1"/>
           <p:nvPr/>
         </p:nvSpPr>
@@ -17512,7 +17512,7 @@
       </p:sp>
       <p:sp>
         <p:nvSpPr>
-          <p:cNvPr id="337129343" name="Rectangle 4"/>
+          <p:cNvPr id="1494856" name="Rectangle 4"/>
           <p:cNvSpPr/>
           <p:nvPr/>
         </p:nvSpPr>
@@ -17558,7 +17558,7 @@
       </p:sp>
       <p:sp>
         <p:nvSpPr>
-          <p:cNvPr id="1927684092" name="Rounded Rectangle 5"/>
+          <p:cNvPr id="425902138" name="Rounded Rectangle 5"/>
           <p:cNvSpPr/>
           <p:nvPr/>
         </p:nvSpPr>
@@ -17621,7 +17621,7 @@
       </p:sp>
       <p:sp>
         <p:nvSpPr>
-          <p:cNvPr id="1992175257" name="Right Arrow 6"/>
+          <p:cNvPr id="716658355" name="Right Arrow 6"/>
           <p:cNvSpPr/>
           <p:nvPr/>
         </p:nvSpPr>
@@ -17670,7 +17670,7 @@
       </p:sp>
       <p:sp>
         <p:nvSpPr>
-          <p:cNvPr id="830920337" name="Rounded Rectangle 7"/>
+          <p:cNvPr id="2000720692" name="Rounded Rectangle 7"/>
           <p:cNvSpPr/>
           <p:nvPr/>
         </p:nvSpPr>
@@ -17733,7 +17733,7 @@
       </p:sp>
       <p:sp>
         <p:nvSpPr>
-          <p:cNvPr id="1279851811" name="Right Arrow 8"/>
+          <p:cNvPr id="846525186" name="Right Arrow 8"/>
           <p:cNvSpPr/>
           <p:nvPr/>
         </p:nvSpPr>
@@ -17782,7 +17782,7 @@
       </p:sp>
       <p:sp>
         <p:nvSpPr>
-          <p:cNvPr id="1592102594" name="Rounded Rectangle 9"/>
+          <p:cNvPr id="169819868" name="Rounded Rectangle 9"/>
           <p:cNvSpPr/>
           <p:nvPr/>
         </p:nvSpPr>
@@ -17845,7 +17845,7 @@
       </p:sp>
       <p:sp>
         <p:nvSpPr>
-          <p:cNvPr id="1124214502" name="Right Arrow 10"/>
+          <p:cNvPr id="2131387887" name="Right Arrow 10"/>
           <p:cNvSpPr/>
           <p:nvPr/>
         </p:nvSpPr>
@@ -17894,7 +17894,7 @@
       </p:sp>
       <p:sp>
         <p:nvSpPr>
-          <p:cNvPr id="100164883" name="Rounded Rectangle 11"/>
+          <p:cNvPr id="738666401" name="Rounded Rectangle 11"/>
           <p:cNvSpPr/>
           <p:nvPr/>
         </p:nvSpPr>
@@ -17957,7 +17957,7 @@
       </p:sp>
       <p:sp>
         <p:nvSpPr>
-          <p:cNvPr id="126678081" name="Right Arrow 12"/>
+          <p:cNvPr id="2008839845" name="Right Arrow 12"/>
           <p:cNvSpPr/>
           <p:nvPr/>
         </p:nvSpPr>
@@ -18006,7 +18006,7 @@
       </p:sp>
       <p:sp>
         <p:nvSpPr>
-          <p:cNvPr id="857815247" name="Rounded Rectangle 13"/>
+          <p:cNvPr id="231986136" name="Rounded Rectangle 13"/>
           <p:cNvSpPr/>
           <p:nvPr/>
         </p:nvSpPr>
@@ -18069,7 +18069,7 @@
       </p:sp>
       <p:sp>
         <p:nvSpPr>
-          <p:cNvPr id="2146715521" name="Right Arrow 14"/>
+          <p:cNvPr id="363446670" name="Right Arrow 14"/>
           <p:cNvSpPr/>
           <p:nvPr/>
         </p:nvSpPr>
@@ -18118,7 +18118,7 @@
       </p:sp>
       <p:sp>
         <p:nvSpPr>
-          <p:cNvPr id="594156469" name="Rounded Rectangle 15"/>
+          <p:cNvPr id="1659339004" name="Rounded Rectangle 15"/>
           <p:cNvSpPr/>
           <p:nvPr/>
         </p:nvSpPr>
@@ -18181,7 +18181,7 @@
       </p:sp>
       <p:sp>
         <p:nvSpPr>
-          <p:cNvPr id="229393989" name="TextBox 16"/>
+          <p:cNvPr id="1556624314" name="TextBox 16"/>
           <p:cNvSpPr txBox="1"/>
           <p:nvPr/>
         </p:nvSpPr>
@@ -18219,7 +18219,7 @@
       </p:sp>
       <p:sp>
         <p:nvSpPr>
-          <p:cNvPr id="354143780" name="Rounded Rectangle 17"/>
+          <p:cNvPr id="1294412036" name="Rounded Rectangle 17"/>
           <p:cNvSpPr/>
           <p:nvPr/>
         </p:nvSpPr>
@@ -18275,7 +18275,7 @@
       </p:sp>
       <p:sp>
         <p:nvSpPr>
-          <p:cNvPr id="240134673" name="TextBox 18"/>
+          <p:cNvPr id="328164621" name="TextBox 18"/>
           <p:cNvSpPr txBox="1"/>
           <p:nvPr/>
         </p:nvSpPr>
@@ -18313,7 +18313,7 @@
       </p:sp>
       <p:sp>
         <p:nvSpPr>
-          <p:cNvPr id="940993353" name="Rounded Rectangle 19"/>
+          <p:cNvPr id="1962028747" name="Rounded Rectangle 19"/>
           <p:cNvSpPr/>
           <p:nvPr/>
         </p:nvSpPr>
@@ -18369,7 +18369,7 @@
       </p:sp>
       <p:sp>
         <p:nvSpPr>
-          <p:cNvPr id="1077065982" name="TextBox 20"/>
+          <p:cNvPr id="1735293010" name="TextBox 20"/>
           <p:cNvSpPr txBox="1"/>
           <p:nvPr/>
         </p:nvSpPr>
@@ -18407,7 +18407,7 @@
       </p:sp>
       <p:sp>
         <p:nvSpPr>
-          <p:cNvPr id="2103229488" name="Rounded Rectangle 21"/>
+          <p:cNvPr id="1654444923" name="Rounded Rectangle 21"/>
           <p:cNvSpPr/>
           <p:nvPr/>
         </p:nvSpPr>
@@ -18463,7 +18463,7 @@
       </p:sp>
       <p:sp>
         <p:nvSpPr>
-          <p:cNvPr id="1336069128" name="TextBox 22"/>
+          <p:cNvPr id="448514624" name="TextBox 22"/>
           <p:cNvSpPr txBox="1"/>
           <p:nvPr/>
         </p:nvSpPr>
@@ -18501,7 +18501,7 @@
       </p:sp>
       <p:sp>
         <p:nvSpPr>
-          <p:cNvPr id="2126571731" name="Rounded Rectangle 23"/>
+          <p:cNvPr id="1423227580" name="Rounded Rectangle 23"/>
           <p:cNvSpPr/>
           <p:nvPr/>
         </p:nvSpPr>
@@ -18557,7 +18557,7 @@
       </p:sp>
       <p:sp>
         <p:nvSpPr>
-          <p:cNvPr id="157183099" name="TextBox 24"/>
+          <p:cNvPr id="289294020" name="TextBox 24"/>
           <p:cNvSpPr txBox="1"/>
           <p:nvPr/>
         </p:nvSpPr>
@@ -18595,7 +18595,7 @@
       </p:sp>
       <p:sp>
         <p:nvSpPr>
-          <p:cNvPr id="631936896" name="Rounded Rectangle 25"/>
+          <p:cNvPr id="833209986" name="Rounded Rectangle 25"/>
           <p:cNvSpPr/>
           <p:nvPr/>
         </p:nvSpPr>
@@ -18651,7 +18651,7 @@
       </p:sp>
       <p:sp>
         <p:nvSpPr>
-          <p:cNvPr id="1909418649" name="TextBox 26"/>
+          <p:cNvPr id="96120296" name="TextBox 26"/>
           <p:cNvSpPr txBox="1"/>
           <p:nvPr/>
         </p:nvSpPr>
@@ -18689,7 +18689,7 @@
       </p:sp>
       <p:sp>
         <p:nvSpPr>
-          <p:cNvPr id="503547000" name="Rounded Rectangle 27"/>
+          <p:cNvPr id="1312086341" name="Rounded Rectangle 27"/>
           <p:cNvSpPr/>
           <p:nvPr/>
         </p:nvSpPr>
@@ -18745,7 +18745,7 @@
       </p:sp>
       <p:sp>
         <p:nvSpPr>
-          <p:cNvPr id="1898894192" name="TextBox 28"/>
+          <p:cNvPr id="49715250" name="TextBox 28"/>
           <p:cNvSpPr txBox="1"/>
           <p:nvPr/>
         </p:nvSpPr>
@@ -18783,7 +18783,7 @@
       </p:sp>
       <p:sp>
         <p:nvSpPr>
-          <p:cNvPr id="407857229" name="Rounded Rectangle 29"/>
+          <p:cNvPr id="385347031" name="Rounded Rectangle 29"/>
           <p:cNvSpPr/>
           <p:nvPr/>
         </p:nvSpPr>
@@ -18833,7 +18833,7 @@
       </p:sp>
       <p:sp>
         <p:nvSpPr>
-          <p:cNvPr id="1736596351" name="TextBox 30"/>
+          <p:cNvPr id="175760719" name="TextBox 30"/>
           <p:cNvSpPr txBox="1"/>
           <p:nvPr/>
         </p:nvSpPr>
@@ -18871,7 +18871,7 @@
       </p:sp>
       <p:sp>
         <p:nvSpPr>
-          <p:cNvPr id="116258275" name="TextBox 31"/>
+          <p:cNvPr id="793357946" name="TextBox 31"/>
           <p:cNvSpPr txBox="1"/>
           <p:nvPr/>
         </p:nvSpPr>
@@ -18963,7 +18963,7 @@
       </p:grpSpPr>
       <p:sp>
         <p:nvSpPr>
-          <p:cNvPr id="1915111346" name="Rectangle 1"/>
+          <p:cNvPr id="362583939" name="Rectangle 1"/>
           <p:cNvSpPr/>
           <p:nvPr/>
         </p:nvSpPr>
@@ -19009,7 +19009,7 @@
       </p:sp>
       <p:sp>
         <p:nvSpPr>
-          <p:cNvPr id="1977166636" name="Rectangle 3"/>
+          <p:cNvPr id="142964739" name="Rectangle 3"/>
           <p:cNvSpPr/>
           <p:nvPr/>
         </p:nvSpPr>
@@ -19055,7 +19055,7 @@
       </p:sp>
       <p:sp>
         <p:nvSpPr>
-          <p:cNvPr id="1588508922" name="TextBox 478974201"/>
+          <p:cNvPr id="470919673" name="TextBox 478974201"/>
           <p:cNvSpPr txBox="1"/>
           <p:nvPr/>
         </p:nvSpPr>
@@ -19092,7 +19092,7 @@
       </p:sp>
       <p:sp>
         <p:nvSpPr>
-          <p:cNvPr id="2141682874" name="TextBox 478974202"/>
+          <p:cNvPr id="599060903" name="TextBox 478974202"/>
           <p:cNvSpPr txBox="1"/>
           <p:nvPr/>
         </p:nvSpPr>
@@ -19129,7 +19129,7 @@
       </p:sp>
       <p:sp>
         <p:nvSpPr>
-          <p:cNvPr id="777757641" name="Rounded Rectangle 478974203"/>
+          <p:cNvPr id="1389992829" name="Rounded Rectangle 478974203"/>
           <p:cNvSpPr/>
           <p:nvPr/>
         </p:nvSpPr>
@@ -19201,7 +19201,7 @@
       </p:sp>
       <p:sp>
         <p:nvSpPr>
-          <p:cNvPr id="2145383802" name="Rounded Rectangle 478974204"/>
+          <p:cNvPr id="1863120364" name="Rounded Rectangle 478974204"/>
           <p:cNvSpPr/>
           <p:nvPr/>
         </p:nvSpPr>
@@ -19273,7 +19273,7 @@
       </p:sp>
       <p:sp>
         <p:nvSpPr>
-          <p:cNvPr id="1710846438" name="Down Arrow 478974205"/>
+          <p:cNvPr id="339513038" name="Down Arrow 478974205"/>
           <p:cNvSpPr/>
           <p:nvPr/>
         </p:nvSpPr>
@@ -19324,7 +19324,7 @@
       </p:sp>
       <p:sp>
         <p:nvSpPr>
-          <p:cNvPr id="1079137997" name="Rounded Rectangle 478974206"/>
+          <p:cNvPr id="1370500958" name="Rounded Rectangle 478974206"/>
           <p:cNvSpPr/>
           <p:nvPr/>
         </p:nvSpPr>
@@ -19396,7 +19396,7 @@
       </p:sp>
       <p:sp>
         <p:nvSpPr>
-          <p:cNvPr id="1073445843" name="Down Arrow 478974207"/>
+          <p:cNvPr id="322707410" name="Down Arrow 478974207"/>
           <p:cNvSpPr/>
           <p:nvPr/>
         </p:nvSpPr>
@@ -19447,7 +19447,7 @@
       </p:sp>
       <p:sp>
         <p:nvSpPr>
-          <p:cNvPr id="24188574" name="Rounded Rectangle 478974208"/>
+          <p:cNvPr id="871451417" name="Rounded Rectangle 478974208"/>
           <p:cNvSpPr/>
           <p:nvPr/>
         </p:nvSpPr>
@@ -19519,7 +19519,7 @@
       </p:sp>
       <p:sp>
         <p:nvSpPr>
-          <p:cNvPr id="2065176646" name="Down Arrow 478974209"/>
+          <p:cNvPr id="190505869" name="Down Arrow 478974209"/>
           <p:cNvSpPr/>
           <p:nvPr/>
         </p:nvSpPr>
@@ -19570,7 +19570,7 @@
       </p:sp>
       <p:sp>
         <p:nvSpPr>
-          <p:cNvPr id="592926293" name="Rounded Rectangle 478974210"/>
+          <p:cNvPr id="75132912" name="Rounded Rectangle 478974210"/>
           <p:cNvSpPr/>
           <p:nvPr/>
         </p:nvSpPr>
@@ -19642,7 +19642,7 @@
       </p:sp>
       <p:sp>
         <p:nvSpPr>
-          <p:cNvPr id="332233794" name="Down Arrow 478974211"/>
+          <p:cNvPr id="1563517341" name="Down Arrow 478974211"/>
           <p:cNvSpPr/>
           <p:nvPr/>
         </p:nvSpPr>
@@ -19693,7 +19693,7 @@
       </p:sp>
       <p:sp>
         <p:nvSpPr>
-          <p:cNvPr id="2056748812" name="Diamond 478974212"/>
+          <p:cNvPr id="1712102659" name="Diamond 478974212"/>
           <p:cNvSpPr/>
           <p:nvPr/>
         </p:nvSpPr>
@@ -19763,7 +19763,7 @@
       </p:sp>
       <p:sp>
         <p:nvSpPr>
-          <p:cNvPr id="297411884" name="Down Arrow 478974213"/>
+          <p:cNvPr id="889551466" name="Down Arrow 478974213"/>
           <p:cNvSpPr/>
           <p:nvPr/>
         </p:nvSpPr>
@@ -19814,7 +19814,7 @@
       </p:sp>
       <p:sp>
         <p:nvSpPr>
-          <p:cNvPr id="873869983" name="TextBox 478974214"/>
+          <p:cNvPr id="944061526" name="TextBox 478974214"/>
           <p:cNvSpPr txBox="1"/>
           <p:nvPr/>
         </p:nvSpPr>
@@ -19851,7 +19851,7 @@
       </p:sp>
       <p:cxnSp>
         <p:nvCxnSpPr>
-          <p:cNvPr id="1073508837" name="Connector 478974215"/>
+          <p:cNvPr id="1110235659" name="Connector 478974215"/>
           <p:cNvCxnSpPr/>
           <p:nvPr/>
         </p:nvCxnSpPr>
@@ -19886,7 +19886,7 @@
       </p:cxnSp>
       <p:sp>
         <p:nvSpPr>
-          <p:cNvPr id="522914996" name="Rounded Rectangle 478974216"/>
+          <p:cNvPr id="1050214839" name="Rounded Rectangle 478974216"/>
           <p:cNvSpPr/>
           <p:nvPr/>
         </p:nvSpPr>
@@ -19958,7 +19958,7 @@
       </p:sp>
       <p:sp>
         <p:nvSpPr>
-          <p:cNvPr id="278580122" name="TextBox 478974217"/>
+          <p:cNvPr id="1101210814" name="TextBox 478974217"/>
           <p:cNvSpPr txBox="1"/>
           <p:nvPr/>
         </p:nvSpPr>
@@ -19995,7 +19995,7 @@
       </p:sp>
       <p:cxnSp>
         <p:nvCxnSpPr>
-          <p:cNvPr id="1269978041" name="Connector 478974218"/>
+          <p:cNvPr id="1452373555" name="Connector 478974218"/>
           <p:cNvCxnSpPr/>
           <p:nvPr/>
         </p:nvCxnSpPr>
@@ -20030,7 +20030,7 @@
       </p:cxnSp>
       <p:sp>
         <p:nvSpPr>
-          <p:cNvPr id="518214621" name="Rounded Rectangle 478974219"/>
+          <p:cNvPr id="2103282230" name="Rounded Rectangle 478974219"/>
           <p:cNvSpPr/>
           <p:nvPr/>
         </p:nvSpPr>
@@ -20102,7 +20102,7 @@
       </p:sp>
       <p:sp>
         <p:nvSpPr>
-          <p:cNvPr id="410640322" name="Rounded Rectangle 478974220"/>
+          <p:cNvPr id="1122578001" name="Rounded Rectangle 478974220"/>
           <p:cNvSpPr/>
           <p:nvPr/>
         </p:nvSpPr>
@@ -20174,7 +20174,7 @@
       </p:sp>
       <p:sp>
         <p:nvSpPr>
-          <p:cNvPr id="810852815" name="Rounded Rectangle 478974221"/>
+          <p:cNvPr id="1414259249" name="Rounded Rectangle 478974221"/>
           <p:cNvSpPr/>
           <p:nvPr/>
         </p:nvSpPr>
@@ -20246,7 +20246,7 @@
       </p:sp>
       <p:sp>
         <p:nvSpPr>
-          <p:cNvPr id="2107693257" name="Down Arrow 478974222"/>
+          <p:cNvPr id="1606686144" name="Down Arrow 478974222"/>
           <p:cNvSpPr/>
           <p:nvPr/>
         </p:nvSpPr>
@@ -20297,7 +20297,7 @@
       </p:sp>
       <p:cxnSp>
         <p:nvCxnSpPr>
-          <p:cNvPr id="1375766460" name="Connector 478974223"/>
+          <p:cNvPr id="1478641121" name="Connector 478974223"/>
           <p:cNvCxnSpPr/>
           <p:nvPr/>
         </p:nvCxnSpPr>
@@ -20332,7 +20332,7 @@
       </p:cxnSp>
       <p:cxnSp>
         <p:nvCxnSpPr>
-          <p:cNvPr id="735537620" name="Connector 478974224"/>
+          <p:cNvPr id="1466135950" name="Connector 478974224"/>
           <p:cNvCxnSpPr/>
           <p:nvPr/>
         </p:nvCxnSpPr>
@@ -20367,7 +20367,7 @@
       </p:cxnSp>
       <p:sp>
         <p:nvSpPr>
-          <p:cNvPr id="2002458363" name="Down Arrow 478974225"/>
+          <p:cNvPr id="945324505" name="Down Arrow 478974225"/>
           <p:cNvSpPr/>
           <p:nvPr/>
         </p:nvSpPr>
@@ -20418,7 +20418,7 @@
       </p:sp>
       <p:cxnSp>
         <p:nvCxnSpPr>
-          <p:cNvPr id="1208328249" name="Connector 478974226"/>
+          <p:cNvPr id="902117031" name="Connector 478974226"/>
           <p:cNvCxnSpPr/>
           <p:nvPr/>
         </p:nvCxnSpPr>
@@ -20453,7 +20453,7 @@
       </p:cxnSp>
       <p:sp>
         <p:nvSpPr>
-          <p:cNvPr id="1058692566" name="Down Arrow 478974227"/>
+          <p:cNvPr id="277059924" name="Down Arrow 478974227"/>
           <p:cNvSpPr/>
           <p:nvPr/>
         </p:nvSpPr>
@@ -20544,11 +20544,11 @@
       </p:grpSpPr>
       <p:sp>
         <p:nvSpPr>
-          <p:cNvPr id="2" name="Rectangle 1"/>
+          <p:cNvPr id="821642224" name="Rectangle 1"/>
           <p:cNvSpPr/>
           <p:nvPr/>
         </p:nvSpPr>
-        <p:spPr>
+        <p:spPr bwMode="auto">
           <a:xfrm>
             <a:off x="0" y="0"/>
             <a:ext cx="73152" cy="6858000"/>
@@ -20583,17 +20583,20 @@
           <a:bodyPr rtlCol="0" anchor="ctr"/>
           <a:lstStyle/>
           <a:p>
-            <a:pPr algn="ctr"/>
-          </a:p>
-        </p:txBody>
-      </p:sp>
-      <p:sp>
-        <p:nvSpPr>
-          <p:cNvPr id="3" name="Oval 2"/>
+            <a:pPr algn="ctr">
+              <a:defRPr/>
+            </a:pPr>
+            <a:endParaRPr/>
+          </a:p>
+        </p:txBody>
+      </p:sp>
+      <p:sp>
+        <p:nvSpPr>
+          <p:cNvPr id="1287171390" name="Oval 2"/>
           <p:cNvSpPr/>
           <p:nvPr/>
         </p:nvSpPr>
-        <p:spPr>
+        <p:spPr bwMode="auto">
           <a:xfrm>
             <a:off x="457200" y="274320"/>
             <a:ext cx="548640" cy="548640"/>
@@ -20636,18 +20639,20 @@
               </a:defRPr>
             </a:pPr>
             <a:r>
+              <a:rPr/>
               <a:t>2</a:t>
             </a:r>
-          </a:p>
-        </p:txBody>
-      </p:sp>
-      <p:sp>
-        <p:nvSpPr>
-          <p:cNvPr id="4" name="TextBox 3"/>
+            <a:endParaRPr/>
+          </a:p>
+        </p:txBody>
+      </p:sp>
+      <p:sp>
+        <p:nvSpPr>
+          <p:cNvPr id="234859694" name="TextBox 3"/>
           <p:cNvSpPr txBox="1"/>
           <p:nvPr/>
         </p:nvSpPr>
-        <p:spPr>
+        <p:spPr bwMode="auto">
           <a:xfrm>
             <a:off x="1143000" y="228600"/>
             <a:ext cx="9144000" cy="411480"/>
@@ -20669,18 +20674,20 @@
               </a:defRPr>
             </a:pPr>
             <a:r>
+              <a:rPr/>
               <a:t>CARA KERJA ANALIS (INPUT KREDIT)</a:t>
             </a:r>
-          </a:p>
-        </p:txBody>
-      </p:sp>
-      <p:sp>
-        <p:nvSpPr>
-          <p:cNvPr id="5" name="TextBox 4"/>
+            <a:endParaRPr/>
+          </a:p>
+        </p:txBody>
+      </p:sp>
+      <p:sp>
+        <p:nvSpPr>
+          <p:cNvPr id="537735372" name="TextBox 4"/>
           <p:cNvSpPr txBox="1"/>
           <p:nvPr/>
         </p:nvSpPr>
-        <p:spPr>
+        <p:spPr bwMode="auto">
           <a:xfrm>
             <a:off x="1143000" y="640080"/>
             <a:ext cx="9144000" cy="274320"/>
@@ -20702,18 +20709,20 @@
               </a:defRPr>
             </a:pPr>
             <a:r>
+              <a:rPr/>
               <a:t>Proses Input Data Pengajuan Kredit oleh Analis</a:t>
             </a:r>
-          </a:p>
-        </p:txBody>
-      </p:sp>
-      <p:sp>
-        <p:nvSpPr>
-          <p:cNvPr id="6" name="Rectangle 5"/>
+            <a:endParaRPr/>
+          </a:p>
+        </p:txBody>
+      </p:sp>
+      <p:sp>
+        <p:nvSpPr>
+          <p:cNvPr id="1373579521" name="Rectangle 5"/>
           <p:cNvSpPr/>
           <p:nvPr/>
         </p:nvSpPr>
-        <p:spPr>
+        <p:spPr bwMode="auto">
           <a:xfrm>
             <a:off x="457200" y="960120"/>
             <a:ext cx="11277295" cy="27432"/>
@@ -20748,17 +20757,20 @@
           <a:bodyPr rtlCol="0" anchor="ctr"/>
           <a:lstStyle/>
           <a:p>
-            <a:pPr algn="ctr"/>
-          </a:p>
-        </p:txBody>
-      </p:sp>
-      <p:sp>
-        <p:nvSpPr>
-          <p:cNvPr id="7" name="TextBox 6"/>
+            <a:pPr algn="ctr">
+              <a:defRPr/>
+            </a:pPr>
+            <a:endParaRPr/>
+          </a:p>
+        </p:txBody>
+      </p:sp>
+      <p:sp>
+        <p:nvSpPr>
+          <p:cNvPr id="1101263050" name="TextBox 6"/>
           <p:cNvSpPr txBox="1"/>
           <p:nvPr/>
         </p:nvSpPr>
-        <p:spPr>
+        <p:spPr bwMode="auto">
           <a:xfrm>
             <a:off x="457200" y="1051560"/>
             <a:ext cx="10058400" cy="274320"/>
@@ -20780,24 +20792,28 @@
               </a:defRPr>
             </a:pPr>
             <a:r>
+              <a:rPr/>
               <a:t>JENIS KREDIT YANG TERSEDIA:</a:t>
             </a:r>
-          </a:p>
-        </p:txBody>
-      </p:sp>
-      <p:sp>
-        <p:nvSpPr>
-          <p:cNvPr id="8" name="Rounded Rectangle 7"/>
+            <a:endParaRPr/>
+          </a:p>
+        </p:txBody>
+      </p:sp>
+      <p:sp>
+        <p:nvSpPr>
+          <p:cNvPr id="1680840616" name="Rounded Rectangle 7"/>
           <p:cNvSpPr/>
           <p:nvPr/>
         </p:nvSpPr>
-        <p:spPr>
+        <p:spPr bwMode="auto">
           <a:xfrm>
             <a:off x="457200" y="1371600"/>
             <a:ext cx="1783080" cy="640080"/>
           </a:xfrm>
           <a:prstGeom prst="roundRect">
-            <a:avLst/>
+            <a:avLst>
+              <a:gd name="adj" fmla="val 16667"/>
+            </a:avLst>
           </a:prstGeom>
           <a:solidFill>
             <a:srgbClr val="2980B9"/>
@@ -20823,7 +20839,7 @@
           </a:fontRef>
         </p:style>
         <p:txBody>
-          <a:bodyPr rtlCol="0" anchor="ctr" wrap="square"/>
+          <a:bodyPr wrap="square" rtlCol="0" anchor="ctr"/>
           <a:lstStyle/>
           <a:p>
             <a:pPr algn="ctr">
@@ -20834,8 +20850,10 @@
               </a:defRPr>
             </a:pPr>
             <a:r>
+              <a:rPr/>
               <a:t>Umum</a:t>
             </a:r>
+            <a:endParaRPr/>
           </a:p>
           <a:p>
             <a:pPr algn="ctr">
@@ -20846,28 +20864,35 @@
               </a:defRPr>
             </a:pPr>
             <a:r>
+              <a:rPr/>
               <a:t>Kredit umum untuk</a:t>
             </a:r>
-            <a:br/>
-            <a:r>
+            <a:br>
+              <a:rPr/>
+            </a:br>
+            <a:r>
+              <a:rPr/>
               <a:t>nasabah perorangan</a:t>
             </a:r>
-          </a:p>
-        </p:txBody>
-      </p:sp>
-      <p:sp>
-        <p:nvSpPr>
-          <p:cNvPr id="9" name="Rounded Rectangle 8"/>
+            <a:endParaRPr/>
+          </a:p>
+        </p:txBody>
+      </p:sp>
+      <p:sp>
+        <p:nvSpPr>
+          <p:cNvPr id="988090886" name="Rounded Rectangle 8"/>
           <p:cNvSpPr/>
           <p:nvPr/>
         </p:nvSpPr>
-        <p:spPr>
+        <p:spPr bwMode="auto">
           <a:xfrm>
             <a:off x="2331720" y="1371600"/>
             <a:ext cx="1783080" cy="640080"/>
           </a:xfrm>
           <a:prstGeom prst="roundRect">
-            <a:avLst/>
+            <a:avLst>
+              <a:gd name="adj" fmla="val 16667"/>
+            </a:avLst>
           </a:prstGeom>
           <a:solidFill>
             <a:srgbClr val="27AE60"/>
@@ -20893,7 +20918,7 @@
           </a:fontRef>
         </p:style>
         <p:txBody>
-          <a:bodyPr rtlCol="0" anchor="ctr" wrap="square"/>
+          <a:bodyPr wrap="square" rtlCol="0" anchor="ctr"/>
           <a:lstStyle/>
           <a:p>
             <a:pPr algn="ctr">
@@ -20904,8 +20929,10 @@
               </a:defRPr>
             </a:pPr>
             <a:r>
+              <a:rPr/>
               <a:t>PPPK</a:t>
             </a:r>
+            <a:endParaRPr/>
           </a:p>
           <a:p>
             <a:pPr algn="ctr">
@@ -20916,28 +20943,35 @@
               </a:defRPr>
             </a:pPr>
             <a:r>
+              <a:rPr/>
               <a:t>Kredit untuk Pegawai</a:t>
             </a:r>
-            <a:br/>
-            <a:r>
+            <a:br>
+              <a:rPr/>
+            </a:br>
+            <a:r>
+              <a:rPr/>
               <a:t>Pemerintah (PPPK)</a:t>
             </a:r>
-          </a:p>
-        </p:txBody>
-      </p:sp>
-      <p:sp>
-        <p:nvSpPr>
-          <p:cNvPr id="10" name="Rounded Rectangle 9"/>
+            <a:endParaRPr/>
+          </a:p>
+        </p:txBody>
+      </p:sp>
+      <p:sp>
+        <p:nvSpPr>
+          <p:cNvPr id="1054682716" name="Rounded Rectangle 9"/>
           <p:cNvSpPr/>
           <p:nvPr/>
         </p:nvSpPr>
-        <p:spPr>
+        <p:spPr bwMode="auto">
           <a:xfrm>
             <a:off x="4206240" y="1371600"/>
             <a:ext cx="1783080" cy="640080"/>
           </a:xfrm>
           <a:prstGeom prst="roundRect">
-            <a:avLst/>
+            <a:avLst>
+              <a:gd name="adj" fmla="val 16667"/>
+            </a:avLst>
           </a:prstGeom>
           <a:solidFill>
             <a:srgbClr val="8E44AD"/>
@@ -20963,7 +20997,7 @@
           </a:fontRef>
         </p:style>
         <p:txBody>
-          <a:bodyPr rtlCol="0" anchor="ctr" wrap="square"/>
+          <a:bodyPr wrap="square" rtlCol="0" anchor="ctr"/>
           <a:lstStyle/>
           <a:p>
             <a:pPr algn="ctr">
@@ -20974,8 +21008,10 @@
               </a:defRPr>
             </a:pPr>
             <a:r>
+              <a:rPr/>
               <a:t>Perangkat Desa</a:t>
             </a:r>
+            <a:endParaRPr/>
           </a:p>
           <a:p>
             <a:pPr algn="ctr">
@@ -20986,28 +21022,35 @@
               </a:defRPr>
             </a:pPr>
             <a:r>
+              <a:rPr/>
               <a:t>Kredit khusus</a:t>
             </a:r>
-            <a:br/>
-            <a:r>
+            <a:br>
+              <a:rPr/>
+            </a:br>
+            <a:r>
+              <a:rPr/>
               <a:t>Perangkat Desa</a:t>
             </a:r>
-          </a:p>
-        </p:txBody>
-      </p:sp>
-      <p:sp>
-        <p:nvSpPr>
-          <p:cNvPr id="11" name="Rounded Rectangle 10"/>
+            <a:endParaRPr/>
+          </a:p>
+        </p:txBody>
+      </p:sp>
+      <p:sp>
+        <p:nvSpPr>
+          <p:cNvPr id="1961761228" name="Rounded Rectangle 10"/>
           <p:cNvSpPr/>
           <p:nvPr/>
         </p:nvSpPr>
-        <p:spPr>
+        <p:spPr bwMode="auto">
           <a:xfrm>
             <a:off x="6080760" y="1371600"/>
             <a:ext cx="1783080" cy="640080"/>
           </a:xfrm>
           <a:prstGeom prst="roundRect">
-            <a:avLst/>
+            <a:avLst>
+              <a:gd name="adj" fmla="val 16667"/>
+            </a:avLst>
           </a:prstGeom>
           <a:solidFill>
             <a:srgbClr val="E67E22"/>
@@ -21033,7 +21076,7 @@
           </a:fontRef>
         </p:style>
         <p:txBody>
-          <a:bodyPr rtlCol="0" anchor="ctr" wrap="square"/>
+          <a:bodyPr wrap="square" rtlCol="0" anchor="ctr"/>
           <a:lstStyle/>
           <a:p>
             <a:pPr algn="ctr">
@@ -21044,8 +21087,10 @@
               </a:defRPr>
             </a:pPr>
             <a:r>
+              <a:rPr/>
               <a:t>KPR</a:t>
             </a:r>
+            <a:endParaRPr/>
           </a:p>
           <a:p>
             <a:pPr algn="ctr">
@@ -21056,28 +21101,35 @@
               </a:defRPr>
             </a:pPr>
             <a:r>
+              <a:rPr/>
               <a:t>Kredit Pemilikan</a:t>
             </a:r>
-            <a:br/>
-            <a:r>
+            <a:br>
+              <a:rPr/>
+            </a:br>
+            <a:r>
+              <a:rPr/>
               <a:t>Rumah</a:t>
             </a:r>
-          </a:p>
-        </p:txBody>
-      </p:sp>
-      <p:sp>
-        <p:nvSpPr>
-          <p:cNvPr id="12" name="Rounded Rectangle 11"/>
+            <a:endParaRPr/>
+          </a:p>
+        </p:txBody>
+      </p:sp>
+      <p:sp>
+        <p:nvSpPr>
+          <p:cNvPr id="1064583026" name="Rounded Rectangle 11"/>
           <p:cNvSpPr/>
           <p:nvPr/>
         </p:nvSpPr>
-        <p:spPr>
+        <p:spPr bwMode="auto">
           <a:xfrm>
             <a:off x="7955280" y="1371600"/>
             <a:ext cx="1783080" cy="640080"/>
           </a:xfrm>
           <a:prstGeom prst="roundRect">
-            <a:avLst/>
+            <a:avLst>
+              <a:gd name="adj" fmla="val 16667"/>
+            </a:avLst>
           </a:prstGeom>
           <a:solidFill>
             <a:srgbClr val="F1C40F"/>
@@ -21103,7 +21155,7 @@
           </a:fontRef>
         </p:style>
         <p:txBody>
-          <a:bodyPr rtlCol="0" anchor="ctr" wrap="square"/>
+          <a:bodyPr wrap="square" rtlCol="0" anchor="ctr"/>
           <a:lstStyle/>
           <a:p>
             <a:pPr algn="ctr">
@@ -21114,8 +21166,10 @@
               </a:defRPr>
             </a:pPr>
             <a:r>
+              <a:rPr/>
               <a:t>Kretamas</a:t>
             </a:r>
+            <a:endParaRPr/>
           </a:p>
           <a:p>
             <a:pPr algn="ctr">
@@ -21126,28 +21180,35 @@
               </a:defRPr>
             </a:pPr>
             <a:r>
+              <a:rPr/>
               <a:t>Kredit Emas</a:t>
             </a:r>
-            <a:br/>
-            <a:r>
+            <a:br>
+              <a:rPr/>
+            </a:br>
+            <a:r>
+              <a:rPr/>
               <a:t>(Gold Loan)</a:t>
             </a:r>
-          </a:p>
-        </p:txBody>
-      </p:sp>
-      <p:sp>
-        <p:nvSpPr>
-          <p:cNvPr id="13" name="Rounded Rectangle 12"/>
+            <a:endParaRPr/>
+          </a:p>
+        </p:txBody>
+      </p:sp>
+      <p:sp>
+        <p:nvSpPr>
+          <p:cNvPr id="1568033353" name="Rounded Rectangle 12"/>
           <p:cNvSpPr/>
           <p:nvPr/>
         </p:nvSpPr>
-        <p:spPr>
+        <p:spPr bwMode="auto">
           <a:xfrm>
             <a:off x="9829800" y="1371600"/>
             <a:ext cx="1783080" cy="640080"/>
           </a:xfrm>
           <a:prstGeom prst="roundRect">
-            <a:avLst/>
+            <a:avLst>
+              <a:gd name="adj" fmla="val 16667"/>
+            </a:avLst>
           </a:prstGeom>
           <a:solidFill>
             <a:srgbClr val="2C3E50"/>
@@ -21173,7 +21234,7 @@
           </a:fontRef>
         </p:style>
         <p:txBody>
-          <a:bodyPr rtlCol="0" anchor="ctr" wrap="square"/>
+          <a:bodyPr wrap="square" rtlCol="0" anchor="ctr"/>
           <a:lstStyle/>
           <a:p>
             <a:pPr algn="ctr">
@@ -21184,8 +21245,10 @@
               </a:defRPr>
             </a:pPr>
             <a:r>
+              <a:rPr/>
               <a:t>Cash Collateral</a:t>
             </a:r>
+            <a:endParaRPr/>
           </a:p>
           <a:p>
             <a:pPr algn="ctr">
@@ -21196,28 +21259,35 @@
               </a:defRPr>
             </a:pPr>
             <a:r>
+              <a:rPr/>
               <a:t>Kredit dengan</a:t>
             </a:r>
-            <a:br/>
-            <a:r>
+            <a:br>
+              <a:rPr/>
+            </a:br>
+            <a:r>
+              <a:rPr/>
               <a:t>jaminan deposito</a:t>
             </a:r>
-          </a:p>
-        </p:txBody>
-      </p:sp>
-      <p:sp>
-        <p:nvSpPr>
-          <p:cNvPr id="14" name="Rounded Rectangle 13"/>
+            <a:endParaRPr/>
+          </a:p>
+        </p:txBody>
+      </p:sp>
+      <p:sp>
+        <p:nvSpPr>
+          <p:cNvPr id="1424883366" name="Rounded Rectangle 13"/>
           <p:cNvSpPr/>
           <p:nvPr/>
         </p:nvSpPr>
-        <p:spPr>
+        <p:spPr bwMode="auto">
           <a:xfrm>
             <a:off x="457200" y="2103120"/>
             <a:ext cx="11277295" cy="320040"/>
           </a:xfrm>
           <a:prstGeom prst="roundRect">
-            <a:avLst/>
+            <a:avLst>
+              <a:gd name="adj" fmla="val 16667"/>
+            </a:avLst>
           </a:prstGeom>
           <a:solidFill>
             <a:srgbClr val="FDEDEC"/>
@@ -21243,7 +21313,7 @@
           </a:fontRef>
         </p:style>
         <p:txBody>
-          <a:bodyPr rtlCol="0" anchor="ctr" wrap="square"/>
+          <a:bodyPr wrap="square" rtlCol="0" anchor="ctr"/>
           <a:lstStyle/>
           <a:p>
             <a:pPr algn="ctr">
@@ -21254,18 +21324,20 @@
               </a:defRPr>
             </a:pPr>
             <a:r>
+              <a:rPr/>
               <a:t>⚠️  PENTING: Jenis kredit di atas terbatas untuk maksimal plafond kredit Rp 50.000.000 (lima puluh juta rupiah)</a:t>
             </a:r>
-          </a:p>
-        </p:txBody>
-      </p:sp>
-      <p:sp>
-        <p:nvSpPr>
-          <p:cNvPr id="15" name="TextBox 14"/>
+            <a:endParaRPr/>
+          </a:p>
+        </p:txBody>
+      </p:sp>
+      <p:sp>
+        <p:nvSpPr>
+          <p:cNvPr id="1683246439" name="TextBox 14"/>
           <p:cNvSpPr txBox="1"/>
           <p:nvPr/>
         </p:nvSpPr>
-        <p:spPr>
+        <p:spPr bwMode="auto">
           <a:xfrm>
             <a:off x="457200" y="2514600"/>
             <a:ext cx="10058400" cy="274320"/>
@@ -21287,24 +21359,28 @@
               </a:defRPr>
             </a:pPr>
             <a:r>
+              <a:rPr/>
               <a:t>6 TAHAP INPUT DATA KREDIT:</a:t>
             </a:r>
-          </a:p>
-        </p:txBody>
-      </p:sp>
-      <p:sp>
-        <p:nvSpPr>
-          <p:cNvPr id="16" name="Rounded Rectangle 15"/>
+            <a:endParaRPr/>
+          </a:p>
+        </p:txBody>
+      </p:sp>
+      <p:sp>
+        <p:nvSpPr>
+          <p:cNvPr id="2094233578" name="Rounded Rectangle 15"/>
           <p:cNvSpPr/>
           <p:nvPr/>
         </p:nvSpPr>
-        <p:spPr>
+        <p:spPr bwMode="auto">
           <a:xfrm>
             <a:off x="457200" y="2834640"/>
             <a:ext cx="3566160" cy="640080"/>
           </a:xfrm>
           <a:prstGeom prst="roundRect">
-            <a:avLst/>
+            <a:avLst>
+              <a:gd name="adj" fmla="val 16667"/>
+            </a:avLst>
           </a:prstGeom>
           <a:solidFill>
             <a:srgbClr val="F0F4F8"/>
@@ -21333,17 +21409,20 @@
           <a:bodyPr rtlCol="0" anchor="ctr"/>
           <a:lstStyle/>
           <a:p>
-            <a:pPr algn="ctr"/>
-          </a:p>
-        </p:txBody>
-      </p:sp>
-      <p:sp>
-        <p:nvSpPr>
-          <p:cNvPr id="17" name="Oval 16"/>
+            <a:pPr algn="ctr">
+              <a:defRPr/>
+            </a:pPr>
+            <a:endParaRPr/>
+          </a:p>
+        </p:txBody>
+      </p:sp>
+      <p:sp>
+        <p:nvSpPr>
+          <p:cNvPr id="1869132116" name="Oval 16"/>
           <p:cNvSpPr/>
           <p:nvPr/>
         </p:nvSpPr>
-        <p:spPr>
+        <p:spPr bwMode="auto">
           <a:xfrm>
             <a:off x="530352" y="2907792"/>
             <a:ext cx="274320" cy="274320"/>
@@ -21386,18 +21465,20 @@
               </a:defRPr>
             </a:pPr>
             <a:r>
+              <a:rPr/>
               <a:t>1</a:t>
             </a:r>
-          </a:p>
-        </p:txBody>
-      </p:sp>
-      <p:sp>
-        <p:nvSpPr>
-          <p:cNvPr id="18" name="TextBox 17"/>
+            <a:endParaRPr/>
+          </a:p>
+        </p:txBody>
+      </p:sp>
+      <p:sp>
+        <p:nvSpPr>
+          <p:cNvPr id="1989351772" name="TextBox 17"/>
           <p:cNvSpPr txBox="1"/>
           <p:nvPr/>
         </p:nvSpPr>
-        <p:spPr>
+        <p:spPr bwMode="auto">
           <a:xfrm>
             <a:off x="841248" y="2907792"/>
             <a:ext cx="3108960" cy="228600"/>
@@ -21419,18 +21500,20 @@
               </a:defRPr>
             </a:pPr>
             <a:r>
+              <a:rPr/>
               <a:t>Data Pemohon</a:t>
             </a:r>
-          </a:p>
-        </p:txBody>
-      </p:sp>
-      <p:sp>
-        <p:nvSpPr>
-          <p:cNvPr id="19" name="TextBox 18"/>
+            <a:endParaRPr/>
+          </a:p>
+        </p:txBody>
+      </p:sp>
+      <p:sp>
+        <p:nvSpPr>
+          <p:cNvPr id="1181499248" name="TextBox 18"/>
           <p:cNvSpPr txBox="1"/>
           <p:nvPr/>
         </p:nvSpPr>
-        <p:spPr>
+        <p:spPr bwMode="auto">
           <a:xfrm>
             <a:off x="530352" y="3163824"/>
             <a:ext cx="3419856" cy="274320"/>
@@ -21452,24 +21535,28 @@
               </a:defRPr>
             </a:pPr>
             <a:r>
+              <a:rPr/>
               <a:t>NIK, Nama, Alamat, Pekerjaan, Tanggal Lahir, Status Perkawinan</a:t>
             </a:r>
-          </a:p>
-        </p:txBody>
-      </p:sp>
-      <p:sp>
-        <p:nvSpPr>
-          <p:cNvPr id="20" name="Rounded Rectangle 19"/>
+            <a:endParaRPr/>
+          </a:p>
+        </p:txBody>
+      </p:sp>
+      <p:sp>
+        <p:nvSpPr>
+          <p:cNvPr id="890283611" name="Rounded Rectangle 19"/>
           <p:cNvSpPr/>
           <p:nvPr/>
         </p:nvSpPr>
-        <p:spPr>
+        <p:spPr bwMode="auto">
           <a:xfrm>
             <a:off x="4206240" y="2834640"/>
             <a:ext cx="3566160" cy="640080"/>
           </a:xfrm>
           <a:prstGeom prst="roundRect">
-            <a:avLst/>
+            <a:avLst>
+              <a:gd name="adj" fmla="val 16667"/>
+            </a:avLst>
           </a:prstGeom>
           <a:solidFill>
             <a:srgbClr val="F0F4F8"/>
@@ -21498,17 +21585,20 @@
           <a:bodyPr rtlCol="0" anchor="ctr"/>
           <a:lstStyle/>
           <a:p>
-            <a:pPr algn="ctr"/>
-          </a:p>
-        </p:txBody>
-      </p:sp>
-      <p:sp>
-        <p:nvSpPr>
-          <p:cNvPr id="21" name="Oval 20"/>
+            <a:pPr algn="ctr">
+              <a:defRPr/>
+            </a:pPr>
+            <a:endParaRPr/>
+          </a:p>
+        </p:txBody>
+      </p:sp>
+      <p:sp>
+        <p:nvSpPr>
+          <p:cNvPr id="1252809865" name="Oval 20"/>
           <p:cNvSpPr/>
           <p:nvPr/>
         </p:nvSpPr>
-        <p:spPr>
+        <p:spPr bwMode="auto">
           <a:xfrm>
             <a:off x="4279392" y="2907792"/>
             <a:ext cx="274320" cy="274320"/>
@@ -21551,18 +21641,20 @@
               </a:defRPr>
             </a:pPr>
             <a:r>
+              <a:rPr/>
               <a:t>2</a:t>
             </a:r>
-          </a:p>
-        </p:txBody>
-      </p:sp>
-      <p:sp>
-        <p:nvSpPr>
-          <p:cNvPr id="22" name="TextBox 21"/>
+            <a:endParaRPr/>
+          </a:p>
+        </p:txBody>
+      </p:sp>
+      <p:sp>
+        <p:nvSpPr>
+          <p:cNvPr id="621707483" name="TextBox 21"/>
           <p:cNvSpPr txBox="1"/>
           <p:nvPr/>
         </p:nvSpPr>
-        <p:spPr>
+        <p:spPr bwMode="auto">
           <a:xfrm>
             <a:off x="4590288" y="2907792"/>
             <a:ext cx="3108960" cy="228600"/>
@@ -21584,18 +21676,20 @@
               </a:defRPr>
             </a:pPr>
             <a:r>
+              <a:rPr/>
               <a:t>Penghasilan</a:t>
             </a:r>
-          </a:p>
-        </p:txBody>
-      </p:sp>
-      <p:sp>
-        <p:nvSpPr>
-          <p:cNvPr id="23" name="TextBox 22"/>
+            <a:endParaRPr/>
+          </a:p>
+        </p:txBody>
+      </p:sp>
+      <p:sp>
+        <p:nvSpPr>
+          <p:cNvPr id="1960270855" name="TextBox 22"/>
           <p:cNvSpPr txBox="1"/>
           <p:nvPr/>
         </p:nvSpPr>
-        <p:spPr>
+        <p:spPr bwMode="auto">
           <a:xfrm>
             <a:off x="4279392" y="3163824"/>
             <a:ext cx="3419856" cy="274320"/>
@@ -21617,24 +21711,28 @@
               </a:defRPr>
             </a:pPr>
             <a:r>
+              <a:rPr/>
               <a:t>Gaji pokok, tunjangan, penghasilan lain, analisa repayment capacity</a:t>
             </a:r>
-          </a:p>
-        </p:txBody>
-      </p:sp>
-      <p:sp>
-        <p:nvSpPr>
-          <p:cNvPr id="24" name="Rounded Rectangle 23"/>
+            <a:endParaRPr/>
+          </a:p>
+        </p:txBody>
+      </p:sp>
+      <p:sp>
+        <p:nvSpPr>
+          <p:cNvPr id="734176114" name="Rounded Rectangle 23"/>
           <p:cNvSpPr/>
           <p:nvPr/>
         </p:nvSpPr>
-        <p:spPr>
+        <p:spPr bwMode="auto">
           <a:xfrm>
             <a:off x="7955280" y="2834640"/>
             <a:ext cx="3566160" cy="640080"/>
           </a:xfrm>
           <a:prstGeom prst="roundRect">
-            <a:avLst/>
+            <a:avLst>
+              <a:gd name="adj" fmla="val 16667"/>
+            </a:avLst>
           </a:prstGeom>
           <a:solidFill>
             <a:srgbClr val="F0F4F8"/>
@@ -21663,17 +21761,20 @@
           <a:bodyPr rtlCol="0" anchor="ctr"/>
           <a:lstStyle/>
           <a:p>
-            <a:pPr algn="ctr"/>
-          </a:p>
-        </p:txBody>
-      </p:sp>
-      <p:sp>
-        <p:nvSpPr>
-          <p:cNvPr id="25" name="Oval 24"/>
+            <a:pPr algn="ctr">
+              <a:defRPr/>
+            </a:pPr>
+            <a:endParaRPr/>
+          </a:p>
+        </p:txBody>
+      </p:sp>
+      <p:sp>
+        <p:nvSpPr>
+          <p:cNvPr id="1295851640" name="Oval 24"/>
           <p:cNvSpPr/>
           <p:nvPr/>
         </p:nvSpPr>
-        <p:spPr>
+        <p:spPr bwMode="auto">
           <a:xfrm>
             <a:off x="8028432" y="2907792"/>
             <a:ext cx="274320" cy="274320"/>
@@ -21716,18 +21817,20 @@
               </a:defRPr>
             </a:pPr>
             <a:r>
+              <a:rPr/>
               <a:t>3</a:t>
             </a:r>
-          </a:p>
-        </p:txBody>
-      </p:sp>
-      <p:sp>
-        <p:nvSpPr>
-          <p:cNvPr id="26" name="TextBox 25"/>
+            <a:endParaRPr/>
+          </a:p>
+        </p:txBody>
+      </p:sp>
+      <p:sp>
+        <p:nvSpPr>
+          <p:cNvPr id="337125361" name="TextBox 25"/>
           <p:cNvSpPr txBox="1"/>
           <p:nvPr/>
         </p:nvSpPr>
-        <p:spPr>
+        <p:spPr bwMode="auto">
           <a:xfrm>
             <a:off x="8339328" y="2907792"/>
             <a:ext cx="3108960" cy="228600"/>
@@ -21749,18 +21852,20 @@
               </a:defRPr>
             </a:pPr>
             <a:r>
+              <a:rPr/>
               <a:t>Agunan / Jaminan</a:t>
             </a:r>
-          </a:p>
-        </p:txBody>
-      </p:sp>
-      <p:sp>
-        <p:nvSpPr>
-          <p:cNvPr id="27" name="TextBox 26"/>
+            <a:endParaRPr/>
+          </a:p>
+        </p:txBody>
+      </p:sp>
+      <p:sp>
+        <p:nvSpPr>
+          <p:cNvPr id="1579324658" name="TextBox 26"/>
           <p:cNvSpPr txBox="1"/>
           <p:nvPr/>
         </p:nvSpPr>
-        <p:spPr>
+        <p:spPr bwMode="auto">
           <a:xfrm>
             <a:off x="8028432" y="3163824"/>
             <a:ext cx="3419856" cy="274320"/>
@@ -21782,24 +21887,28 @@
               </a:defRPr>
             </a:pPr>
             <a:r>
+              <a:rPr/>
               <a:t>Data kendaraan/tanah/bangunan, foto agunan, taksasi nilai</a:t>
             </a:r>
-          </a:p>
-        </p:txBody>
-      </p:sp>
-      <p:sp>
-        <p:nvSpPr>
-          <p:cNvPr id="28" name="Rounded Rectangle 27"/>
+            <a:endParaRPr/>
+          </a:p>
+        </p:txBody>
+      </p:sp>
+      <p:sp>
+        <p:nvSpPr>
+          <p:cNvPr id="1100361719" name="Rounded Rectangle 27"/>
           <p:cNvSpPr/>
           <p:nvPr/>
         </p:nvSpPr>
-        <p:spPr>
+        <p:spPr bwMode="auto">
           <a:xfrm>
             <a:off x="457200" y="3611880"/>
             <a:ext cx="3566160" cy="640080"/>
           </a:xfrm>
           <a:prstGeom prst="roundRect">
-            <a:avLst/>
+            <a:avLst>
+              <a:gd name="adj" fmla="val 16667"/>
+            </a:avLst>
           </a:prstGeom>
           <a:solidFill>
             <a:srgbClr val="F0F4F8"/>
@@ -21828,17 +21937,20 @@
           <a:bodyPr rtlCol="0" anchor="ctr"/>
           <a:lstStyle/>
           <a:p>
-            <a:pPr algn="ctr"/>
-          </a:p>
-        </p:txBody>
-      </p:sp>
-      <p:sp>
-        <p:nvSpPr>
-          <p:cNvPr id="29" name="Oval 28"/>
+            <a:pPr algn="ctr">
+              <a:defRPr/>
+            </a:pPr>
+            <a:endParaRPr/>
+          </a:p>
+        </p:txBody>
+      </p:sp>
+      <p:sp>
+        <p:nvSpPr>
+          <p:cNvPr id="211627068" name="Oval 28"/>
           <p:cNvSpPr/>
           <p:nvPr/>
         </p:nvSpPr>
-        <p:spPr>
+        <p:spPr bwMode="auto">
           <a:xfrm>
             <a:off x="530352" y="3685032"/>
             <a:ext cx="274320" cy="274320"/>
@@ -21881,18 +21993,20 @@
               </a:defRPr>
             </a:pPr>
             <a:r>
+              <a:rPr/>
               <a:t>4</a:t>
             </a:r>
-          </a:p>
-        </p:txBody>
-      </p:sp>
-      <p:sp>
-        <p:nvSpPr>
-          <p:cNvPr id="30" name="TextBox 29"/>
+            <a:endParaRPr/>
+          </a:p>
+        </p:txBody>
+      </p:sp>
+      <p:sp>
+        <p:nvSpPr>
+          <p:cNvPr id="626116668" name="TextBox 29"/>
           <p:cNvSpPr txBox="1"/>
           <p:nvPr/>
         </p:nvSpPr>
-        <p:spPr>
+        <p:spPr bwMode="auto">
           <a:xfrm>
             <a:off x="841248" y="3685032"/>
             <a:ext cx="3108960" cy="228600"/>
@@ -21914,18 +22028,20 @@
               </a:defRPr>
             </a:pPr>
             <a:r>
+              <a:rPr/>
               <a:t>Struktur Kredit</a:t>
             </a:r>
-          </a:p>
-        </p:txBody>
-      </p:sp>
-      <p:sp>
-        <p:nvSpPr>
-          <p:cNvPr id="31" name="TextBox 30"/>
+            <a:endParaRPr/>
+          </a:p>
+        </p:txBody>
+      </p:sp>
+      <p:sp>
+        <p:nvSpPr>
+          <p:cNvPr id="1480943527" name="TextBox 30"/>
           <p:cNvSpPr txBox="1"/>
           <p:nvPr/>
         </p:nvSpPr>
-        <p:spPr>
+        <p:spPr bwMode="auto">
           <a:xfrm>
             <a:off x="530352" y="3941064"/>
             <a:ext cx="3419856" cy="274320"/>
@@ -21947,24 +22063,28 @@
               </a:defRPr>
             </a:pPr>
             <a:r>
+              <a:rPr/>
               <a:t>Plafond, jangka waktu, suku bunga, tujuan penggunaan kredit</a:t>
             </a:r>
-          </a:p>
-        </p:txBody>
-      </p:sp>
-      <p:sp>
-        <p:nvSpPr>
-          <p:cNvPr id="32" name="Rounded Rectangle 31"/>
+            <a:endParaRPr/>
+          </a:p>
+        </p:txBody>
+      </p:sp>
+      <p:sp>
+        <p:nvSpPr>
+          <p:cNvPr id="1715812580" name="Rounded Rectangle 31"/>
           <p:cNvSpPr/>
           <p:nvPr/>
         </p:nvSpPr>
-        <p:spPr>
+        <p:spPr bwMode="auto">
           <a:xfrm>
             <a:off x="4206240" y="3611880"/>
             <a:ext cx="3566160" cy="640080"/>
           </a:xfrm>
           <a:prstGeom prst="roundRect">
-            <a:avLst/>
+            <a:avLst>
+              <a:gd name="adj" fmla="val 16667"/>
+            </a:avLst>
           </a:prstGeom>
           <a:solidFill>
             <a:srgbClr val="F0F4F8"/>
@@ -21993,17 +22113,20 @@
           <a:bodyPr rtlCol="0" anchor="ctr"/>
           <a:lstStyle/>
           <a:p>
-            <a:pPr algn="ctr"/>
-          </a:p>
-        </p:txBody>
-      </p:sp>
-      <p:sp>
-        <p:nvSpPr>
-          <p:cNvPr id="33" name="Oval 32"/>
+            <a:pPr algn="ctr">
+              <a:defRPr/>
+            </a:pPr>
+            <a:endParaRPr/>
+          </a:p>
+        </p:txBody>
+      </p:sp>
+      <p:sp>
+        <p:nvSpPr>
+          <p:cNvPr id="2002624743" name="Oval 32"/>
           <p:cNvSpPr/>
           <p:nvPr/>
         </p:nvSpPr>
-        <p:spPr>
+        <p:spPr bwMode="auto">
           <a:xfrm>
             <a:off x="4279392" y="3685032"/>
             <a:ext cx="274320" cy="274320"/>
@@ -22046,18 +22169,20 @@
               </a:defRPr>
             </a:pPr>
             <a:r>
+              <a:rPr/>
               <a:t>5</a:t>
             </a:r>
-          </a:p>
-        </p:txBody>
-      </p:sp>
-      <p:sp>
-        <p:nvSpPr>
-          <p:cNvPr id="34" name="TextBox 33"/>
+            <a:endParaRPr/>
+          </a:p>
+        </p:txBody>
+      </p:sp>
+      <p:sp>
+        <p:nvSpPr>
+          <p:cNvPr id="1020004210" name="TextBox 33"/>
           <p:cNvSpPr txBox="1"/>
           <p:nvPr/>
         </p:nvSpPr>
-        <p:spPr>
+        <p:spPr bwMode="auto">
           <a:xfrm>
             <a:off x="4590288" y="3685032"/>
             <a:ext cx="3108960" cy="228600"/>
@@ -22079,18 +22204,20 @@
               </a:defRPr>
             </a:pPr>
             <a:r>
+              <a:rPr/>
               <a:t>Neraca Keuangan</a:t>
             </a:r>
-          </a:p>
-        </p:txBody>
-      </p:sp>
-      <p:sp>
-        <p:nvSpPr>
-          <p:cNvPr id="35" name="TextBox 34"/>
+            <a:endParaRPr/>
+          </a:p>
+        </p:txBody>
+      </p:sp>
+      <p:sp>
+        <p:nvSpPr>
+          <p:cNvPr id="800950090" name="TextBox 34"/>
           <p:cNvSpPr txBox="1"/>
           <p:nvPr/>
         </p:nvSpPr>
-        <p:spPr>
+        <p:spPr bwMode="auto">
           <a:xfrm>
             <a:off x="4279392" y="3941064"/>
             <a:ext cx="3419856" cy="274320"/>
@@ -22112,24 +22239,28 @@
               </a:defRPr>
             </a:pPr>
             <a:r>
+              <a:rPr/>
               <a:t>Aset, kewajiban, modal bersih (untuk kredit usaha/umum)</a:t>
             </a:r>
-          </a:p>
-        </p:txBody>
-      </p:sp>
-      <p:sp>
-        <p:nvSpPr>
-          <p:cNvPr id="36" name="Rounded Rectangle 35"/>
+            <a:endParaRPr/>
+          </a:p>
+        </p:txBody>
+      </p:sp>
+      <p:sp>
+        <p:nvSpPr>
+          <p:cNvPr id="940640097" name="Rounded Rectangle 35"/>
           <p:cNvSpPr/>
           <p:nvPr/>
         </p:nvSpPr>
-        <p:spPr>
+        <p:spPr bwMode="auto">
           <a:xfrm>
             <a:off x="7955280" y="3611880"/>
             <a:ext cx="3566160" cy="640080"/>
           </a:xfrm>
           <a:prstGeom prst="roundRect">
-            <a:avLst/>
+            <a:avLst>
+              <a:gd name="adj" fmla="val 16667"/>
+            </a:avLst>
           </a:prstGeom>
           <a:solidFill>
             <a:srgbClr val="F0F4F8"/>
@@ -22158,17 +22289,20 @@
           <a:bodyPr rtlCol="0" anchor="ctr"/>
           <a:lstStyle/>
           <a:p>
-            <a:pPr algn="ctr"/>
-          </a:p>
-        </p:txBody>
-      </p:sp>
-      <p:sp>
-        <p:nvSpPr>
-          <p:cNvPr id="37" name="Oval 36"/>
+            <a:pPr algn="ctr">
+              <a:defRPr/>
+            </a:pPr>
+            <a:endParaRPr/>
+          </a:p>
+        </p:txBody>
+      </p:sp>
+      <p:sp>
+        <p:nvSpPr>
+          <p:cNvPr id="391885203" name="Oval 36"/>
           <p:cNvSpPr/>
           <p:nvPr/>
         </p:nvSpPr>
-        <p:spPr>
+        <p:spPr bwMode="auto">
           <a:xfrm>
             <a:off x="8028432" y="3685032"/>
             <a:ext cx="274320" cy="274320"/>
@@ -22211,18 +22345,20 @@
               </a:defRPr>
             </a:pPr>
             <a:r>
+              <a:rPr/>
               <a:t>6</a:t>
             </a:r>
-          </a:p>
-        </p:txBody>
-      </p:sp>
-      <p:sp>
-        <p:nvSpPr>
-          <p:cNvPr id="38" name="TextBox 37"/>
+            <a:endParaRPr/>
+          </a:p>
+        </p:txBody>
+      </p:sp>
+      <p:sp>
+        <p:nvSpPr>
+          <p:cNvPr id="1320205306" name="TextBox 37"/>
           <p:cNvSpPr txBox="1"/>
           <p:nvPr/>
         </p:nvSpPr>
-        <p:spPr>
+        <p:spPr bwMode="auto">
           <a:xfrm>
             <a:off x="8339328" y="3685032"/>
             <a:ext cx="3108960" cy="228600"/>
@@ -22244,18 +22380,20 @@
               </a:defRPr>
             </a:pPr>
             <a:r>
+              <a:rPr/>
               <a:t>Analisa 6C</a:t>
             </a:r>
-          </a:p>
-        </p:txBody>
-      </p:sp>
-      <p:sp>
-        <p:nvSpPr>
-          <p:cNvPr id="39" name="TextBox 38"/>
+            <a:endParaRPr/>
+          </a:p>
+        </p:txBody>
+      </p:sp>
+      <p:sp>
+        <p:nvSpPr>
+          <p:cNvPr id="880737611" name="TextBox 38"/>
           <p:cNvSpPr txBox="1"/>
           <p:nvPr/>
         </p:nvSpPr>
-        <p:spPr>
+        <p:spPr bwMode="auto">
           <a:xfrm>
             <a:off x="8028432" y="3941064"/>
             <a:ext cx="3419856" cy="274320"/>
@@ -22277,18 +22415,20 @@
               </a:defRPr>
             </a:pPr>
             <a:r>
+              <a:rPr/>
               <a:t>Character, Capacity, Capital, Collateral, Condition, Constraint</a:t>
             </a:r>
-          </a:p>
-        </p:txBody>
-      </p:sp>
-      <p:sp>
-        <p:nvSpPr>
-          <p:cNvPr id="40" name="TextBox 39"/>
+            <a:endParaRPr/>
+          </a:p>
+        </p:txBody>
+      </p:sp>
+      <p:sp>
+        <p:nvSpPr>
+          <p:cNvPr id="1587386526" name="TextBox 39"/>
           <p:cNvSpPr txBox="1"/>
           <p:nvPr/>
         </p:nvSpPr>
-        <p:spPr>
+        <p:spPr bwMode="auto">
           <a:xfrm>
             <a:off x="457200" y="4480560"/>
             <a:ext cx="10058400" cy="274320"/>
@@ -22310,24 +22450,28 @@
               </a:defRPr>
             </a:pPr>
             <a:r>
+              <a:rPr/>
               <a:t>STATUS PENGAJUAN KREDIT (TERMASUK KEPATUHAN):</a:t>
             </a:r>
-          </a:p>
-        </p:txBody>
-      </p:sp>
-      <p:sp>
-        <p:nvSpPr>
-          <p:cNvPr id="41" name="Rounded Rectangle 40"/>
+            <a:endParaRPr/>
+          </a:p>
+        </p:txBody>
+      </p:sp>
+      <p:sp>
+        <p:nvSpPr>
+          <p:cNvPr id="1295558611" name="Rounded Rectangle 40"/>
           <p:cNvSpPr/>
           <p:nvPr/>
         </p:nvSpPr>
-        <p:spPr>
+        <p:spPr bwMode="auto">
           <a:xfrm>
             <a:off x="457200" y="4800600"/>
             <a:ext cx="1783080" cy="548640"/>
           </a:xfrm>
           <a:prstGeom prst="roundRect">
-            <a:avLst/>
+            <a:avLst>
+              <a:gd name="adj" fmla="val 16667"/>
+            </a:avLst>
           </a:prstGeom>
           <a:solidFill>
             <a:srgbClr val="95A5A6"/>
@@ -22353,7 +22497,7 @@
           </a:fontRef>
         </p:style>
         <p:txBody>
-          <a:bodyPr rtlCol="0" anchor="ctr" wrap="square"/>
+          <a:bodyPr wrap="square" rtlCol="0" anchor="ctr"/>
           <a:lstStyle/>
           <a:p>
             <a:pPr algn="ctr">
@@ -22364,8 +22508,10 @@
               </a:defRPr>
             </a:pPr>
             <a:r>
+              <a:rPr/>
               <a:t>DRAFT</a:t>
             </a:r>
+            <a:endParaRPr/>
           </a:p>
           <a:p>
             <a:pPr algn="ctr">
@@ -22376,28 +22522,35 @@
               </a:defRPr>
             </a:pPr>
             <a:r>
+              <a:rPr/>
               <a:t>Analis buat</a:t>
             </a:r>
-            <a:br/>
-            <a:r>
+            <a:br>
+              <a:rPr/>
+            </a:br>
+            <a:r>
+              <a:rPr/>
               <a:t>pengajuan baru</a:t>
             </a:r>
-          </a:p>
-        </p:txBody>
-      </p:sp>
-      <p:sp>
-        <p:nvSpPr>
-          <p:cNvPr id="42" name="Rounded Rectangle 41"/>
+            <a:endParaRPr/>
+          </a:p>
+        </p:txBody>
+      </p:sp>
+      <p:sp>
+        <p:nvSpPr>
+          <p:cNvPr id="1687831542" name="Rounded Rectangle 41"/>
           <p:cNvSpPr/>
           <p:nvPr/>
         </p:nvSpPr>
-        <p:spPr>
+        <p:spPr bwMode="auto">
           <a:xfrm>
             <a:off x="2331720" y="4800600"/>
             <a:ext cx="1783080" cy="548640"/>
           </a:xfrm>
           <a:prstGeom prst="roundRect">
-            <a:avLst/>
+            <a:avLst>
+              <a:gd name="adj" fmla="val 16667"/>
+            </a:avLst>
           </a:prstGeom>
           <a:solidFill>
             <a:srgbClr val="2980B9"/>
@@ -22423,7 +22576,7 @@
           </a:fontRef>
         </p:style>
         <p:txBody>
-          <a:bodyPr rtlCol="0" anchor="ctr" wrap="square"/>
+          <a:bodyPr wrap="square" rtlCol="0" anchor="ctr"/>
           <a:lstStyle/>
           <a:p>
             <a:pPr algn="ctr">
@@ -22434,8 +22587,10 @@
               </a:defRPr>
             </a:pPr>
             <a:r>
+              <a:rPr/>
               <a:t>DIAJUKAN</a:t>
             </a:r>
+            <a:endParaRPr/>
           </a:p>
           <a:p>
             <a:pPr algn="ctr">
@@ -22446,28 +22601,35 @@
               </a:defRPr>
             </a:pPr>
             <a:r>
+              <a:rPr/>
               <a:t>Dikirim ke rantai</a:t>
             </a:r>
-            <a:br/>
-            <a:r>
+            <a:br>
+              <a:rPr/>
+            </a:br>
+            <a:r>
+              <a:rPr/>
               <a:t>approval</a:t>
             </a:r>
-          </a:p>
-        </p:txBody>
-      </p:sp>
-      <p:sp>
-        <p:nvSpPr>
-          <p:cNvPr id="43" name="Rounded Rectangle 42"/>
+            <a:endParaRPr/>
+          </a:p>
+        </p:txBody>
+      </p:sp>
+      <p:sp>
+        <p:nvSpPr>
+          <p:cNvPr id="1683693600" name="Rounded Rectangle 42"/>
           <p:cNvSpPr/>
           <p:nvPr/>
         </p:nvSpPr>
-        <p:spPr>
+        <p:spPr bwMode="auto">
           <a:xfrm>
             <a:off x="4206240" y="4800600"/>
             <a:ext cx="1783080" cy="548640"/>
           </a:xfrm>
           <a:prstGeom prst="roundRect">
-            <a:avLst/>
+            <a:avLst>
+              <a:gd name="adj" fmla="val 16667"/>
+            </a:avLst>
           </a:prstGeom>
           <a:solidFill>
             <a:srgbClr val="E67E22"/>
@@ -22493,7 +22655,7 @@
           </a:fontRef>
         </p:style>
         <p:txBody>
-          <a:bodyPr rtlCol="0" anchor="ctr" wrap="square"/>
+          <a:bodyPr wrap="square" rtlCol="0" anchor="ctr"/>
           <a:lstStyle/>
           <a:p>
             <a:pPr algn="ctr">
@@ -22504,8 +22666,10 @@
               </a:defRPr>
             </a:pPr>
             <a:r>
+              <a:rPr/>
               <a:t>KEPATUHAN</a:t>
             </a:r>
+            <a:endParaRPr/>
           </a:p>
           <a:p>
             <a:pPr algn="ctr">
@@ -22516,28 +22680,35 @@
               </a:defRPr>
             </a:pPr>
             <a:r>
+              <a:rPr/>
               <a:t>Review kepatuhan</a:t>
             </a:r>
-            <a:br/>
-            <a:r>
+            <a:br>
+              <a:rPr/>
+            </a:br>
+            <a:r>
+              <a:rPr/>
               <a:t>&amp; SOP</a:t>
             </a:r>
-          </a:p>
-        </p:txBody>
-      </p:sp>
-      <p:sp>
-        <p:nvSpPr>
-          <p:cNvPr id="44" name="Rounded Rectangle 43"/>
+            <a:endParaRPr/>
+          </a:p>
+        </p:txBody>
+      </p:sp>
+      <p:sp>
+        <p:nvSpPr>
+          <p:cNvPr id="1967191725" name="Rounded Rectangle 43"/>
           <p:cNvSpPr/>
           <p:nvPr/>
         </p:nvSpPr>
-        <p:spPr>
+        <p:spPr bwMode="auto">
           <a:xfrm>
             <a:off x="6080760" y="4800600"/>
             <a:ext cx="1783080" cy="548640"/>
           </a:xfrm>
           <a:prstGeom prst="roundRect">
-            <a:avLst/>
+            <a:avLst>
+              <a:gd name="adj" fmla="val 16667"/>
+            </a:avLst>
           </a:prstGeom>
           <a:solidFill>
             <a:srgbClr val="3498DB"/>
@@ -22563,7 +22734,7 @@
           </a:fontRef>
         </p:style>
         <p:txBody>
-          <a:bodyPr rtlCol="0" anchor="ctr" wrap="square"/>
+          <a:bodyPr wrap="square" rtlCol="0" anchor="ctr"/>
           <a:lstStyle/>
           <a:p>
             <a:pPr algn="ctr">
@@ -22574,8 +22745,10 @@
               </a:defRPr>
             </a:pPr>
             <a:r>
+              <a:rPr/>
               <a:t>PROSES</a:t>
             </a:r>
+            <a:endParaRPr/>
           </a:p>
           <a:p>
             <a:pPr algn="ctr">
@@ -22586,28 +22759,35 @@
               </a:defRPr>
             </a:pPr>
             <a:r>
+              <a:rPr/>
               <a:t>Ditinjau pejabat</a:t>
             </a:r>
-            <a:br/>
-            <a:r>
+            <a:br>
+              <a:rPr/>
+            </a:br>
+            <a:r>
+              <a:rPr/>
               <a:t>berwenang</a:t>
             </a:r>
-          </a:p>
-        </p:txBody>
-      </p:sp>
-      <p:sp>
-        <p:nvSpPr>
-          <p:cNvPr id="45" name="Rounded Rectangle 44"/>
+            <a:endParaRPr/>
+          </a:p>
+        </p:txBody>
+      </p:sp>
+      <p:sp>
+        <p:nvSpPr>
+          <p:cNvPr id="168148374" name="Rounded Rectangle 44"/>
           <p:cNvSpPr/>
           <p:nvPr/>
         </p:nvSpPr>
-        <p:spPr>
+        <p:spPr bwMode="auto">
           <a:xfrm>
             <a:off x="7955280" y="4800600"/>
             <a:ext cx="1783080" cy="548640"/>
           </a:xfrm>
           <a:prstGeom prst="roundRect">
-            <a:avLst/>
+            <a:avLst>
+              <a:gd name="adj" fmla="val 16667"/>
+            </a:avLst>
           </a:prstGeom>
           <a:solidFill>
             <a:srgbClr val="2ECC71"/>
@@ -22633,7 +22813,7 @@
           </a:fontRef>
         </p:style>
         <p:txBody>
-          <a:bodyPr rtlCol="0" anchor="ctr" wrap="square"/>
+          <a:bodyPr wrap="square" rtlCol="0" anchor="ctr"/>
           <a:lstStyle/>
           <a:p>
             <a:pPr algn="ctr">
@@ -22644,8 +22824,10 @@
               </a:defRPr>
             </a:pPr>
             <a:r>
+              <a:rPr/>
               <a:t>DISETUJUI</a:t>
             </a:r>
+            <a:endParaRPr/>
           </a:p>
           <a:p>
             <a:pPr algn="ctr">
@@ -22656,28 +22838,35 @@
               </a:defRPr>
             </a:pPr>
             <a:r>
+              <a:rPr/>
               <a:t>Kredit disetujui</a:t>
             </a:r>
-            <a:br/>
-            <a:r>
+            <a:br>
+              <a:rPr/>
+            </a:br>
+            <a:r>
+              <a:rPr/>
               <a:t>oleh pejabat</a:t>
             </a:r>
-          </a:p>
-        </p:txBody>
-      </p:sp>
-      <p:sp>
-        <p:nvSpPr>
-          <p:cNvPr id="46" name="Rounded Rectangle 45"/>
+            <a:endParaRPr/>
+          </a:p>
+        </p:txBody>
+      </p:sp>
+      <p:sp>
+        <p:nvSpPr>
+          <p:cNvPr id="410605094" name="Rounded Rectangle 45"/>
           <p:cNvSpPr/>
           <p:nvPr/>
         </p:nvSpPr>
-        <p:spPr>
+        <p:spPr bwMode="auto">
           <a:xfrm>
             <a:off x="9829800" y="4800600"/>
             <a:ext cx="1783080" cy="548640"/>
           </a:xfrm>
           <a:prstGeom prst="roundRect">
-            <a:avLst/>
+            <a:avLst>
+              <a:gd name="adj" fmla="val 16667"/>
+            </a:avLst>
           </a:prstGeom>
           <a:solidFill>
             <a:srgbClr val="E74C3C"/>
@@ -22703,7 +22892,7 @@
           </a:fontRef>
         </p:style>
         <p:txBody>
-          <a:bodyPr rtlCol="0" anchor="ctr" wrap="square"/>
+          <a:bodyPr wrap="square" rtlCol="0" anchor="ctr"/>
           <a:lstStyle/>
           <a:p>
             <a:pPr algn="ctr">
@@ -22714,8 +22903,10 @@
               </a:defRPr>
             </a:pPr>
             <a:r>
+              <a:rPr/>
               <a:t>DITOLAK</a:t>
             </a:r>
+            <a:endParaRPr/>
           </a:p>
           <a:p>
             <a:pPr algn="ctr">
@@ -22726,22 +22917,27 @@
               </a:defRPr>
             </a:pPr>
             <a:r>
+              <a:rPr/>
               <a:t>Kredit ditolak,</a:t>
             </a:r>
-            <a:br/>
-            <a:r>
+            <a:br>
+              <a:rPr/>
+            </a:br>
+            <a:r>
+              <a:rPr/>
               <a:t>kembali ke analis</a:t>
             </a:r>
-          </a:p>
-        </p:txBody>
-      </p:sp>
-      <p:sp>
-        <p:nvSpPr>
-          <p:cNvPr id="47" name="TextBox 46"/>
+            <a:endParaRPr/>
+          </a:p>
+        </p:txBody>
+      </p:sp>
+      <p:sp>
+        <p:nvSpPr>
+          <p:cNvPr id="1385907400" name="TextBox 46"/>
           <p:cNvSpPr txBox="1"/>
           <p:nvPr/>
         </p:nvSpPr>
-        <p:spPr>
+        <p:spPr bwMode="auto">
           <a:xfrm>
             <a:off x="2286000" y="5020056"/>
             <a:ext cx="91440" cy="182880"/>
@@ -22763,20 +22959,22 @@
               </a:defRPr>
             </a:pPr>
             <a:r>
+              <a:rPr/>
               <a:t>→</a:t>
             </a:r>
-          </a:p>
-        </p:txBody>
-      </p:sp>
-      <p:sp>
-        <p:nvSpPr>
-          <p:cNvPr id="48" name="TextBox 47"/>
+            <a:endParaRPr/>
+          </a:p>
+        </p:txBody>
+      </p:sp>
+      <p:sp>
+        <p:nvSpPr>
+          <p:cNvPr id="1352127131" name="TextBox 47"/>
           <p:cNvSpPr txBox="1"/>
           <p:nvPr/>
         </p:nvSpPr>
-        <p:spPr>
-          <a:xfrm>
-            <a:off x="4160520" y="5020056"/>
+        <p:spPr bwMode="auto">
+          <a:xfrm>
+            <a:off x="4160519" y="5020056"/>
             <a:ext cx="91440" cy="182880"/>
           </a:xfrm>
           <a:prstGeom prst="rect">
@@ -22796,20 +22994,22 @@
               </a:defRPr>
             </a:pPr>
             <a:r>
+              <a:rPr/>
               <a:t>→</a:t>
             </a:r>
-          </a:p>
-        </p:txBody>
-      </p:sp>
-      <p:sp>
-        <p:nvSpPr>
-          <p:cNvPr id="49" name="TextBox 48"/>
+            <a:endParaRPr/>
+          </a:p>
+        </p:txBody>
+      </p:sp>
+      <p:sp>
+        <p:nvSpPr>
+          <p:cNvPr id="162603923" name="TextBox 48"/>
           <p:cNvSpPr txBox="1"/>
           <p:nvPr/>
         </p:nvSpPr>
-        <p:spPr>
-          <a:xfrm>
-            <a:off x="6035040" y="5020056"/>
+        <p:spPr bwMode="auto">
+          <a:xfrm>
+            <a:off x="6035039" y="5020056"/>
             <a:ext cx="91440" cy="182880"/>
           </a:xfrm>
           <a:prstGeom prst="rect">
@@ -22829,18 +23029,20 @@
               </a:defRPr>
             </a:pPr>
             <a:r>
+              <a:rPr/>
               <a:t>→</a:t>
             </a:r>
-          </a:p>
-        </p:txBody>
-      </p:sp>
-      <p:sp>
-        <p:nvSpPr>
-          <p:cNvPr id="50" name="TextBox 49"/>
+            <a:endParaRPr/>
+          </a:p>
+        </p:txBody>
+      </p:sp>
+      <p:sp>
+        <p:nvSpPr>
+          <p:cNvPr id="1672236758" name="TextBox 49"/>
           <p:cNvSpPr txBox="1"/>
           <p:nvPr/>
         </p:nvSpPr>
-        <p:spPr>
+        <p:spPr bwMode="auto">
           <a:xfrm>
             <a:off x="7909560" y="5020056"/>
             <a:ext cx="91440" cy="182880"/>
@@ -22862,20 +23064,22 @@
               </a:defRPr>
             </a:pPr>
             <a:r>
+              <a:rPr/>
               <a:t>→</a:t>
             </a:r>
-          </a:p>
-        </p:txBody>
-      </p:sp>
-      <p:sp>
-        <p:nvSpPr>
-          <p:cNvPr id="51" name="TextBox 50"/>
+            <a:endParaRPr/>
+          </a:p>
+        </p:txBody>
+      </p:sp>
+      <p:sp>
+        <p:nvSpPr>
+          <p:cNvPr id="378970390" name="TextBox 50"/>
           <p:cNvSpPr txBox="1"/>
           <p:nvPr/>
         </p:nvSpPr>
-        <p:spPr>
-          <a:xfrm>
-            <a:off x="9784080" y="5020056"/>
+        <p:spPr bwMode="auto">
+          <a:xfrm>
+            <a:off x="9784079" y="5020056"/>
             <a:ext cx="91440" cy="182880"/>
           </a:xfrm>
           <a:prstGeom prst="rect">
@@ -22895,24 +23099,28 @@
               </a:defRPr>
             </a:pPr>
             <a:r>
+              <a:rPr/>
               <a:t>→</a:t>
             </a:r>
-          </a:p>
-        </p:txBody>
-      </p:sp>
-      <p:sp>
-        <p:nvSpPr>
-          <p:cNvPr id="52" name="Rounded Rectangle 51"/>
+            <a:endParaRPr/>
+          </a:p>
+        </p:txBody>
+      </p:sp>
+      <p:sp>
+        <p:nvSpPr>
+          <p:cNvPr id="1660009908" name="Rounded Rectangle 51"/>
           <p:cNvSpPr/>
           <p:nvPr/>
         </p:nvSpPr>
-        <p:spPr>
+        <p:spPr bwMode="auto">
           <a:xfrm>
             <a:off x="457200" y="5486400"/>
             <a:ext cx="11277295" cy="411480"/>
           </a:xfrm>
           <a:prstGeom prst="roundRect">
-            <a:avLst/>
+            <a:avLst>
+              <a:gd name="adj" fmla="val 16667"/>
+            </a:avLst>
           </a:prstGeom>
           <a:solidFill>
             <a:srgbClr val="1D3858"/>
@@ -22938,7 +23146,7 @@
           </a:fontRef>
         </p:style>
         <p:txBody>
-          <a:bodyPr rtlCol="0" anchor="ctr" wrap="square"/>
+          <a:bodyPr wrap="square" rtlCol="0" anchor="ctr"/>
           <a:lstStyle/>
           <a:p>
             <a:pPr algn="ctr">
@@ -22949,24 +23157,28 @@
               </a:defRPr>
             </a:pPr>
             <a:r>
+              <a:rPr/>
               <a:t>ALUR APPROVAL:  ANALIS (Input)  →  KASUBAG (Review)  →  KEPATUHAN (Assessment)  →  KABAG ANALIS (Evaluasi)  →  KADIV (Approval)  →  DIREKSI (Final)</a:t>
             </a:r>
-          </a:p>
-        </p:txBody>
-      </p:sp>
-      <p:sp>
-        <p:nvSpPr>
-          <p:cNvPr id="53" name="Rounded Rectangle 52"/>
+            <a:endParaRPr/>
+          </a:p>
+        </p:txBody>
+      </p:sp>
+      <p:sp>
+        <p:nvSpPr>
+          <p:cNvPr id="111186557" name="Rounded Rectangle 52"/>
           <p:cNvSpPr/>
           <p:nvPr/>
         </p:nvSpPr>
-        <p:spPr>
+        <p:spPr bwMode="auto">
           <a:xfrm>
             <a:off x="457200" y="5989320"/>
             <a:ext cx="11277295" cy="731520"/>
           </a:xfrm>
           <a:prstGeom prst="roundRect">
-            <a:avLst/>
+            <a:avLst>
+              <a:gd name="adj" fmla="val 16667"/>
+            </a:avLst>
           </a:prstGeom>
           <a:solidFill>
             <a:srgbClr val="F0F4F8"/>
@@ -22992,7 +23204,7 @@
           </a:fontRef>
         </p:style>
         <p:txBody>
-          <a:bodyPr rtlCol="0" anchor="ctr" wrap="square"/>
+          <a:bodyPr wrap="square" rtlCol="0" anchor="ctr"/>
           <a:lstStyle/>
           <a:p>
             <a:pPr algn="ctr">
@@ -23003,8 +23215,10 @@
               </a:defRPr>
             </a:pPr>
             <a:r>
+              <a:rPr/>
               <a:t>✅ Kalkulasi Otomatis: Repayment capacity &amp; taksasi agunan dihitung otomatis oleh sistem</a:t>
             </a:r>
+            <a:endParaRPr/>
           </a:p>
           <a:p>
             <a:pPr>
@@ -23015,8 +23229,10 @@
               </a:defRPr>
             </a:pPr>
             <a:r>
+              <a:rPr/>
               <a:t>✅ Fitur Revisi: Pengajuan yang dikembalikan dapat diedit &amp; dikirim ulang langsung ke level yang mengembalikan</a:t>
             </a:r>
+            <a:endParaRPr/>
           </a:p>
           <a:p>
             <a:pPr>
@@ -23027,8 +23243,10 @@
               </a:defRPr>
             </a:pPr>
             <a:r>
+              <a:rPr/>
               <a:t>✅ Fitur Resubmit: Pengajuan ditolak dapat diperbaiki &amp; diajukan kembali sebagai pengajuan baru</a:t>
             </a:r>
+            <a:endParaRPr/>
           </a:p>
         </p:txBody>
       </p:sp>
@@ -23074,7 +23292,7 @@
       </p:grpSpPr>
       <p:sp>
         <p:nvSpPr>
-          <p:cNvPr id="142658890" name="Rectangle 1"/>
+          <p:cNvPr id="1761996789" name="Rectangle 1"/>
           <p:cNvSpPr/>
           <p:nvPr/>
         </p:nvSpPr>
@@ -23120,7 +23338,7 @@
       </p:sp>
       <p:sp>
         <p:nvSpPr>
-          <p:cNvPr id="633915752" name="TextBox 2"/>
+          <p:cNvPr id="29957516" name="TextBox 2"/>
           <p:cNvSpPr txBox="1"/>
           <p:nvPr/>
         </p:nvSpPr>
@@ -23158,7 +23376,7 @@
       </p:sp>
       <p:sp>
         <p:nvSpPr>
-          <p:cNvPr id="1199198290" name="Rectangle 3"/>
+          <p:cNvPr id="711911131" name="Rectangle 3"/>
           <p:cNvSpPr/>
           <p:nvPr/>
         </p:nvSpPr>
@@ -23204,7 +23422,7 @@
       </p:sp>
       <p:pic>
         <p:nvPicPr>
-          <p:cNvPr id="1343075140" name="Picture 4" descr="analis_workflow_1784769106740.jpg"/>
+          <p:cNvPr id="411406359" name="Picture 4" descr="analis_workflow_1784769106740.jpg"/>
           <p:cNvPicPr>
             <a:picLocks noChangeAspect="1"/>
           </p:cNvPicPr>
@@ -23266,7 +23484,7 @@
       </p:grpSpPr>
       <p:sp>
         <p:nvSpPr>
-          <p:cNvPr id="118778721" name="Rectangle 1"/>
+          <p:cNvPr id="1076673912" name="Rectangle 1"/>
           <p:cNvSpPr/>
           <p:nvPr/>
         </p:nvSpPr>
@@ -23312,7 +23530,7 @@
       </p:sp>
       <p:sp>
         <p:nvSpPr>
-          <p:cNvPr id="673439085" name="TextBox 2"/>
+          <p:cNvPr id="1610828732" name="TextBox 2"/>
           <p:cNvSpPr txBox="1"/>
           <p:nvPr/>
         </p:nvSpPr>
@@ -23350,7 +23568,7 @@
       </p:sp>
       <p:sp>
         <p:nvSpPr>
-          <p:cNvPr id="1457250318" name="Rectangle 3"/>
+          <p:cNvPr id="1103703745" name="Rectangle 3"/>
           <p:cNvSpPr/>
           <p:nvPr/>
         </p:nvSpPr>
@@ -23396,7 +23614,7 @@
       </p:sp>
       <p:sp>
         <p:nvSpPr>
-          <p:cNvPr id="542684201" name="Rounded Rectangle 4"/>
+          <p:cNvPr id="16312454" name="Rounded Rectangle 4"/>
           <p:cNvSpPr/>
           <p:nvPr/>
         </p:nvSpPr>
@@ -23446,7 +23664,7 @@
       </p:sp>
       <p:sp>
         <p:nvSpPr>
-          <p:cNvPr id="615400653" name="Oval 5"/>
+          <p:cNvPr id="826758911" name="Oval 5"/>
           <p:cNvSpPr/>
           <p:nvPr/>
         </p:nvSpPr>
@@ -23500,7 +23718,7 @@
       </p:sp>
       <p:sp>
         <p:nvSpPr>
-          <p:cNvPr id="475711988" name="TextBox 6"/>
+          <p:cNvPr id="516941259" name="TextBox 6"/>
           <p:cNvSpPr txBox="1"/>
           <p:nvPr/>
         </p:nvSpPr>
@@ -23538,7 +23756,7 @@
       </p:sp>
       <p:sp>
         <p:nvSpPr>
-          <p:cNvPr id="1447208707" name="TextBox 7"/>
+          <p:cNvPr id="38266561" name="TextBox 7"/>
           <p:cNvSpPr txBox="1"/>
           <p:nvPr/>
         </p:nvSpPr>
@@ -23591,7 +23809,7 @@
       </p:sp>
       <p:sp>
         <p:nvSpPr>
-          <p:cNvPr id="1975187824" name="Rounded Rectangle 8"/>
+          <p:cNvPr id="1434840187" name="Rounded Rectangle 8"/>
           <p:cNvSpPr/>
           <p:nvPr/>
         </p:nvSpPr>
@@ -23641,7 +23859,7 @@
       </p:sp>
       <p:sp>
         <p:nvSpPr>
-          <p:cNvPr id="2059292358" name="Oval 9"/>
+          <p:cNvPr id="456447896" name="Oval 9"/>
           <p:cNvSpPr/>
           <p:nvPr/>
         </p:nvSpPr>
@@ -23695,7 +23913,7 @@
       </p:sp>
       <p:sp>
         <p:nvSpPr>
-          <p:cNvPr id="1773777093" name="TextBox 10"/>
+          <p:cNvPr id="1105785996" name="TextBox 10"/>
           <p:cNvSpPr txBox="1"/>
           <p:nvPr/>
         </p:nvSpPr>
@@ -23733,7 +23951,7 @@
       </p:sp>
       <p:sp>
         <p:nvSpPr>
-          <p:cNvPr id="731776500" name="TextBox 11"/>
+          <p:cNvPr id="1129213446" name="TextBox 11"/>
           <p:cNvSpPr txBox="1"/>
           <p:nvPr/>
         </p:nvSpPr>
@@ -23778,7 +23996,7 @@
       </p:sp>
       <p:sp>
         <p:nvSpPr>
-          <p:cNvPr id="945233979" name="Rounded Rectangle 12"/>
+          <p:cNvPr id="1028235083" name="Rounded Rectangle 12"/>
           <p:cNvSpPr/>
           <p:nvPr/>
         </p:nvSpPr>
@@ -23828,7 +24046,7 @@
       </p:sp>
       <p:sp>
         <p:nvSpPr>
-          <p:cNvPr id="1790195005" name="Oval 13"/>
+          <p:cNvPr id="193813626" name="Oval 13"/>
           <p:cNvSpPr/>
           <p:nvPr/>
         </p:nvSpPr>
@@ -23882,7 +24100,7 @@
       </p:sp>
       <p:sp>
         <p:nvSpPr>
-          <p:cNvPr id="384702977" name="TextBox 14"/>
+          <p:cNvPr id="732891431" name="TextBox 14"/>
           <p:cNvSpPr txBox="1"/>
           <p:nvPr/>
         </p:nvSpPr>
@@ -23920,7 +24138,7 @@
       </p:sp>
       <p:sp>
         <p:nvSpPr>
-          <p:cNvPr id="1849539204" name="TextBox 15"/>
+          <p:cNvPr id="1517814015" name="TextBox 15"/>
           <p:cNvSpPr txBox="1"/>
           <p:nvPr/>
         </p:nvSpPr>
@@ -23965,7 +24183,7 @@
       </p:sp>
       <p:sp>
         <p:nvSpPr>
-          <p:cNvPr id="373138818" name="Rounded Rectangle 16"/>
+          <p:cNvPr id="744199051" name="Rounded Rectangle 16"/>
           <p:cNvSpPr/>
           <p:nvPr/>
         </p:nvSpPr>
@@ -24015,7 +24233,7 @@
       </p:sp>
       <p:sp>
         <p:nvSpPr>
-          <p:cNvPr id="740820524" name="Oval 17"/>
+          <p:cNvPr id="50795856" name="Oval 17"/>
           <p:cNvSpPr/>
           <p:nvPr/>
         </p:nvSpPr>
@@ -24069,7 +24287,7 @@
       </p:sp>
       <p:sp>
         <p:nvSpPr>
-          <p:cNvPr id="137084546" name="TextBox 18"/>
+          <p:cNvPr id="602167558" name="TextBox 18"/>
           <p:cNvSpPr txBox="1"/>
           <p:nvPr/>
         </p:nvSpPr>
@@ -24107,7 +24325,7 @@
       </p:sp>
       <p:sp>
         <p:nvSpPr>
-          <p:cNvPr id="1439622024" name="TextBox 19"/>
+          <p:cNvPr id="870031337" name="TextBox 19"/>
           <p:cNvSpPr txBox="1"/>
           <p:nvPr/>
         </p:nvSpPr>
@@ -24152,7 +24370,7 @@
       </p:sp>
       <p:sp>
         <p:nvSpPr>
-          <p:cNvPr id="1272249767" name="Rounded Rectangle 20"/>
+          <p:cNvPr id="1145044412" name="Rounded Rectangle 20"/>
           <p:cNvSpPr/>
           <p:nvPr/>
         </p:nvSpPr>
@@ -24202,7 +24420,7 @@
       </p:sp>
       <p:sp>
         <p:nvSpPr>
-          <p:cNvPr id="900205826" name="Oval 21"/>
+          <p:cNvPr id="830484814" name="Oval 21"/>
           <p:cNvSpPr/>
           <p:nvPr/>
         </p:nvSpPr>
@@ -24256,7 +24474,7 @@
       </p:sp>
       <p:sp>
         <p:nvSpPr>
-          <p:cNvPr id="786368276" name="TextBox 22"/>
+          <p:cNvPr id="257656417" name="TextBox 22"/>
           <p:cNvSpPr txBox="1"/>
           <p:nvPr/>
         </p:nvSpPr>
@@ -24294,7 +24512,7 @@
       </p:sp>
       <p:sp>
         <p:nvSpPr>
-          <p:cNvPr id="1751641555" name="TextBox 23"/>
+          <p:cNvPr id="615947785" name="TextBox 23"/>
           <p:cNvSpPr txBox="1"/>
           <p:nvPr/>
         </p:nvSpPr>
@@ -24339,7 +24557,7 @@
       </p:sp>
       <p:sp>
         <p:nvSpPr>
-          <p:cNvPr id="1628888425" name="Rounded Rectangle 24"/>
+          <p:cNvPr id="537382063" name="Rounded Rectangle 24"/>
           <p:cNvSpPr/>
           <p:nvPr/>
         </p:nvSpPr>
@@ -24389,7 +24607,7 @@
       </p:sp>
       <p:sp>
         <p:nvSpPr>
-          <p:cNvPr id="111495329" name="Oval 25"/>
+          <p:cNvPr id="1245083270" name="Oval 25"/>
           <p:cNvSpPr/>
           <p:nvPr/>
         </p:nvSpPr>
@@ -24443,7 +24661,7 @@
       </p:sp>
       <p:sp>
         <p:nvSpPr>
-          <p:cNvPr id="110089200" name="TextBox 26"/>
+          <p:cNvPr id="290123285" name="TextBox 26"/>
           <p:cNvSpPr txBox="1"/>
           <p:nvPr/>
         </p:nvSpPr>
@@ -24481,7 +24699,7 @@
       </p:sp>
       <p:sp>
         <p:nvSpPr>
-          <p:cNvPr id="1066929033" name="TextBox 27"/>
+          <p:cNvPr id="567219676" name="TextBox 27"/>
           <p:cNvSpPr txBox="1"/>
           <p:nvPr/>
         </p:nvSpPr>
@@ -24526,7 +24744,7 @@
       </p:sp>
       <p:sp>
         <p:nvSpPr>
-          <p:cNvPr id="1593430492" name="TextBox 28"/>
+          <p:cNvPr id="409816606" name="TextBox 28"/>
           <p:cNvSpPr txBox="1"/>
           <p:nvPr/>
         </p:nvSpPr>
@@ -24564,7 +24782,7 @@
       </p:sp>
       <p:sp>
         <p:nvSpPr>
-          <p:cNvPr id="1788353683" name="Rounded Rectangle 29"/>
+          <p:cNvPr id="342268117" name="Rounded Rectangle 29"/>
           <p:cNvSpPr/>
           <p:nvPr/>
         </p:nvSpPr>
@@ -24614,7 +24832,7 @@
       </p:sp>
       <p:sp>
         <p:nvSpPr>
-          <p:cNvPr id="1660418361" name="TextBox 30"/>
+          <p:cNvPr id="877206562" name="TextBox 30"/>
           <p:cNvSpPr txBox="1"/>
           <p:nvPr/>
         </p:nvSpPr>
@@ -24652,7 +24870,7 @@
       </p:sp>
       <p:sp>
         <p:nvSpPr>
-          <p:cNvPr id="1240897348" name="TextBox 31"/>
+          <p:cNvPr id="1720220731" name="TextBox 31"/>
           <p:cNvSpPr txBox="1"/>
           <p:nvPr/>
         </p:nvSpPr>
@@ -24711,7 +24929,7 @@
       </p:sp>
       <p:sp>
         <p:nvSpPr>
-          <p:cNvPr id="683476477" name="Rounded Rectangle 32"/>
+          <p:cNvPr id="1542598980" name="Rounded Rectangle 32"/>
           <p:cNvSpPr/>
           <p:nvPr/>
         </p:nvSpPr>
@@ -24761,7 +24979,7 @@
       </p:sp>
       <p:sp>
         <p:nvSpPr>
-          <p:cNvPr id="1521422467" name="TextBox 33"/>
+          <p:cNvPr id="824169201" name="TextBox 33"/>
           <p:cNvSpPr txBox="1"/>
           <p:nvPr/>
         </p:nvSpPr>
@@ -24799,7 +25017,7 @@
       </p:sp>
       <p:sp>
         <p:nvSpPr>
-          <p:cNvPr id="457503247" name="TextBox 34"/>
+          <p:cNvPr id="178681776" name="TextBox 34"/>
           <p:cNvSpPr txBox="1"/>
           <p:nvPr/>
         </p:nvSpPr>
@@ -24851,7 +25069,7 @@
       </p:sp>
       <p:sp>
         <p:nvSpPr>
-          <p:cNvPr id="810049066" name="Rounded Rectangle 35"/>
+          <p:cNvPr id="1471206501" name="Rounded Rectangle 35"/>
           <p:cNvSpPr/>
           <p:nvPr/>
         </p:nvSpPr>
@@ -24901,7 +25119,7 @@
       </p:sp>
       <p:sp>
         <p:nvSpPr>
-          <p:cNvPr id="127845682" name="TextBox 36"/>
+          <p:cNvPr id="2064336401" name="TextBox 36"/>
           <p:cNvSpPr txBox="1"/>
           <p:nvPr/>
         </p:nvSpPr>
@@ -24939,7 +25157,7 @@
       </p:sp>
       <p:sp>
         <p:nvSpPr>
-          <p:cNvPr id="17528259" name="TextBox 37"/>
+          <p:cNvPr id="2089693063" name="TextBox 37"/>
           <p:cNvSpPr txBox="1"/>
           <p:nvPr/>
         </p:nvSpPr>
@@ -24984,7 +25202,7 @@
       </p:sp>
       <p:sp>
         <p:nvSpPr>
-          <p:cNvPr id="390260149" name="Rounded Rectangle 38"/>
+          <p:cNvPr id="1599118566" name="Rounded Rectangle 38"/>
           <p:cNvSpPr/>
           <p:nvPr/>
         </p:nvSpPr>
@@ -25034,7 +25252,7 @@
       </p:sp>
       <p:sp>
         <p:nvSpPr>
-          <p:cNvPr id="2107653546" name="TextBox 39"/>
+          <p:cNvPr id="1632881502" name="TextBox 39"/>
           <p:cNvSpPr txBox="1"/>
           <p:nvPr/>
         </p:nvSpPr>
@@ -25072,7 +25290,7 @@
       </p:sp>
       <p:sp>
         <p:nvSpPr>
-          <p:cNvPr id="1743299397" name="TextBox 40"/>
+          <p:cNvPr id="902201982" name="TextBox 40"/>
           <p:cNvSpPr txBox="1"/>
           <p:nvPr/>
         </p:nvSpPr>
@@ -25157,7 +25375,7 @@
       </p:grpSpPr>
       <p:sp>
         <p:nvSpPr>
-          <p:cNvPr id="608123070" name="Oval 1"/>
+          <p:cNvPr id="1408027065" name="Oval 1"/>
           <p:cNvSpPr/>
           <p:nvPr/>
         </p:nvSpPr>
@@ -25211,7 +25429,7 @@
       </p:sp>
       <p:sp>
         <p:nvSpPr>
-          <p:cNvPr id="1729788256" name="TextBox 2"/>
+          <p:cNvPr id="1975138537" name="TextBox 2"/>
           <p:cNvSpPr txBox="1"/>
           <p:nvPr/>
         </p:nvSpPr>
@@ -25249,7 +25467,7 @@
       </p:sp>
       <p:sp>
         <p:nvSpPr>
-          <p:cNvPr id="478793592" name="TextBox 3"/>
+          <p:cNvPr id="502450910" name="TextBox 3"/>
           <p:cNvSpPr txBox="1"/>
           <p:nvPr/>
         </p:nvSpPr>
@@ -25287,7 +25505,7 @@
       </p:sp>
       <p:sp>
         <p:nvSpPr>
-          <p:cNvPr id="315014460" name="Rectangle 4"/>
+          <p:cNvPr id="855372714" name="Rectangle 4"/>
           <p:cNvSpPr/>
           <p:nvPr/>
         </p:nvSpPr>
@@ -25333,7 +25551,7 @@
       </p:sp>
       <p:sp>
         <p:nvSpPr>
-          <p:cNvPr id="1708116273" name="TextBox 5"/>
+          <p:cNvPr id="1026721846" name="TextBox 5"/>
           <p:cNvSpPr txBox="1"/>
           <p:nvPr/>
         </p:nvSpPr>
@@ -25371,7 +25589,7 @@
       </p:sp>
       <p:sp>
         <p:nvSpPr>
-          <p:cNvPr id="1310934008" name="Rounded Rectangle 6"/>
+          <p:cNvPr id="1962217207" name="Rounded Rectangle 6"/>
           <p:cNvSpPr/>
           <p:nvPr/>
         </p:nvSpPr>
@@ -25421,7 +25639,7 @@
       </p:sp>
       <p:sp>
         <p:nvSpPr>
-          <p:cNvPr id="2063994895" name="Oval 7"/>
+          <p:cNvPr id="1959110451" name="Oval 7"/>
           <p:cNvSpPr/>
           <p:nvPr/>
         </p:nvSpPr>
@@ -25475,7 +25693,7 @@
       </p:sp>
       <p:sp>
         <p:nvSpPr>
-          <p:cNvPr id="782439270" name="TextBox 8"/>
+          <p:cNvPr id="1386755490" name="TextBox 8"/>
           <p:cNvSpPr txBox="1"/>
           <p:nvPr/>
         </p:nvSpPr>
@@ -25513,7 +25731,7 @@
       </p:sp>
       <p:sp>
         <p:nvSpPr>
-          <p:cNvPr id="1461304529" name="TextBox 9"/>
+          <p:cNvPr id="204986360" name="TextBox 9"/>
           <p:cNvSpPr txBox="1"/>
           <p:nvPr/>
         </p:nvSpPr>
@@ -25558,7 +25776,7 @@
       </p:sp>
       <p:sp>
         <p:nvSpPr>
-          <p:cNvPr id="1665138317" name="Right Arrow 10"/>
+          <p:cNvPr id="1992282927" name="Right Arrow 10"/>
           <p:cNvSpPr/>
           <p:nvPr/>
         </p:nvSpPr>
@@ -25607,7 +25825,7 @@
       </p:sp>
       <p:sp>
         <p:nvSpPr>
-          <p:cNvPr id="1128557199" name="Rounded Rectangle 11"/>
+          <p:cNvPr id="37432918" name="Rounded Rectangle 11"/>
           <p:cNvSpPr/>
           <p:nvPr/>
         </p:nvSpPr>
@@ -25657,7 +25875,7 @@
       </p:sp>
       <p:sp>
         <p:nvSpPr>
-          <p:cNvPr id="191642301" name="Oval 12"/>
+          <p:cNvPr id="343468381" name="Oval 12"/>
           <p:cNvSpPr/>
           <p:nvPr/>
         </p:nvSpPr>
@@ -25711,7 +25929,7 @@
       </p:sp>
       <p:sp>
         <p:nvSpPr>
-          <p:cNvPr id="430494147" name="TextBox 13"/>
+          <p:cNvPr id="971539996" name="TextBox 13"/>
           <p:cNvSpPr txBox="1"/>
           <p:nvPr/>
         </p:nvSpPr>
@@ -25749,7 +25967,7 @@
       </p:sp>
       <p:sp>
         <p:nvSpPr>
-          <p:cNvPr id="609199557" name="TextBox 14"/>
+          <p:cNvPr id="789548400" name="TextBox 14"/>
           <p:cNvSpPr txBox="1"/>
           <p:nvPr/>
         </p:nvSpPr>
@@ -25794,7 +26012,7 @@
       </p:sp>
       <p:sp>
         <p:nvSpPr>
-          <p:cNvPr id="1905011599" name="Right Arrow 15"/>
+          <p:cNvPr id="889513221" name="Right Arrow 15"/>
           <p:cNvSpPr/>
           <p:nvPr/>
         </p:nvSpPr>
@@ -25843,7 +26061,7 @@
       </p:sp>
       <p:sp>
         <p:nvSpPr>
-          <p:cNvPr id="61753624" name="Rounded Rectangle 16"/>
+          <p:cNvPr id="1477851139" name="Rounded Rectangle 16"/>
           <p:cNvSpPr/>
           <p:nvPr/>
         </p:nvSpPr>
@@ -25893,7 +26111,7 @@
       </p:sp>
       <p:sp>
         <p:nvSpPr>
-          <p:cNvPr id="1131789522" name="Oval 17"/>
+          <p:cNvPr id="1452203758" name="Oval 17"/>
           <p:cNvSpPr/>
           <p:nvPr/>
         </p:nvSpPr>
@@ -25947,7 +26165,7 @@
       </p:sp>
       <p:sp>
         <p:nvSpPr>
-          <p:cNvPr id="1514480873" name="TextBox 18"/>
+          <p:cNvPr id="1407921998" name="TextBox 18"/>
           <p:cNvSpPr txBox="1"/>
           <p:nvPr/>
         </p:nvSpPr>
@@ -25985,7 +26203,7 @@
       </p:sp>
       <p:sp>
         <p:nvSpPr>
-          <p:cNvPr id="632661046" name="TextBox 19"/>
+          <p:cNvPr id="470801147" name="TextBox 19"/>
           <p:cNvSpPr txBox="1"/>
           <p:nvPr/>
         </p:nvSpPr>
@@ -26030,7 +26248,7 @@
       </p:sp>
       <p:sp>
         <p:nvSpPr>
-          <p:cNvPr id="1654152997" name="Right Arrow 20"/>
+          <p:cNvPr id="710646863" name="Right Arrow 20"/>
           <p:cNvSpPr/>
           <p:nvPr/>
         </p:nvSpPr>
@@ -26079,7 +26297,7 @@
       </p:sp>
       <p:sp>
         <p:nvSpPr>
-          <p:cNvPr id="66376208" name="Rounded Rectangle 21"/>
+          <p:cNvPr id="1916017588" name="Rounded Rectangle 21"/>
           <p:cNvSpPr/>
           <p:nvPr/>
         </p:nvSpPr>
@@ -26129,7 +26347,7 @@
       </p:sp>
       <p:sp>
         <p:nvSpPr>
-          <p:cNvPr id="482465481" name="Oval 22"/>
+          <p:cNvPr id="343092051" name="Oval 22"/>
           <p:cNvSpPr/>
           <p:nvPr/>
         </p:nvSpPr>
@@ -26183,7 +26401,7 @@
       </p:sp>
       <p:sp>
         <p:nvSpPr>
-          <p:cNvPr id="777366866" name="TextBox 23"/>
+          <p:cNvPr id="216128319" name="TextBox 23"/>
           <p:cNvSpPr txBox="1"/>
           <p:nvPr/>
         </p:nvSpPr>
@@ -26221,7 +26439,7 @@
       </p:sp>
       <p:sp>
         <p:nvSpPr>
-          <p:cNvPr id="1419427103" name="TextBox 24"/>
+          <p:cNvPr id="978761669" name="TextBox 24"/>
           <p:cNvSpPr txBox="1"/>
           <p:nvPr/>
         </p:nvSpPr>
@@ -26266,7 +26484,7 @@
       </p:sp>
       <p:sp>
         <p:nvSpPr>
-          <p:cNvPr id="308954572" name="TextBox 25"/>
+          <p:cNvPr id="567659079" name="TextBox 25"/>
           <p:cNvSpPr txBox="1"/>
           <p:nvPr/>
         </p:nvSpPr>
@@ -26304,7 +26522,7 @@
       </p:sp>
       <p:sp>
         <p:nvSpPr>
-          <p:cNvPr id="1107822585" name="Rounded Rectangle 26"/>
+          <p:cNvPr id="366560845" name="Rounded Rectangle 26"/>
           <p:cNvSpPr/>
           <p:nvPr/>
         </p:nvSpPr>
@@ -26354,7 +26572,7 @@
       </p:sp>
       <p:sp>
         <p:nvSpPr>
-          <p:cNvPr id="1258055162" name="Rounded Rectangle 27"/>
+          <p:cNvPr id="1542380491" name="Rounded Rectangle 27"/>
           <p:cNvSpPr/>
           <p:nvPr/>
         </p:nvSpPr>
@@ -26410,7 +26628,7 @@
       </p:sp>
       <p:sp>
         <p:nvSpPr>
-          <p:cNvPr id="2056649123" name="TextBox 28"/>
+          <p:cNvPr id="418627805" name="TextBox 28"/>
           <p:cNvSpPr txBox="1"/>
           <p:nvPr/>
         </p:nvSpPr>
@@ -26462,7 +26680,7 @@
       </p:sp>
       <p:sp>
         <p:nvSpPr>
-          <p:cNvPr id="139615674" name="TextBox 29"/>
+          <p:cNvPr id="499927525" name="TextBox 29"/>
           <p:cNvSpPr txBox="1"/>
           <p:nvPr/>
         </p:nvSpPr>
@@ -26500,7 +26718,7 @@
       </p:sp>
       <p:sp>
         <p:nvSpPr>
-          <p:cNvPr id="1239259965" name="Rounded Rectangle 30"/>
+          <p:cNvPr id="68529653" name="Rounded Rectangle 30"/>
           <p:cNvSpPr/>
           <p:nvPr/>
         </p:nvSpPr>
@@ -26550,7 +26768,7 @@
       </p:sp>
       <p:sp>
         <p:nvSpPr>
-          <p:cNvPr id="1362731376" name="Rounded Rectangle 31"/>
+          <p:cNvPr id="1631654485" name="Rounded Rectangle 31"/>
           <p:cNvSpPr/>
           <p:nvPr/>
         </p:nvSpPr>
@@ -26606,7 +26824,7 @@
       </p:sp>
       <p:sp>
         <p:nvSpPr>
-          <p:cNvPr id="1983331414" name="TextBox 32"/>
+          <p:cNvPr id="85100266" name="TextBox 32"/>
           <p:cNvSpPr txBox="1"/>
           <p:nvPr/>
         </p:nvSpPr>
@@ -26658,7 +26876,7 @@
       </p:sp>
       <p:sp>
         <p:nvSpPr>
-          <p:cNvPr id="1307854395" name="TextBox 33"/>
+          <p:cNvPr id="499400333" name="TextBox 33"/>
           <p:cNvSpPr txBox="1"/>
           <p:nvPr/>
         </p:nvSpPr>
@@ -26696,7 +26914,7 @@
       </p:sp>
       <p:sp>
         <p:nvSpPr>
-          <p:cNvPr id="1307264530" name="Rounded Rectangle 34"/>
+          <p:cNvPr id="858110823" name="Rounded Rectangle 34"/>
           <p:cNvSpPr/>
           <p:nvPr/>
         </p:nvSpPr>
@@ -26746,7 +26964,7 @@
       </p:sp>
       <p:sp>
         <p:nvSpPr>
-          <p:cNvPr id="559068467" name="Rounded Rectangle 35"/>
+          <p:cNvPr id="172424952" name="Rounded Rectangle 35"/>
           <p:cNvSpPr/>
           <p:nvPr/>
         </p:nvSpPr>
@@ -26802,7 +27020,7 @@
       </p:sp>
       <p:sp>
         <p:nvSpPr>
-          <p:cNvPr id="1657890595" name="TextBox 36"/>
+          <p:cNvPr id="2137777732" name="TextBox 36"/>
           <p:cNvSpPr txBox="1"/>
           <p:nvPr/>
         </p:nvSpPr>
@@ -26854,7 +27072,7 @@
       </p:sp>
       <p:sp>
         <p:nvSpPr>
-          <p:cNvPr id="1842237545" name="TextBox 37"/>
+          <p:cNvPr id="1198686228" name="TextBox 37"/>
           <p:cNvSpPr txBox="1"/>
           <p:nvPr/>
         </p:nvSpPr>
@@ -26932,7 +27150,7 @@
       </p:grpSpPr>
       <p:sp>
         <p:nvSpPr>
-          <p:cNvPr id="437258531" name="Oval 1"/>
+          <p:cNvPr id="545403540" name="Oval 1"/>
           <p:cNvSpPr/>
           <p:nvPr/>
         </p:nvSpPr>
@@ -26986,7 +27204,7 @@
       </p:sp>
       <p:sp>
         <p:nvSpPr>
-          <p:cNvPr id="857867825" name="TextBox 2"/>
+          <p:cNvPr id="1649165912" name="TextBox 2"/>
           <p:cNvSpPr txBox="1"/>
           <p:nvPr/>
         </p:nvSpPr>
@@ -27024,7 +27242,7 @@
       </p:sp>
       <p:sp>
         <p:nvSpPr>
-          <p:cNvPr id="1707794819" name="TextBox 3"/>
+          <p:cNvPr id="270481426" name="TextBox 3"/>
           <p:cNvSpPr txBox="1"/>
           <p:nvPr/>
         </p:nvSpPr>
@@ -27062,7 +27280,7 @@
       </p:sp>
       <p:sp>
         <p:nvSpPr>
-          <p:cNvPr id="1197530484" name="Rectangle 4"/>
+          <p:cNvPr id="1089057236" name="Rectangle 4"/>
           <p:cNvSpPr/>
           <p:nvPr/>
         </p:nvSpPr>
@@ -27108,7 +27326,7 @@
       </p:sp>
       <p:sp>
         <p:nvSpPr>
-          <p:cNvPr id="1186973491" name="TextBox 5"/>
+          <p:cNvPr id="2085439905" name="TextBox 5"/>
           <p:cNvSpPr txBox="1"/>
           <p:nvPr/>
         </p:nvSpPr>
@@ -27146,7 +27364,7 @@
       </p:sp>
       <p:sp>
         <p:nvSpPr>
-          <p:cNvPr id="1856851205" name="Rounded Rectangle 6"/>
+          <p:cNvPr id="1079443688" name="Rounded Rectangle 6"/>
           <p:cNvSpPr/>
           <p:nvPr/>
         </p:nvSpPr>
@@ -27196,7 +27414,7 @@
       </p:sp>
       <p:sp>
         <p:nvSpPr>
-          <p:cNvPr id="597075387" name="Oval 7"/>
+          <p:cNvPr id="747201921" name="Oval 7"/>
           <p:cNvSpPr/>
           <p:nvPr/>
         </p:nvSpPr>
@@ -27250,7 +27468,7 @@
       </p:sp>
       <p:sp>
         <p:nvSpPr>
-          <p:cNvPr id="2122305350" name="TextBox 8"/>
+          <p:cNvPr id="2144378836" name="TextBox 8"/>
           <p:cNvSpPr txBox="1"/>
           <p:nvPr/>
         </p:nvSpPr>
@@ -27288,7 +27506,7 @@
       </p:sp>
       <p:sp>
         <p:nvSpPr>
-          <p:cNvPr id="2044498239" name="TextBox 9"/>
+          <p:cNvPr id="1092685801" name="TextBox 9"/>
           <p:cNvSpPr txBox="1"/>
           <p:nvPr/>
         </p:nvSpPr>
@@ -27333,7 +27551,7 @@
       </p:sp>
       <p:sp>
         <p:nvSpPr>
-          <p:cNvPr id="755302964" name="Right Arrow 10"/>
+          <p:cNvPr id="1186070086" name="Right Arrow 10"/>
           <p:cNvSpPr/>
           <p:nvPr/>
         </p:nvSpPr>
@@ -27382,7 +27600,7 @@
       </p:sp>
       <p:sp>
         <p:nvSpPr>
-          <p:cNvPr id="1577670849" name="Rounded Rectangle 11"/>
+          <p:cNvPr id="1162294088" name="Rounded Rectangle 11"/>
           <p:cNvSpPr/>
           <p:nvPr/>
         </p:nvSpPr>
@@ -27432,7 +27650,7 @@
       </p:sp>
       <p:sp>
         <p:nvSpPr>
-          <p:cNvPr id="2124694844" name="Oval 12"/>
+          <p:cNvPr id="1800650207" name="Oval 12"/>
           <p:cNvSpPr/>
           <p:nvPr/>
         </p:nvSpPr>
@@ -27486,7 +27704,7 @@
       </p:sp>
       <p:sp>
         <p:nvSpPr>
-          <p:cNvPr id="692902603" name="TextBox 13"/>
+          <p:cNvPr id="1255223157" name="TextBox 13"/>
           <p:cNvSpPr txBox="1"/>
           <p:nvPr/>
         </p:nvSpPr>
@@ -27524,7 +27742,7 @@
       </p:sp>
       <p:sp>
         <p:nvSpPr>
-          <p:cNvPr id="1776232416" name="TextBox 14"/>
+          <p:cNvPr id="1851748527" name="TextBox 14"/>
           <p:cNvSpPr txBox="1"/>
           <p:nvPr/>
         </p:nvSpPr>
@@ -27569,7 +27787,7 @@
       </p:sp>
       <p:sp>
         <p:nvSpPr>
-          <p:cNvPr id="1439365253" name="Right Arrow 15"/>
+          <p:cNvPr id="1691280467" name="Right Arrow 15"/>
           <p:cNvSpPr/>
           <p:nvPr/>
         </p:nvSpPr>
@@ -27618,7 +27836,7 @@
       </p:sp>
       <p:sp>
         <p:nvSpPr>
-          <p:cNvPr id="253394520" name="Rounded Rectangle 16"/>
+          <p:cNvPr id="513588426" name="Rounded Rectangle 16"/>
           <p:cNvSpPr/>
           <p:nvPr/>
         </p:nvSpPr>
@@ -27668,7 +27886,7 @@
       </p:sp>
       <p:sp>
         <p:nvSpPr>
-          <p:cNvPr id="1663251299" name="Oval 17"/>
+          <p:cNvPr id="1027567718" name="Oval 17"/>
           <p:cNvSpPr/>
           <p:nvPr/>
         </p:nvSpPr>
@@ -27722,7 +27940,7 @@
       </p:sp>
       <p:sp>
         <p:nvSpPr>
-          <p:cNvPr id="347990879" name="TextBox 18"/>
+          <p:cNvPr id="1230374974" name="TextBox 18"/>
           <p:cNvSpPr txBox="1"/>
           <p:nvPr/>
         </p:nvSpPr>
@@ -27760,7 +27978,7 @@
       </p:sp>
       <p:sp>
         <p:nvSpPr>
-          <p:cNvPr id="176533009" name="TextBox 19"/>
+          <p:cNvPr id="1686283884" name="TextBox 19"/>
           <p:cNvSpPr txBox="1"/>
           <p:nvPr/>
         </p:nvSpPr>
@@ -27805,7 +28023,7 @@
       </p:sp>
       <p:sp>
         <p:nvSpPr>
-          <p:cNvPr id="972495044" name="Right Arrow 20"/>
+          <p:cNvPr id="842793533" name="Right Arrow 20"/>
           <p:cNvSpPr/>
           <p:nvPr/>
         </p:nvSpPr>
@@ -27854,7 +28072,7 @@
       </p:sp>
       <p:sp>
         <p:nvSpPr>
-          <p:cNvPr id="666956314" name="Rounded Rectangle 21"/>
+          <p:cNvPr id="147624718" name="Rounded Rectangle 21"/>
           <p:cNvSpPr/>
           <p:nvPr/>
         </p:nvSpPr>
@@ -27904,7 +28122,7 @@
       </p:sp>
       <p:sp>
         <p:nvSpPr>
-          <p:cNvPr id="264370599" name="Oval 22"/>
+          <p:cNvPr id="1172035776" name="Oval 22"/>
           <p:cNvSpPr/>
           <p:nvPr/>
         </p:nvSpPr>
@@ -27958,7 +28176,7 @@
       </p:sp>
       <p:sp>
         <p:nvSpPr>
-          <p:cNvPr id="444119934" name="TextBox 23"/>
+          <p:cNvPr id="1334759726" name="TextBox 23"/>
           <p:cNvSpPr txBox="1"/>
           <p:nvPr/>
         </p:nvSpPr>
@@ -27996,7 +28214,7 @@
       </p:sp>
       <p:sp>
         <p:nvSpPr>
-          <p:cNvPr id="1419942705" name="TextBox 24"/>
+          <p:cNvPr id="2076166781" name="TextBox 24"/>
           <p:cNvSpPr txBox="1"/>
           <p:nvPr/>
         </p:nvSpPr>
@@ -28041,7 +28259,7 @@
       </p:sp>
       <p:sp>
         <p:nvSpPr>
-          <p:cNvPr id="1520600292" name="TextBox 25"/>
+          <p:cNvPr id="120852005" name="TextBox 25"/>
           <p:cNvSpPr txBox="1"/>
           <p:nvPr/>
         </p:nvSpPr>
@@ -28079,7 +28297,7 @@
       </p:sp>
       <p:sp>
         <p:nvSpPr>
-          <p:cNvPr id="1597382079" name="Rounded Rectangle 26"/>
+          <p:cNvPr id="2083456561" name="Rounded Rectangle 26"/>
           <p:cNvSpPr/>
           <p:nvPr/>
         </p:nvSpPr>
@@ -28129,7 +28347,7 @@
       </p:sp>
       <p:sp>
         <p:nvSpPr>
-          <p:cNvPr id="1357739572" name="TextBox 27"/>
+          <p:cNvPr id="1824342980" name="TextBox 27"/>
           <p:cNvSpPr txBox="1"/>
           <p:nvPr/>
         </p:nvSpPr>
@@ -28167,7 +28385,7 @@
       </p:sp>
       <p:sp>
         <p:nvSpPr>
-          <p:cNvPr id="966481492" name="TextBox 28"/>
+          <p:cNvPr id="838852660" name="TextBox 28"/>
           <p:cNvSpPr txBox="1"/>
           <p:nvPr/>
         </p:nvSpPr>
@@ -28205,7 +28423,7 @@
       </p:sp>
       <p:sp>
         <p:nvSpPr>
-          <p:cNvPr id="1083197650" name="TextBox 29"/>
+          <p:cNvPr id="700269833" name="TextBox 29"/>
           <p:cNvSpPr txBox="1"/>
           <p:nvPr/>
         </p:nvSpPr>
@@ -28257,7 +28475,7 @@
       </p:sp>
       <p:sp>
         <p:nvSpPr>
-          <p:cNvPr id="152108980" name="Rounded Rectangle 30"/>
+          <p:cNvPr id="357027446" name="Rounded Rectangle 30"/>
           <p:cNvSpPr/>
           <p:nvPr/>
         </p:nvSpPr>
@@ -28307,7 +28525,7 @@
       </p:sp>
       <p:sp>
         <p:nvSpPr>
-          <p:cNvPr id="65221873" name="TextBox 31"/>
+          <p:cNvPr id="841191861" name="TextBox 31"/>
           <p:cNvSpPr txBox="1"/>
           <p:nvPr/>
         </p:nvSpPr>
@@ -28345,7 +28563,7 @@
       </p:sp>
       <p:sp>
         <p:nvSpPr>
-          <p:cNvPr id="987401910" name="TextBox 32"/>
+          <p:cNvPr id="1268477141" name="TextBox 32"/>
           <p:cNvSpPr txBox="1"/>
           <p:nvPr/>
         </p:nvSpPr>
@@ -28383,7 +28601,7 @@
       </p:sp>
       <p:sp>
         <p:nvSpPr>
-          <p:cNvPr id="1086313394" name="TextBox 33"/>
+          <p:cNvPr id="1906845412" name="TextBox 33"/>
           <p:cNvSpPr txBox="1"/>
           <p:nvPr/>
         </p:nvSpPr>
@@ -28428,7 +28646,7 @@
       </p:sp>
       <p:sp>
         <p:nvSpPr>
-          <p:cNvPr id="1472901456" name="Rounded Rectangle 34"/>
+          <p:cNvPr id="919089181" name="Rounded Rectangle 34"/>
           <p:cNvSpPr/>
           <p:nvPr/>
         </p:nvSpPr>
@@ -28478,7 +28696,7 @@
       </p:sp>
       <p:sp>
         <p:nvSpPr>
-          <p:cNvPr id="1112907718" name="TextBox 35"/>
+          <p:cNvPr id="1947488099" name="TextBox 35"/>
           <p:cNvSpPr txBox="1"/>
           <p:nvPr/>
         </p:nvSpPr>
@@ -28516,7 +28734,7 @@
       </p:sp>
       <p:sp>
         <p:nvSpPr>
-          <p:cNvPr id="168558320" name="TextBox 36"/>
+          <p:cNvPr id="1888222426" name="TextBox 36"/>
           <p:cNvSpPr txBox="1"/>
           <p:nvPr/>
         </p:nvSpPr>
@@ -28554,7 +28772,7 @@
       </p:sp>
       <p:sp>
         <p:nvSpPr>
-          <p:cNvPr id="1298461184" name="TextBox 37"/>
+          <p:cNvPr id="106566673" name="TextBox 37"/>
           <p:cNvSpPr txBox="1"/>
           <p:nvPr/>
         </p:nvSpPr>
@@ -28606,7 +28824,7 @@
       </p:sp>
       <p:sp>
         <p:nvSpPr>
-          <p:cNvPr id="867342001" name="Rounded Rectangle 38"/>
+          <p:cNvPr id="1914069017" name="Rounded Rectangle 38"/>
           <p:cNvSpPr/>
           <p:nvPr/>
         </p:nvSpPr>
@@ -28656,7 +28874,7 @@
       </p:sp>
       <p:sp>
         <p:nvSpPr>
-          <p:cNvPr id="762611769" name="TextBox 39"/>
+          <p:cNvPr id="20930631" name="TextBox 39"/>
           <p:cNvSpPr txBox="1"/>
           <p:nvPr/>
         </p:nvSpPr>
@@ -28694,7 +28912,7 @@
       </p:sp>
       <p:sp>
         <p:nvSpPr>
-          <p:cNvPr id="569947619" name="TextBox 40"/>
+          <p:cNvPr id="666818670" name="TextBox 40"/>
           <p:cNvSpPr txBox="1"/>
           <p:nvPr/>
         </p:nvSpPr>
@@ -28732,7 +28950,7 @@
       </p:sp>
       <p:sp>
         <p:nvSpPr>
-          <p:cNvPr id="1421299054" name="TextBox 41"/>
+          <p:cNvPr id="1517760963" name="TextBox 41"/>
           <p:cNvSpPr txBox="1"/>
           <p:nvPr/>
         </p:nvSpPr>
